--- a/лаб 2.pptx
+++ b/лаб 2.pptx
@@ -728,7 +728,7 @@
           </a:ln>
           <a:extLst>
             <a:ext uri="{C572A759-6A51-4108-AA02-DFA0A04FC94B}">
-              <ma14:wrappingTextBoxFlag xmlns="" xmlns:m="http://schemas.openxmlformats.org/officeDocument/2006/math" xmlns:a14="http://schemas.microsoft.com/office/drawing/2010/main" xmlns:ma14="http://schemas.microsoft.com/office/mac/drawingml/2011/main" val="1"/>
+              <ma14:wrappingTextBoxFlag xmlns:ma14="http://schemas.microsoft.com/office/mac/drawingml/2011/main" xmlns:a14="http://schemas.microsoft.com/office/drawing/2010/main" xmlns:m="http://schemas.openxmlformats.org/officeDocument/2006/math" xmlns="" val="1"/>
             </a:ext>
           </a:extLst>
         </p:spPr>
@@ -1183,7 +1183,7 @@
           </a:ln>
           <a:extLst>
             <a:ext uri="{C572A759-6A51-4108-AA02-DFA0A04FC94B}">
-              <ma14:wrappingTextBoxFlag xmlns="" xmlns:m="http://schemas.openxmlformats.org/officeDocument/2006/math" xmlns:a14="http://schemas.microsoft.com/office/drawing/2010/main" xmlns:ma14="http://schemas.microsoft.com/office/mac/drawingml/2011/main" val="1"/>
+              <ma14:wrappingTextBoxFlag xmlns:ma14="http://schemas.microsoft.com/office/mac/drawingml/2011/main" xmlns:a14="http://schemas.microsoft.com/office/drawing/2010/main" xmlns:m="http://schemas.openxmlformats.org/officeDocument/2006/math" xmlns="" val="1"/>
             </a:ext>
           </a:extLst>
         </p:spPr>
@@ -1496,7 +1496,7 @@
           </a:ln>
           <a:extLst>
             <a:ext uri="{C572A759-6A51-4108-AA02-DFA0A04FC94B}">
-              <ma14:wrappingTextBoxFlag xmlns="" xmlns:m="http://schemas.openxmlformats.org/officeDocument/2006/math" xmlns:a14="http://schemas.microsoft.com/office/drawing/2010/main" xmlns:ma14="http://schemas.microsoft.com/office/mac/drawingml/2011/main" val="1"/>
+              <ma14:wrappingTextBoxFlag xmlns:ma14="http://schemas.microsoft.com/office/mac/drawingml/2011/main" xmlns:a14="http://schemas.microsoft.com/office/drawing/2010/main" xmlns:m="http://schemas.openxmlformats.org/officeDocument/2006/math" xmlns="" val="1"/>
             </a:ext>
           </a:extLst>
         </p:spPr>
@@ -1847,7 +1847,7 @@
           </a:ln>
           <a:extLst>
             <a:ext uri="{C572A759-6A51-4108-AA02-DFA0A04FC94B}">
-              <ma14:wrappingTextBoxFlag xmlns="" xmlns:m="http://schemas.openxmlformats.org/officeDocument/2006/math" xmlns:a14="http://schemas.microsoft.com/office/drawing/2010/main" xmlns:ma14="http://schemas.microsoft.com/office/mac/drawingml/2011/main" val="1"/>
+              <ma14:wrappingTextBoxFlag xmlns:ma14="http://schemas.microsoft.com/office/mac/drawingml/2011/main" xmlns:a14="http://schemas.microsoft.com/office/drawing/2010/main" xmlns:m="http://schemas.openxmlformats.org/officeDocument/2006/math" xmlns="" val="1"/>
             </a:ext>
           </a:extLst>
         </p:spPr>
@@ -1919,7 +1919,7 @@
           </a:ln>
           <a:extLst>
             <a:ext uri="{C572A759-6A51-4108-AA02-DFA0A04FC94B}">
-              <ma14:wrappingTextBoxFlag xmlns="" xmlns:m="http://schemas.openxmlformats.org/officeDocument/2006/math" xmlns:a14="http://schemas.microsoft.com/office/drawing/2010/main" xmlns:ma14="http://schemas.microsoft.com/office/mac/drawingml/2011/main" val="1"/>
+              <ma14:wrappingTextBoxFlag xmlns:ma14="http://schemas.microsoft.com/office/mac/drawingml/2011/main" xmlns:a14="http://schemas.microsoft.com/office/drawing/2010/main" xmlns:m="http://schemas.openxmlformats.org/officeDocument/2006/math" xmlns="" val="1"/>
             </a:ext>
           </a:extLst>
         </p:spPr>
@@ -2214,7 +2214,7 @@
           </a:ln>
           <a:extLst>
             <a:ext uri="{C572A759-6A51-4108-AA02-DFA0A04FC94B}">
-              <ma14:wrappingTextBoxFlag xmlns="" xmlns:m="http://schemas.openxmlformats.org/officeDocument/2006/math" xmlns:a14="http://schemas.microsoft.com/office/drawing/2010/main" xmlns:ma14="http://schemas.microsoft.com/office/mac/drawingml/2011/main" val="1"/>
+              <ma14:wrappingTextBoxFlag xmlns:ma14="http://schemas.microsoft.com/office/mac/drawingml/2011/main" xmlns:a14="http://schemas.microsoft.com/office/drawing/2010/main" xmlns:m="http://schemas.openxmlformats.org/officeDocument/2006/math" xmlns="" val="1"/>
             </a:ext>
           </a:extLst>
         </p:spPr>
@@ -2286,7 +2286,7 @@
           </a:ln>
           <a:extLst>
             <a:ext uri="{C572A759-6A51-4108-AA02-DFA0A04FC94B}">
-              <ma14:wrappingTextBoxFlag xmlns="" xmlns:m="http://schemas.openxmlformats.org/officeDocument/2006/math" xmlns:a14="http://schemas.microsoft.com/office/drawing/2010/main" xmlns:ma14="http://schemas.microsoft.com/office/mac/drawingml/2011/main" val="1"/>
+              <ma14:wrappingTextBoxFlag xmlns:ma14="http://schemas.microsoft.com/office/mac/drawingml/2011/main" xmlns:a14="http://schemas.microsoft.com/office/drawing/2010/main" xmlns:m="http://schemas.openxmlformats.org/officeDocument/2006/math" xmlns="" val="1"/>
             </a:ext>
           </a:extLst>
         </p:spPr>
@@ -2581,7 +2581,7 @@
           </a:ln>
           <a:extLst>
             <a:ext uri="{C572A759-6A51-4108-AA02-DFA0A04FC94B}">
-              <ma14:wrappingTextBoxFlag xmlns="" xmlns:m="http://schemas.openxmlformats.org/officeDocument/2006/math" xmlns:a14="http://schemas.microsoft.com/office/drawing/2010/main" xmlns:ma14="http://schemas.microsoft.com/office/mac/drawingml/2011/main" val="1"/>
+              <ma14:wrappingTextBoxFlag xmlns:ma14="http://schemas.microsoft.com/office/mac/drawingml/2011/main" xmlns:a14="http://schemas.microsoft.com/office/drawing/2010/main" xmlns:m="http://schemas.openxmlformats.org/officeDocument/2006/math" xmlns="" val="1"/>
             </a:ext>
           </a:extLst>
         </p:spPr>
@@ -2653,7 +2653,7 @@
           </a:ln>
           <a:extLst>
             <a:ext uri="{C572A759-6A51-4108-AA02-DFA0A04FC94B}">
-              <ma14:wrappingTextBoxFlag xmlns="" xmlns:m="http://schemas.openxmlformats.org/officeDocument/2006/math" xmlns:a14="http://schemas.microsoft.com/office/drawing/2010/main" xmlns:ma14="http://schemas.microsoft.com/office/mac/drawingml/2011/main" val="1"/>
+              <ma14:wrappingTextBoxFlag xmlns:ma14="http://schemas.microsoft.com/office/mac/drawingml/2011/main" xmlns:a14="http://schemas.microsoft.com/office/drawing/2010/main" xmlns:m="http://schemas.openxmlformats.org/officeDocument/2006/math" xmlns="" val="1"/>
             </a:ext>
           </a:extLst>
         </p:spPr>
@@ -2883,7 +2883,7 @@
           </a:ln>
           <a:extLst>
             <a:ext uri="{C572A759-6A51-4108-AA02-DFA0A04FC94B}">
-              <ma14:wrappingTextBoxFlag xmlns="" xmlns:m="http://schemas.openxmlformats.org/officeDocument/2006/math" xmlns:a14="http://schemas.microsoft.com/office/drawing/2010/main" xmlns:ma14="http://schemas.microsoft.com/office/mac/drawingml/2011/main" val="1"/>
+              <ma14:wrappingTextBoxFlag xmlns:ma14="http://schemas.microsoft.com/office/mac/drawingml/2011/main" xmlns:a14="http://schemas.microsoft.com/office/drawing/2010/main" xmlns:m="http://schemas.openxmlformats.org/officeDocument/2006/math" xmlns="" val="1"/>
             </a:ext>
           </a:extLst>
         </p:spPr>
@@ -3070,7 +3070,7 @@
           </a:ln>
           <a:extLst>
             <a:ext uri="{C572A759-6A51-4108-AA02-DFA0A04FC94B}">
-              <ma14:wrappingTextBoxFlag xmlns="" xmlns:m="http://schemas.openxmlformats.org/officeDocument/2006/math" xmlns:a14="http://schemas.microsoft.com/office/drawing/2010/main" xmlns:ma14="http://schemas.microsoft.com/office/mac/drawingml/2011/main" val="1"/>
+              <ma14:wrappingTextBoxFlag xmlns:ma14="http://schemas.microsoft.com/office/mac/drawingml/2011/main" xmlns:a14="http://schemas.microsoft.com/office/drawing/2010/main" xmlns:m="http://schemas.openxmlformats.org/officeDocument/2006/math" xmlns="" val="1"/>
             </a:ext>
           </a:extLst>
         </p:spPr>
@@ -3359,7 +3359,7 @@
           </a:ln>
           <a:extLst>
             <a:ext uri="{C572A759-6A51-4108-AA02-DFA0A04FC94B}">
-              <ma14:wrappingTextBoxFlag xmlns="" xmlns:m="http://schemas.openxmlformats.org/officeDocument/2006/math" xmlns:a14="http://schemas.microsoft.com/office/drawing/2010/main" xmlns:ma14="http://schemas.microsoft.com/office/mac/drawingml/2011/main" val="1"/>
+              <ma14:wrappingTextBoxFlag xmlns:ma14="http://schemas.microsoft.com/office/mac/drawingml/2011/main" xmlns:a14="http://schemas.microsoft.com/office/drawing/2010/main" xmlns:m="http://schemas.openxmlformats.org/officeDocument/2006/math" xmlns="" val="1"/>
             </a:ext>
           </a:extLst>
         </p:spPr>
@@ -3865,7 +3865,7 @@
           </a:ln>
           <a:extLst>
             <a:ext uri="{C572A759-6A51-4108-AA02-DFA0A04FC94B}">
-              <ma14:wrappingTextBoxFlag xmlns="" xmlns:m="http://schemas.openxmlformats.org/officeDocument/2006/math" xmlns:a14="http://schemas.microsoft.com/office/drawing/2010/main" xmlns:ma14="http://schemas.microsoft.com/office/mac/drawingml/2011/main" val="1"/>
+              <ma14:wrappingTextBoxFlag xmlns:ma14="http://schemas.microsoft.com/office/mac/drawingml/2011/main" xmlns:a14="http://schemas.microsoft.com/office/drawing/2010/main" xmlns:m="http://schemas.openxmlformats.org/officeDocument/2006/math" xmlns="" val="1"/>
             </a:ext>
           </a:extLst>
         </p:spPr>
@@ -4026,7 +4026,7 @@
           </a:ln>
           <a:extLst>
             <a:ext uri="{C572A759-6A51-4108-AA02-DFA0A04FC94B}">
-              <ma14:wrappingTextBoxFlag xmlns="" xmlns:m="http://schemas.openxmlformats.org/officeDocument/2006/math" xmlns:a14="http://schemas.microsoft.com/office/drawing/2010/main" xmlns:ma14="http://schemas.microsoft.com/office/mac/drawingml/2011/main" val="1"/>
+              <ma14:wrappingTextBoxFlag xmlns:ma14="http://schemas.microsoft.com/office/mac/drawingml/2011/main" xmlns:a14="http://schemas.microsoft.com/office/drawing/2010/main" xmlns:m="http://schemas.openxmlformats.org/officeDocument/2006/math" xmlns="" val="1"/>
             </a:ext>
           </a:extLst>
         </p:spPr>
@@ -4299,7 +4299,7 @@
           </a:ln>
           <a:extLst>
             <a:ext uri="{C572A759-6A51-4108-AA02-DFA0A04FC94B}">
-              <ma14:wrappingTextBoxFlag xmlns="" xmlns:m="http://schemas.openxmlformats.org/officeDocument/2006/math" xmlns:a14="http://schemas.microsoft.com/office/drawing/2010/main" xmlns:ma14="http://schemas.microsoft.com/office/mac/drawingml/2011/main" val="1"/>
+              <ma14:wrappingTextBoxFlag xmlns:ma14="http://schemas.microsoft.com/office/mac/drawingml/2011/main" xmlns:a14="http://schemas.microsoft.com/office/drawing/2010/main" xmlns:m="http://schemas.openxmlformats.org/officeDocument/2006/math" xmlns="" val="1"/>
             </a:ext>
           </a:extLst>
         </p:spPr>
@@ -4619,7 +4619,7 @@
           </a:ln>
           <a:extLst>
             <a:ext uri="{C572A759-6A51-4108-AA02-DFA0A04FC94B}">
-              <ma14:wrappingTextBoxFlag xmlns="" xmlns:m="http://schemas.openxmlformats.org/officeDocument/2006/math" xmlns:a14="http://schemas.microsoft.com/office/drawing/2010/main" xmlns:ma14="http://schemas.microsoft.com/office/mac/drawingml/2011/main" val="1"/>
+              <ma14:wrappingTextBoxFlag xmlns:ma14="http://schemas.microsoft.com/office/mac/drawingml/2011/main" xmlns:a14="http://schemas.microsoft.com/office/drawing/2010/main" xmlns:m="http://schemas.openxmlformats.org/officeDocument/2006/math" xmlns="" val="1"/>
             </a:ext>
           </a:extLst>
         </p:spPr>
@@ -4966,7 +4966,7 @@
           </a:ln>
           <a:extLst>
             <a:ext uri="{C572A759-6A51-4108-AA02-DFA0A04FC94B}">
-              <ma14:wrappingTextBoxFlag xmlns="" xmlns:m="http://schemas.openxmlformats.org/officeDocument/2006/math" xmlns:a14="http://schemas.microsoft.com/office/drawing/2010/main" xmlns:ma14="http://schemas.microsoft.com/office/mac/drawingml/2011/main" val="1"/>
+              <ma14:wrappingTextBoxFlag xmlns:ma14="http://schemas.microsoft.com/office/mac/drawingml/2011/main" xmlns:a14="http://schemas.microsoft.com/office/drawing/2010/main" xmlns:m="http://schemas.openxmlformats.org/officeDocument/2006/math" xmlns="" val="1"/>
             </a:ext>
           </a:extLst>
         </p:spPr>
@@ -5348,7 +5348,7 @@
           </a:ln>
           <a:extLst>
             <a:ext uri="{C572A759-6A51-4108-AA02-DFA0A04FC94B}">
-              <ma14:wrappingTextBoxFlag xmlns="" xmlns:m="http://schemas.openxmlformats.org/officeDocument/2006/math" xmlns:a14="http://schemas.microsoft.com/office/drawing/2010/main" xmlns:ma14="http://schemas.microsoft.com/office/mac/drawingml/2011/main" val="1"/>
+              <ma14:wrappingTextBoxFlag xmlns:ma14="http://schemas.microsoft.com/office/mac/drawingml/2011/main" xmlns:a14="http://schemas.microsoft.com/office/drawing/2010/main" xmlns:m="http://schemas.openxmlformats.org/officeDocument/2006/math" xmlns="" val="1"/>
             </a:ext>
           </a:extLst>
         </p:spPr>
@@ -5494,7 +5494,7 @@
           </a:ln>
           <a:extLst>
             <a:ext uri="{C572A759-6A51-4108-AA02-DFA0A04FC94B}">
-              <ma14:wrappingTextBoxFlag xmlns="" xmlns:m="http://schemas.openxmlformats.org/officeDocument/2006/math" xmlns:a14="http://schemas.microsoft.com/office/drawing/2010/main" xmlns:ma14="http://schemas.microsoft.com/office/mac/drawingml/2011/main" val="1"/>
+              <ma14:wrappingTextBoxFlag xmlns:ma14="http://schemas.microsoft.com/office/mac/drawingml/2011/main" xmlns:a14="http://schemas.microsoft.com/office/drawing/2010/main" xmlns:m="http://schemas.openxmlformats.org/officeDocument/2006/math" xmlns="" val="1"/>
             </a:ext>
           </a:extLst>
         </p:spPr>
@@ -5531,7 +5531,7 @@
           </a:ln>
           <a:extLst>
             <a:ext uri="{C572A759-6A51-4108-AA02-DFA0A04FC94B}">
-              <ma14:wrappingTextBoxFlag xmlns="" xmlns:m="http://schemas.openxmlformats.org/officeDocument/2006/math" xmlns:a14="http://schemas.microsoft.com/office/drawing/2010/main" xmlns:ma14="http://schemas.microsoft.com/office/mac/drawingml/2011/main" val="1"/>
+              <ma14:wrappingTextBoxFlag xmlns:ma14="http://schemas.microsoft.com/office/mac/drawingml/2011/main" xmlns:a14="http://schemas.microsoft.com/office/drawing/2010/main" xmlns:m="http://schemas.openxmlformats.org/officeDocument/2006/math" xmlns="" val="1"/>
             </a:ext>
           </a:extLst>
         </p:spPr>
@@ -6455,7 +6455,7 @@
           </a:ln>
           <a:extLst>
             <a:ext uri="{C572A759-6A51-4108-AA02-DFA0A04FC94B}">
-              <ma14:wrappingTextBoxFlag xmlns="" xmlns:m="http://schemas.openxmlformats.org/officeDocument/2006/math" xmlns:a14="http://schemas.microsoft.com/office/drawing/2010/main" xmlns:ma14="http://schemas.microsoft.com/office/mac/drawingml/2011/main" val="1"/>
+              <ma14:wrappingTextBoxFlag xmlns:ma14="http://schemas.microsoft.com/office/mac/drawingml/2011/main" xmlns:a14="http://schemas.microsoft.com/office/drawing/2010/main" xmlns:m="http://schemas.openxmlformats.org/officeDocument/2006/math" xmlns="" val="1"/>
             </a:ext>
           </a:extLst>
         </p:spPr>
@@ -7097,102 +7097,6 @@
       </p:sp>
       <p:sp>
         <p:nvSpPr>
-          <p:cNvPr id="5" name="TextBox 4">
-            <a:extLst>
-              <a:ext uri="{FF2B5EF4-FFF2-40B4-BE49-F238E27FC236}">
-                <a16:creationId xmlns:a16="http://schemas.microsoft.com/office/drawing/2014/main" id="{4959C283-2F3B-9343-D0E8-821A55D5CA6C}"/>
-              </a:ext>
-            </a:extLst>
-          </p:cNvPr>
-          <p:cNvSpPr txBox="1"/>
-          <p:nvPr/>
-        </p:nvSpPr>
-        <p:spPr>
-          <a:xfrm>
-            <a:off x="963561" y="156504"/>
-            <a:ext cx="8642555" cy="523218"/>
-          </a:xfrm>
-          <a:prstGeom prst="rect">
-            <a:avLst/>
-          </a:prstGeom>
-          <a:noFill/>
-          <a:ln w="12700" cap="flat">
-            <a:noFill/>
-            <a:miter lim="400000"/>
-          </a:ln>
-          <a:effectLst/>
-          <a:sp3d/>
-        </p:spPr>
-        <p:style>
-          <a:lnRef idx="0">
-            <a:scrgbClr r="0" g="0" b="0"/>
-          </a:lnRef>
-          <a:fillRef idx="0">
-            <a:scrgbClr r="0" g="0" b="0"/>
-          </a:fillRef>
-          <a:effectRef idx="0">
-            <a:scrgbClr r="0" g="0" b="0"/>
-          </a:effectRef>
-          <a:fontRef idx="none"/>
-        </p:style>
-        <p:txBody>
-          <a:bodyPr rot="0" spcFirstLastPara="1" vertOverflow="overflow" horzOverflow="overflow" vert="horz" wrap="square" lIns="45719" tIns="45719" rIns="45719" bIns="45719" numCol="1" spcCol="38100" rtlCol="0" anchor="t">
-            <a:spAutoFit/>
-          </a:bodyPr>
-          <a:lstStyle/>
-          <a:p>
-            <a:pPr marL="0" marR="0" indent="0" algn="l" defTabSz="457200" rtl="0" fontAlgn="auto" latinLnBrk="0" hangingPunct="0">
-              <a:lnSpc>
-                <a:spcPct val="100000"/>
-              </a:lnSpc>
-              <a:spcBef>
-                <a:spcPts val="0"/>
-              </a:spcBef>
-              <a:spcAft>
-                <a:spcPts val="0"/>
-              </a:spcAft>
-              <a:buClrTx/>
-              <a:buSzTx/>
-              <a:buFontTx/>
-              <a:buNone/>
-              <a:tabLst/>
-            </a:pPr>
-            <a:r>
-              <a:rPr kumimoji="0" lang="ru-RU" sz="2800" b="1" i="0" u="none" strike="noStrike" cap="none" spc="0" normalizeH="0" baseline="0" dirty="0">
-                <a:ln>
-                  <a:noFill/>
-                </a:ln>
-                <a:solidFill>
-                  <a:schemeClr val="accent1"/>
-                </a:solidFill>
-                <a:effectLst/>
-                <a:uFillTx/>
-                <a:latin typeface="+mn-lt"/>
-                <a:ea typeface="Arial"/>
-                <a:cs typeface="Arial"/>
-                <a:sym typeface="Arial"/>
-              </a:rPr>
-              <a:t>РЕКВИЗИТНЫЙ АНАЛИЗ ДОКУМЕНТА</a:t>
-            </a:r>
-            <a:endParaRPr kumimoji="0" lang="en-US" sz="2800" b="1" i="0" u="none" strike="noStrike" cap="none" spc="0" normalizeH="0" baseline="0" dirty="0">
-              <a:ln>
-                <a:noFill/>
-              </a:ln>
-              <a:solidFill>
-                <a:schemeClr val="accent1"/>
-              </a:solidFill>
-              <a:effectLst/>
-              <a:uFillTx/>
-              <a:latin typeface="+mn-lt"/>
-              <a:ea typeface="Arial"/>
-              <a:cs typeface="Arial"/>
-              <a:sym typeface="Arial"/>
-            </a:endParaRPr>
-          </a:p>
-        </p:txBody>
-      </p:sp>
-      <p:sp>
-        <p:nvSpPr>
           <p:cNvPr id="6" name="TextBox 5">
             <a:extLst>
               <a:ext uri="{FF2B5EF4-FFF2-40B4-BE49-F238E27FC236}">
@@ -7276,6 +7180,184 @@
               </a:ln>
               <a:solidFill>
                 <a:schemeClr val="bg1"/>
+              </a:solidFill>
+              <a:effectLst/>
+              <a:uFillTx/>
+              <a:latin typeface="+mn-lt"/>
+              <a:ea typeface="Arial"/>
+              <a:cs typeface="Arial"/>
+              <a:sym typeface="Arial"/>
+            </a:endParaRPr>
+          </a:p>
+        </p:txBody>
+      </p:sp>
+      <p:sp>
+        <p:nvSpPr>
+          <p:cNvPr id="7" name="Прямоугольник 6">
+            <a:extLst>
+              <a:ext uri="{FF2B5EF4-FFF2-40B4-BE49-F238E27FC236}">
+                <a16:creationId xmlns:a16="http://schemas.microsoft.com/office/drawing/2014/main" id="{B7CA45F2-AE21-4E69-AD6C-37D9598879FE}"/>
+              </a:ext>
+            </a:extLst>
+          </p:cNvPr>
+          <p:cNvSpPr/>
+          <p:nvPr/>
+        </p:nvSpPr>
+        <p:spPr>
+          <a:xfrm>
+            <a:off x="1047750" y="6410632"/>
+            <a:ext cx="2743200" cy="285136"/>
+          </a:xfrm>
+          <a:prstGeom prst="rect">
+            <a:avLst/>
+          </a:prstGeom>
+          <a:solidFill>
+            <a:srgbClr val="FFFFFF"/>
+          </a:solidFill>
+          <a:ln w="12700" cap="flat">
+            <a:noFill/>
+            <a:prstDash val="solid"/>
+            <a:miter lim="800000"/>
+          </a:ln>
+          <a:effectLst/>
+          <a:sp3d/>
+        </p:spPr>
+        <p:style>
+          <a:lnRef idx="0">
+            <a:scrgbClr r="0" g="0" b="0"/>
+          </a:lnRef>
+          <a:fillRef idx="0">
+            <a:scrgbClr r="0" g="0" b="0"/>
+          </a:fillRef>
+          <a:effectRef idx="0">
+            <a:scrgbClr r="0" g="0" b="0"/>
+          </a:effectRef>
+          <a:fontRef idx="none"/>
+        </p:style>
+        <p:txBody>
+          <a:bodyPr rot="0" spcFirstLastPara="1" vertOverflow="overflow" horzOverflow="overflow" vert="horz" wrap="square" lIns="45719" tIns="45719" rIns="45719" bIns="45719" numCol="1" spcCol="38100" rtlCol="0" anchor="ctr">
+            <a:spAutoFit/>
+          </a:bodyPr>
+          <a:lstStyle/>
+          <a:p>
+            <a:pPr marL="0" marR="0" indent="0" algn="l" defTabSz="457200" rtl="0" fontAlgn="auto" latinLnBrk="0" hangingPunct="0">
+              <a:lnSpc>
+                <a:spcPct val="100000"/>
+              </a:lnSpc>
+              <a:spcBef>
+                <a:spcPts val="0"/>
+              </a:spcBef>
+              <a:spcAft>
+                <a:spcPts val="0"/>
+              </a:spcAft>
+              <a:buClrTx/>
+              <a:buSzTx/>
+              <a:buFontTx/>
+              <a:buNone/>
+              <a:tabLst/>
+            </a:pPr>
+            <a:endParaRPr kumimoji="0" lang="ru-RU" sz="1800" b="0" i="0" u="none" strike="noStrike" cap="none" spc="0" normalizeH="0" baseline="0">
+              <a:ln>
+                <a:noFill/>
+              </a:ln>
+              <a:solidFill>
+                <a:srgbClr val="000000"/>
+              </a:solidFill>
+              <a:effectLst/>
+              <a:uFillTx/>
+              <a:latin typeface="Arial"/>
+              <a:ea typeface="Arial"/>
+              <a:cs typeface="Arial"/>
+              <a:sym typeface="Arial"/>
+            </a:endParaRPr>
+          </a:p>
+        </p:txBody>
+      </p:sp>
+      <p:sp>
+        <p:nvSpPr>
+          <p:cNvPr id="8" name="TextBox 7">
+            <a:extLst>
+              <a:ext uri="{FF2B5EF4-FFF2-40B4-BE49-F238E27FC236}">
+                <a16:creationId xmlns:a16="http://schemas.microsoft.com/office/drawing/2014/main" id="{E966C10D-347F-4B25-803B-778FBFB78F74}"/>
+              </a:ext>
+            </a:extLst>
+          </p:cNvPr>
+          <p:cNvSpPr txBox="1"/>
+          <p:nvPr/>
+        </p:nvSpPr>
+        <p:spPr>
+          <a:xfrm>
+            <a:off x="980767" y="186659"/>
+            <a:ext cx="8937523" cy="523218"/>
+          </a:xfrm>
+          <a:prstGeom prst="rect">
+            <a:avLst/>
+          </a:prstGeom>
+          <a:noFill/>
+          <a:ln w="12700" cap="flat">
+            <a:noFill/>
+            <a:miter lim="400000"/>
+          </a:ln>
+          <a:effectLst/>
+          <a:sp3d/>
+        </p:spPr>
+        <p:style>
+          <a:lnRef idx="0">
+            <a:scrgbClr r="0" g="0" b="0"/>
+          </a:lnRef>
+          <a:fillRef idx="0">
+            <a:scrgbClr r="0" g="0" b="0"/>
+          </a:fillRef>
+          <a:effectRef idx="0">
+            <a:scrgbClr r="0" g="0" b="0"/>
+          </a:effectRef>
+          <a:fontRef idx="none"/>
+        </p:style>
+        <p:txBody>
+          <a:bodyPr rot="0" spcFirstLastPara="1" vertOverflow="overflow" horzOverflow="overflow" vert="horz" wrap="square" lIns="45719" tIns="45719" rIns="45719" bIns="45719" numCol="1" spcCol="38100" rtlCol="0" anchor="t">
+            <a:spAutoFit/>
+          </a:bodyPr>
+          <a:lstStyle/>
+          <a:p>
+            <a:pPr marL="0" marR="0" indent="0" algn="l" defTabSz="457200" rtl="0" fontAlgn="auto" latinLnBrk="0" hangingPunct="0">
+              <a:lnSpc>
+                <a:spcPct val="100000"/>
+              </a:lnSpc>
+              <a:spcBef>
+                <a:spcPts val="0"/>
+              </a:spcBef>
+              <a:spcAft>
+                <a:spcPts val="0"/>
+              </a:spcAft>
+              <a:buClrTx/>
+              <a:buSzTx/>
+              <a:buFontTx/>
+              <a:buNone/>
+              <a:tabLst/>
+            </a:pPr>
+            <a:r>
+              <a:rPr kumimoji="0" lang="ru-RU" sz="2800" b="1" i="0" u="none" strike="noStrike" cap="none" spc="0" normalizeH="0" baseline="0" dirty="0">
+                <a:ln>
+                  <a:noFill/>
+                </a:ln>
+                <a:solidFill>
+                  <a:schemeClr val="accent1"/>
+                </a:solidFill>
+                <a:effectLst/>
+                <a:uFillTx/>
+                <a:latin typeface="+mn-lt"/>
+                <a:ea typeface="Arial"/>
+                <a:cs typeface="Arial"/>
+                <a:sym typeface="Arial"/>
+              </a:rPr>
+              <a:t>РЕКВИЗИТНЫЙ АНАЛИЗ ДОКУМЕНТА</a:t>
+            </a:r>
+            <a:endParaRPr kumimoji="0" lang="en-US" sz="2800" b="1" i="0" u="none" strike="noStrike" cap="none" spc="0" normalizeH="0" baseline="0" dirty="0">
+              <a:ln>
+                <a:noFill/>
+              </a:ln>
+              <a:solidFill>
+                <a:schemeClr val="accent1"/>
               </a:solidFill>
               <a:effectLst/>
               <a:uFillTx/>
@@ -7416,8 +7498,8 @@
         </p:nvSpPr>
         <p:spPr>
           <a:xfrm>
-            <a:off x="1113503" y="1115285"/>
-            <a:ext cx="10726993" cy="4602029"/>
+            <a:off x="953729" y="1048610"/>
+            <a:ext cx="10886767" cy="4602029"/>
           </a:xfrm>
           <a:prstGeom prst="rect">
             <a:avLst/>
@@ -7843,6 +7925,88 @@
               <a:effectLst/>
               <a:uFillTx/>
               <a:latin typeface="+mn-lt"/>
+              <a:ea typeface="Arial"/>
+              <a:cs typeface="Arial"/>
+              <a:sym typeface="Arial"/>
+            </a:endParaRPr>
+          </a:p>
+        </p:txBody>
+      </p:sp>
+      <p:sp>
+        <p:nvSpPr>
+          <p:cNvPr id="7" name="Прямоугольник 6">
+            <a:extLst>
+              <a:ext uri="{FF2B5EF4-FFF2-40B4-BE49-F238E27FC236}">
+                <a16:creationId xmlns:a16="http://schemas.microsoft.com/office/drawing/2014/main" id="{77E1745E-DB3C-420F-8E30-F9A2CD4F0E97}"/>
+              </a:ext>
+            </a:extLst>
+          </p:cNvPr>
+          <p:cNvSpPr/>
+          <p:nvPr/>
+        </p:nvSpPr>
+        <p:spPr>
+          <a:xfrm>
+            <a:off x="1047750" y="6410632"/>
+            <a:ext cx="2743200" cy="285136"/>
+          </a:xfrm>
+          <a:prstGeom prst="rect">
+            <a:avLst/>
+          </a:prstGeom>
+          <a:solidFill>
+            <a:srgbClr val="FFFFFF"/>
+          </a:solidFill>
+          <a:ln w="12700" cap="flat">
+            <a:noFill/>
+            <a:prstDash val="solid"/>
+            <a:miter lim="800000"/>
+          </a:ln>
+          <a:effectLst/>
+          <a:sp3d/>
+        </p:spPr>
+        <p:style>
+          <a:lnRef idx="0">
+            <a:scrgbClr r="0" g="0" b="0"/>
+          </a:lnRef>
+          <a:fillRef idx="0">
+            <a:scrgbClr r="0" g="0" b="0"/>
+          </a:fillRef>
+          <a:effectRef idx="0">
+            <a:scrgbClr r="0" g="0" b="0"/>
+          </a:effectRef>
+          <a:fontRef idx="none"/>
+        </p:style>
+        <p:txBody>
+          <a:bodyPr rot="0" spcFirstLastPara="1" vertOverflow="overflow" horzOverflow="overflow" vert="horz" wrap="square" lIns="45719" tIns="45719" rIns="45719" bIns="45719" numCol="1" spcCol="38100" rtlCol="0" anchor="ctr">
+            <a:spAutoFit/>
+          </a:bodyPr>
+          <a:lstStyle/>
+          <a:p>
+            <a:pPr marL="0" marR="0" indent="0" algn="l" defTabSz="457200" rtl="0" fontAlgn="auto" latinLnBrk="0" hangingPunct="0">
+              <a:lnSpc>
+                <a:spcPct val="100000"/>
+              </a:lnSpc>
+              <a:spcBef>
+                <a:spcPts val="0"/>
+              </a:spcBef>
+              <a:spcAft>
+                <a:spcPts val="0"/>
+              </a:spcAft>
+              <a:buClrTx/>
+              <a:buSzTx/>
+              <a:buFontTx/>
+              <a:buNone/>
+              <a:tabLst/>
+            </a:pPr>
+            <a:endParaRPr kumimoji="0" lang="ru-RU" sz="1800" b="0" i="0" u="none" strike="noStrike" cap="none" spc="0" normalizeH="0" baseline="0">
+              <a:ln>
+                <a:noFill/>
+              </a:ln>
+              <a:solidFill>
+                <a:srgbClr val="000000"/>
+              </a:solidFill>
+              <a:effectLst/>
+              <a:uFillTx/>
+              <a:latin typeface="Arial"/>
               <a:ea typeface="Arial"/>
               <a:cs typeface="Arial"/>
               <a:sym typeface="Arial"/>
@@ -7979,7 +8143,7 @@
         </p:nvSpPr>
         <p:spPr>
           <a:xfrm>
-            <a:off x="406809" y="861370"/>
+            <a:off x="406809" y="965022"/>
             <a:ext cx="12140381" cy="5109860"/>
           </a:xfrm>
           <a:prstGeom prst="rect">
@@ -8463,6 +8627,88 @@
               <a:effectLst/>
               <a:uFillTx/>
               <a:latin typeface="+mn-lt"/>
+              <a:ea typeface="Arial"/>
+              <a:cs typeface="Arial"/>
+              <a:sym typeface="Arial"/>
+            </a:endParaRPr>
+          </a:p>
+        </p:txBody>
+      </p:sp>
+      <p:sp>
+        <p:nvSpPr>
+          <p:cNvPr id="7" name="Прямоугольник 6">
+            <a:extLst>
+              <a:ext uri="{FF2B5EF4-FFF2-40B4-BE49-F238E27FC236}">
+                <a16:creationId xmlns:a16="http://schemas.microsoft.com/office/drawing/2014/main" id="{C18E8467-0771-4FB6-8CE8-C96B23DBDEA4}"/>
+              </a:ext>
+            </a:extLst>
+          </p:cNvPr>
+          <p:cNvSpPr/>
+          <p:nvPr/>
+        </p:nvSpPr>
+        <p:spPr>
+          <a:xfrm>
+            <a:off x="1047750" y="6410632"/>
+            <a:ext cx="2743200" cy="285136"/>
+          </a:xfrm>
+          <a:prstGeom prst="rect">
+            <a:avLst/>
+          </a:prstGeom>
+          <a:solidFill>
+            <a:srgbClr val="FFFFFF"/>
+          </a:solidFill>
+          <a:ln w="12700" cap="flat">
+            <a:noFill/>
+            <a:prstDash val="solid"/>
+            <a:miter lim="800000"/>
+          </a:ln>
+          <a:effectLst/>
+          <a:sp3d/>
+        </p:spPr>
+        <p:style>
+          <a:lnRef idx="0">
+            <a:scrgbClr r="0" g="0" b="0"/>
+          </a:lnRef>
+          <a:fillRef idx="0">
+            <a:scrgbClr r="0" g="0" b="0"/>
+          </a:fillRef>
+          <a:effectRef idx="0">
+            <a:scrgbClr r="0" g="0" b="0"/>
+          </a:effectRef>
+          <a:fontRef idx="none"/>
+        </p:style>
+        <p:txBody>
+          <a:bodyPr rot="0" spcFirstLastPara="1" vertOverflow="overflow" horzOverflow="overflow" vert="horz" wrap="square" lIns="45719" tIns="45719" rIns="45719" bIns="45719" numCol="1" spcCol="38100" rtlCol="0" anchor="ctr">
+            <a:spAutoFit/>
+          </a:bodyPr>
+          <a:lstStyle/>
+          <a:p>
+            <a:pPr marL="0" marR="0" indent="0" algn="l" defTabSz="457200" rtl="0" fontAlgn="auto" latinLnBrk="0" hangingPunct="0">
+              <a:lnSpc>
+                <a:spcPct val="100000"/>
+              </a:lnSpc>
+              <a:spcBef>
+                <a:spcPts val="0"/>
+              </a:spcBef>
+              <a:spcAft>
+                <a:spcPts val="0"/>
+              </a:spcAft>
+              <a:buClrTx/>
+              <a:buSzTx/>
+              <a:buFontTx/>
+              <a:buNone/>
+              <a:tabLst/>
+            </a:pPr>
+            <a:endParaRPr kumimoji="0" lang="ru-RU" sz="1800" b="0" i="0" u="none" strike="noStrike" cap="none" spc="0" normalizeH="0" baseline="0">
+              <a:ln>
+                <a:noFill/>
+              </a:ln>
+              <a:solidFill>
+                <a:srgbClr val="000000"/>
+              </a:solidFill>
+              <a:effectLst/>
+              <a:uFillTx/>
+              <a:latin typeface="Arial"/>
               <a:ea typeface="Arial"/>
               <a:cs typeface="Arial"/>
               <a:sym typeface="Arial"/>
@@ -8599,7 +8845,7 @@
         </p:nvSpPr>
         <p:spPr>
           <a:xfrm>
-            <a:off x="435077" y="690827"/>
+            <a:off x="435077" y="833656"/>
             <a:ext cx="12083846" cy="5576976"/>
           </a:xfrm>
           <a:prstGeom prst="rect">
@@ -9005,6 +9251,88 @@
               <a:effectLst/>
               <a:uFillTx/>
               <a:latin typeface="+mn-lt"/>
+              <a:ea typeface="Arial"/>
+              <a:cs typeface="Arial"/>
+              <a:sym typeface="Arial"/>
+            </a:endParaRPr>
+          </a:p>
+        </p:txBody>
+      </p:sp>
+      <p:sp>
+        <p:nvSpPr>
+          <p:cNvPr id="7" name="Прямоугольник 6">
+            <a:extLst>
+              <a:ext uri="{FF2B5EF4-FFF2-40B4-BE49-F238E27FC236}">
+                <a16:creationId xmlns:a16="http://schemas.microsoft.com/office/drawing/2014/main" id="{F860C348-B5EC-4A8C-821C-C8332F75E40A}"/>
+              </a:ext>
+            </a:extLst>
+          </p:cNvPr>
+          <p:cNvSpPr/>
+          <p:nvPr/>
+        </p:nvSpPr>
+        <p:spPr>
+          <a:xfrm>
+            <a:off x="1047750" y="6410632"/>
+            <a:ext cx="2743200" cy="285136"/>
+          </a:xfrm>
+          <a:prstGeom prst="rect">
+            <a:avLst/>
+          </a:prstGeom>
+          <a:solidFill>
+            <a:srgbClr val="FFFFFF"/>
+          </a:solidFill>
+          <a:ln w="12700" cap="flat">
+            <a:noFill/>
+            <a:prstDash val="solid"/>
+            <a:miter lim="800000"/>
+          </a:ln>
+          <a:effectLst/>
+          <a:sp3d/>
+        </p:spPr>
+        <p:style>
+          <a:lnRef idx="0">
+            <a:scrgbClr r="0" g="0" b="0"/>
+          </a:lnRef>
+          <a:fillRef idx="0">
+            <a:scrgbClr r="0" g="0" b="0"/>
+          </a:fillRef>
+          <a:effectRef idx="0">
+            <a:scrgbClr r="0" g="0" b="0"/>
+          </a:effectRef>
+          <a:fontRef idx="none"/>
+        </p:style>
+        <p:txBody>
+          <a:bodyPr rot="0" spcFirstLastPara="1" vertOverflow="overflow" horzOverflow="overflow" vert="horz" wrap="square" lIns="45719" tIns="45719" rIns="45719" bIns="45719" numCol="1" spcCol="38100" rtlCol="0" anchor="ctr">
+            <a:spAutoFit/>
+          </a:bodyPr>
+          <a:lstStyle/>
+          <a:p>
+            <a:pPr marL="0" marR="0" indent="0" algn="l" defTabSz="457200" rtl="0" fontAlgn="auto" latinLnBrk="0" hangingPunct="0">
+              <a:lnSpc>
+                <a:spcPct val="100000"/>
+              </a:lnSpc>
+              <a:spcBef>
+                <a:spcPts val="0"/>
+              </a:spcBef>
+              <a:spcAft>
+                <a:spcPts val="0"/>
+              </a:spcAft>
+              <a:buClrTx/>
+              <a:buSzTx/>
+              <a:buFontTx/>
+              <a:buNone/>
+              <a:tabLst/>
+            </a:pPr>
+            <a:endParaRPr kumimoji="0" lang="ru-RU" sz="1800" b="0" i="0" u="none" strike="noStrike" cap="none" spc="0" normalizeH="0" baseline="0">
+              <a:ln>
+                <a:noFill/>
+              </a:ln>
+              <a:solidFill>
+                <a:srgbClr val="000000"/>
+              </a:solidFill>
+              <a:effectLst/>
+              <a:uFillTx/>
+              <a:latin typeface="Arial"/>
               <a:ea typeface="Arial"/>
               <a:cs typeface="Arial"/>
               <a:sym typeface="Arial"/>
@@ -9141,7 +9469,7 @@
         </p:nvSpPr>
         <p:spPr>
           <a:xfrm>
-            <a:off x="865238" y="995799"/>
+            <a:off x="861552" y="995799"/>
             <a:ext cx="11230896" cy="5109860"/>
           </a:xfrm>
           <a:prstGeom prst="rect">
@@ -9487,6 +9815,88 @@
               <a:effectLst/>
               <a:uFillTx/>
               <a:latin typeface="+mn-lt"/>
+              <a:ea typeface="Arial"/>
+              <a:cs typeface="Arial"/>
+              <a:sym typeface="Arial"/>
+            </a:endParaRPr>
+          </a:p>
+        </p:txBody>
+      </p:sp>
+      <p:sp>
+        <p:nvSpPr>
+          <p:cNvPr id="7" name="Прямоугольник 6">
+            <a:extLst>
+              <a:ext uri="{FF2B5EF4-FFF2-40B4-BE49-F238E27FC236}">
+                <a16:creationId xmlns:a16="http://schemas.microsoft.com/office/drawing/2014/main" id="{884BEB7E-5331-42A8-B8A6-BAF445ADB6B6}"/>
+              </a:ext>
+            </a:extLst>
+          </p:cNvPr>
+          <p:cNvSpPr/>
+          <p:nvPr/>
+        </p:nvSpPr>
+        <p:spPr>
+          <a:xfrm>
+            <a:off x="1047750" y="6410632"/>
+            <a:ext cx="2743200" cy="285136"/>
+          </a:xfrm>
+          <a:prstGeom prst="rect">
+            <a:avLst/>
+          </a:prstGeom>
+          <a:solidFill>
+            <a:srgbClr val="FFFFFF"/>
+          </a:solidFill>
+          <a:ln w="12700" cap="flat">
+            <a:noFill/>
+            <a:prstDash val="solid"/>
+            <a:miter lim="800000"/>
+          </a:ln>
+          <a:effectLst/>
+          <a:sp3d/>
+        </p:spPr>
+        <p:style>
+          <a:lnRef idx="0">
+            <a:scrgbClr r="0" g="0" b="0"/>
+          </a:lnRef>
+          <a:fillRef idx="0">
+            <a:scrgbClr r="0" g="0" b="0"/>
+          </a:fillRef>
+          <a:effectRef idx="0">
+            <a:scrgbClr r="0" g="0" b="0"/>
+          </a:effectRef>
+          <a:fontRef idx="none"/>
+        </p:style>
+        <p:txBody>
+          <a:bodyPr rot="0" spcFirstLastPara="1" vertOverflow="overflow" horzOverflow="overflow" vert="horz" wrap="square" lIns="45719" tIns="45719" rIns="45719" bIns="45719" numCol="1" spcCol="38100" rtlCol="0" anchor="ctr">
+            <a:spAutoFit/>
+          </a:bodyPr>
+          <a:lstStyle/>
+          <a:p>
+            <a:pPr marL="0" marR="0" indent="0" algn="l" defTabSz="457200" rtl="0" fontAlgn="auto" latinLnBrk="0" hangingPunct="0">
+              <a:lnSpc>
+                <a:spcPct val="100000"/>
+              </a:lnSpc>
+              <a:spcBef>
+                <a:spcPts val="0"/>
+              </a:spcBef>
+              <a:spcAft>
+                <a:spcPts val="0"/>
+              </a:spcAft>
+              <a:buClrTx/>
+              <a:buSzTx/>
+              <a:buFontTx/>
+              <a:buNone/>
+              <a:tabLst/>
+            </a:pPr>
+            <a:endParaRPr kumimoji="0" lang="ru-RU" sz="1800" b="0" i="0" u="none" strike="noStrike" cap="none" spc="0" normalizeH="0" baseline="0">
+              <a:ln>
+                <a:noFill/>
+              </a:ln>
+              <a:solidFill>
+                <a:srgbClr val="000000"/>
+              </a:solidFill>
+              <a:effectLst/>
+              <a:uFillTx/>
+              <a:latin typeface="Arial"/>
               <a:ea typeface="Arial"/>
               <a:cs typeface="Arial"/>
               <a:sym typeface="Arial"/>
@@ -9972,7 +10382,7 @@
         </p:nvSpPr>
         <p:spPr>
           <a:xfrm>
-            <a:off x="865238" y="209507"/>
+            <a:off x="893813" y="180932"/>
             <a:ext cx="10726994" cy="523218"/>
           </a:xfrm>
           <a:prstGeom prst="rect">
@@ -10138,6 +10548,88 @@
               <a:effectLst/>
               <a:uFillTx/>
               <a:latin typeface="+mn-lt"/>
+              <a:ea typeface="Arial"/>
+              <a:cs typeface="Arial"/>
+              <a:sym typeface="Arial"/>
+            </a:endParaRPr>
+          </a:p>
+        </p:txBody>
+      </p:sp>
+      <p:sp>
+        <p:nvSpPr>
+          <p:cNvPr id="7" name="Прямоугольник 6">
+            <a:extLst>
+              <a:ext uri="{FF2B5EF4-FFF2-40B4-BE49-F238E27FC236}">
+                <a16:creationId xmlns:a16="http://schemas.microsoft.com/office/drawing/2014/main" id="{45AE52B3-7C14-4857-9495-735B10AE6303}"/>
+              </a:ext>
+            </a:extLst>
+          </p:cNvPr>
+          <p:cNvSpPr/>
+          <p:nvPr/>
+        </p:nvSpPr>
+        <p:spPr>
+          <a:xfrm>
+            <a:off x="1047750" y="6410632"/>
+            <a:ext cx="2743200" cy="285136"/>
+          </a:xfrm>
+          <a:prstGeom prst="rect">
+            <a:avLst/>
+          </a:prstGeom>
+          <a:solidFill>
+            <a:srgbClr val="FFFFFF"/>
+          </a:solidFill>
+          <a:ln w="12700" cap="flat">
+            <a:noFill/>
+            <a:prstDash val="solid"/>
+            <a:miter lim="800000"/>
+          </a:ln>
+          <a:effectLst/>
+          <a:sp3d/>
+        </p:spPr>
+        <p:style>
+          <a:lnRef idx="0">
+            <a:scrgbClr r="0" g="0" b="0"/>
+          </a:lnRef>
+          <a:fillRef idx="0">
+            <a:scrgbClr r="0" g="0" b="0"/>
+          </a:fillRef>
+          <a:effectRef idx="0">
+            <a:scrgbClr r="0" g="0" b="0"/>
+          </a:effectRef>
+          <a:fontRef idx="none"/>
+        </p:style>
+        <p:txBody>
+          <a:bodyPr rot="0" spcFirstLastPara="1" vertOverflow="overflow" horzOverflow="overflow" vert="horz" wrap="square" lIns="45719" tIns="45719" rIns="45719" bIns="45719" numCol="1" spcCol="38100" rtlCol="0" anchor="ctr">
+            <a:spAutoFit/>
+          </a:bodyPr>
+          <a:lstStyle/>
+          <a:p>
+            <a:pPr marL="0" marR="0" indent="0" algn="l" defTabSz="457200" rtl="0" fontAlgn="auto" latinLnBrk="0" hangingPunct="0">
+              <a:lnSpc>
+                <a:spcPct val="100000"/>
+              </a:lnSpc>
+              <a:spcBef>
+                <a:spcPts val="0"/>
+              </a:spcBef>
+              <a:spcAft>
+                <a:spcPts val="0"/>
+              </a:spcAft>
+              <a:buClrTx/>
+              <a:buSzTx/>
+              <a:buFontTx/>
+              <a:buNone/>
+              <a:tabLst/>
+            </a:pPr>
+            <a:endParaRPr kumimoji="0" lang="ru-RU" sz="1800" b="0" i="0" u="none" strike="noStrike" cap="none" spc="0" normalizeH="0" baseline="0">
+              <a:ln>
+                <a:noFill/>
+              </a:ln>
+              <a:solidFill>
+                <a:srgbClr val="000000"/>
+              </a:solidFill>
+              <a:effectLst/>
+              <a:uFillTx/>
+              <a:latin typeface="Arial"/>
               <a:ea typeface="Arial"/>
               <a:cs typeface="Arial"/>
               <a:sym typeface="Arial"/>
@@ -10584,6 +11076,88 @@
           </a:p>
         </p:txBody>
       </p:sp>
+      <p:sp>
+        <p:nvSpPr>
+          <p:cNvPr id="7" name="Прямоугольник 6">
+            <a:extLst>
+              <a:ext uri="{FF2B5EF4-FFF2-40B4-BE49-F238E27FC236}">
+                <a16:creationId xmlns:a16="http://schemas.microsoft.com/office/drawing/2014/main" id="{1EA62E2E-3B47-42B8-9536-A9631FF97283}"/>
+              </a:ext>
+            </a:extLst>
+          </p:cNvPr>
+          <p:cNvSpPr/>
+          <p:nvPr/>
+        </p:nvSpPr>
+        <p:spPr>
+          <a:xfrm>
+            <a:off x="1047750" y="6410632"/>
+            <a:ext cx="2743200" cy="285136"/>
+          </a:xfrm>
+          <a:prstGeom prst="rect">
+            <a:avLst/>
+          </a:prstGeom>
+          <a:solidFill>
+            <a:srgbClr val="FFFFFF"/>
+          </a:solidFill>
+          <a:ln w="12700" cap="flat">
+            <a:noFill/>
+            <a:prstDash val="solid"/>
+            <a:miter lim="800000"/>
+          </a:ln>
+          <a:effectLst/>
+          <a:sp3d/>
+        </p:spPr>
+        <p:style>
+          <a:lnRef idx="0">
+            <a:scrgbClr r="0" g="0" b="0"/>
+          </a:lnRef>
+          <a:fillRef idx="0">
+            <a:scrgbClr r="0" g="0" b="0"/>
+          </a:fillRef>
+          <a:effectRef idx="0">
+            <a:scrgbClr r="0" g="0" b="0"/>
+          </a:effectRef>
+          <a:fontRef idx="none"/>
+        </p:style>
+        <p:txBody>
+          <a:bodyPr rot="0" spcFirstLastPara="1" vertOverflow="overflow" horzOverflow="overflow" vert="horz" wrap="square" lIns="45719" tIns="45719" rIns="45719" bIns="45719" numCol="1" spcCol="38100" rtlCol="0" anchor="ctr">
+            <a:spAutoFit/>
+          </a:bodyPr>
+          <a:lstStyle/>
+          <a:p>
+            <a:pPr marL="0" marR="0" indent="0" algn="l" defTabSz="457200" rtl="0" fontAlgn="auto" latinLnBrk="0" hangingPunct="0">
+              <a:lnSpc>
+                <a:spcPct val="100000"/>
+              </a:lnSpc>
+              <a:spcBef>
+                <a:spcPts val="0"/>
+              </a:spcBef>
+              <a:spcAft>
+                <a:spcPts val="0"/>
+              </a:spcAft>
+              <a:buClrTx/>
+              <a:buSzTx/>
+              <a:buFontTx/>
+              <a:buNone/>
+              <a:tabLst/>
+            </a:pPr>
+            <a:endParaRPr kumimoji="0" lang="ru-RU" sz="1800" b="0" i="0" u="none" strike="noStrike" cap="none" spc="0" normalizeH="0" baseline="0">
+              <a:ln>
+                <a:noFill/>
+              </a:ln>
+              <a:solidFill>
+                <a:srgbClr val="000000"/>
+              </a:solidFill>
+              <a:effectLst/>
+              <a:uFillTx/>
+              <a:latin typeface="Arial"/>
+              <a:ea typeface="Arial"/>
+              <a:cs typeface="Arial"/>
+              <a:sym typeface="Arial"/>
+            </a:endParaRPr>
+          </a:p>
+        </p:txBody>
+      </p:sp>
     </p:spTree>
     <p:extLst>
       <p:ext uri="{BB962C8B-B14F-4D97-AF65-F5344CB8AC3E}">
@@ -11001,14 +11575,14 @@
           <p:nvPr>
             <p:extLst>
               <p:ext uri="{D42A27DB-BD31-4B8C-83A1-F6EECF244321}">
-                <p14:modId xmlns:p14="http://schemas.microsoft.com/office/powerpoint/2010/main" val="811187077"/>
+                <p14:modId xmlns:p14="http://schemas.microsoft.com/office/powerpoint/2010/main" val="3344271876"/>
               </p:ext>
             </p:extLst>
           </p:nvPr>
         </p:nvGraphicFramePr>
         <p:xfrm>
           <a:off x="602226" y="1768518"/>
-          <a:ext cx="11749548" cy="4303308"/>
+          <a:ext cx="11749548" cy="4424143"/>
         </p:xfrm>
         <a:graphic>
           <a:graphicData uri="http://schemas.openxmlformats.org/drawingml/2006/table">
@@ -11054,12 +11628,12 @@
                         </a:spcAft>
                       </a:pPr>
                       <a:r>
-                        <a:rPr lang="ru-RU" sz="1400" b="1" dirty="0">
+                        <a:rPr lang="ru-RU" sz="1800" b="1" dirty="0">
                           <a:effectLst/>
                         </a:rPr>
                         <a:t>Категория</a:t>
                       </a:r>
-                      <a:endParaRPr lang="en-US" sz="1100" b="1" dirty="0">
+                      <a:endParaRPr lang="en-US" sz="1800" b="1" dirty="0">
                         <a:effectLst/>
                         <a:latin typeface="Calibri" panose="020F0502020204030204" pitchFamily="34" charset="0"/>
                         <a:ea typeface="Calibri" panose="020F0502020204030204" pitchFamily="34" charset="0"/>
@@ -11090,12 +11664,12 @@
                         </a:spcAft>
                       </a:pPr>
                       <a:r>
-                        <a:rPr lang="ru-RU" sz="1400" b="1" dirty="0">
+                        <a:rPr lang="ru-RU" sz="1800" b="1" dirty="0">
                           <a:effectLst/>
                         </a:rPr>
                         <a:t>Описание</a:t>
                       </a:r>
-                      <a:endParaRPr lang="en-US" sz="1100" b="1" dirty="0">
+                      <a:endParaRPr lang="en-US" sz="1800" b="1" dirty="0">
                         <a:effectLst/>
                         <a:latin typeface="Calibri" panose="020F0502020204030204" pitchFamily="34" charset="0"/>
                         <a:ea typeface="Calibri" panose="020F0502020204030204" pitchFamily="34" charset="0"/>
@@ -11126,12 +11700,12 @@
                         </a:spcAft>
                       </a:pPr>
                       <a:r>
-                        <a:rPr lang="ru-RU" sz="1400" b="1" dirty="0">
+                        <a:rPr lang="ru-RU" sz="1800" b="1" dirty="0">
                           <a:effectLst/>
                         </a:rPr>
                         <a:t>Примеры</a:t>
                       </a:r>
-                      <a:endParaRPr lang="en-US" sz="1100" b="1" dirty="0">
+                      <a:endParaRPr lang="en-US" sz="1800" b="1" dirty="0">
                         <a:effectLst/>
                         <a:latin typeface="Calibri" panose="020F0502020204030204" pitchFamily="34" charset="0"/>
                         <a:ea typeface="Calibri" panose="020F0502020204030204" pitchFamily="34" charset="0"/>
@@ -11169,36 +11743,36 @@
                         </a:spcAft>
                       </a:pPr>
                       <a:r>
-                        <a:rPr lang="ru-RU" sz="1400" dirty="0">
+                        <a:rPr lang="ru-RU" sz="1800" dirty="0">
                           <a:effectLst/>
                         </a:rPr>
                         <a:t>Объекты потока (</a:t>
                       </a:r>
                       <a:r>
-                        <a:rPr lang="ru-RU" sz="1400" dirty="0" err="1">
+                        <a:rPr lang="ru-RU" sz="1800" dirty="0" err="1">
                           <a:effectLst/>
                         </a:rPr>
                         <a:t>Flow</a:t>
                       </a:r>
                       <a:r>
-                        <a:rPr lang="ru-RU" sz="1400" dirty="0">
+                        <a:rPr lang="ru-RU" sz="1800" dirty="0">
                           <a:effectLst/>
                         </a:rPr>
                         <a:t> </a:t>
                       </a:r>
                       <a:r>
-                        <a:rPr lang="ru-RU" sz="1400" dirty="0" err="1">
+                        <a:rPr lang="ru-RU" sz="1800" dirty="0" err="1">
                           <a:effectLst/>
                         </a:rPr>
                         <a:t>Objects</a:t>
                       </a:r>
                       <a:r>
-                        <a:rPr lang="ru-RU" sz="1400" dirty="0">
+                        <a:rPr lang="ru-RU" sz="1800" dirty="0">
                           <a:effectLst/>
                         </a:rPr>
                         <a:t>)</a:t>
                       </a:r>
-                      <a:endParaRPr lang="en-US" sz="1100" dirty="0">
+                      <a:endParaRPr lang="en-US" sz="1800" dirty="0">
                         <a:effectLst/>
                         <a:latin typeface="Calibri" panose="020F0502020204030204" pitchFamily="34" charset="0"/>
                         <a:ea typeface="Calibri" panose="020F0502020204030204" pitchFamily="34" charset="0"/>
@@ -11222,12 +11796,12 @@
                         </a:spcAft>
                       </a:pPr>
                       <a:r>
-                        <a:rPr lang="ru-RU" sz="1400" dirty="0">
+                        <a:rPr lang="ru-RU" sz="1800" dirty="0">
                           <a:effectLst/>
                         </a:rPr>
                         <a:t>Основные строительные блоки, определяющие поведение процесса</a:t>
                       </a:r>
-                      <a:endParaRPr lang="en-US" sz="1100" dirty="0">
+                      <a:endParaRPr lang="en-US" sz="1800" dirty="0">
                         <a:effectLst/>
                         <a:latin typeface="Calibri" panose="020F0502020204030204" pitchFamily="34" charset="0"/>
                         <a:ea typeface="Calibri" panose="020F0502020204030204" pitchFamily="34" charset="0"/>
@@ -11251,12 +11825,12 @@
                         </a:spcAft>
                       </a:pPr>
                       <a:r>
-                        <a:rPr lang="ru-RU" sz="1400" dirty="0">
+                        <a:rPr lang="ru-RU" sz="1800" dirty="0">
                           <a:effectLst/>
                         </a:rPr>
                         <a:t>События (круги), действия (прямоугольники со скруглениями), шлюзы (ромбы)</a:t>
                       </a:r>
-                      <a:endParaRPr lang="en-US" sz="1100" dirty="0">
+                      <a:endParaRPr lang="en-US" sz="1800" dirty="0">
                         <a:effectLst/>
                         <a:latin typeface="Calibri" panose="020F0502020204030204" pitchFamily="34" charset="0"/>
                         <a:ea typeface="Calibri" panose="020F0502020204030204" pitchFamily="34" charset="0"/>
@@ -11287,12 +11861,12 @@
                         </a:spcAft>
                       </a:pPr>
                       <a:r>
-                        <a:rPr lang="ru-RU" sz="1400">
+                        <a:rPr lang="ru-RU" sz="1800">
                           <a:effectLst/>
                         </a:rPr>
                         <a:t>Соединяющие объекты (Connecting Objects)</a:t>
                       </a:r>
-                      <a:endParaRPr lang="en-US" sz="1100">
+                      <a:endParaRPr lang="en-US" sz="1800">
                         <a:effectLst/>
                         <a:latin typeface="Calibri" panose="020F0502020204030204" pitchFamily="34" charset="0"/>
                         <a:ea typeface="Calibri" panose="020F0502020204030204" pitchFamily="34" charset="0"/>
@@ -11316,12 +11890,12 @@
                         </a:spcAft>
                       </a:pPr>
                       <a:r>
-                        <a:rPr lang="ru-RU" sz="1400">
+                        <a:rPr lang="ru-RU" sz="1800" dirty="0">
                           <a:effectLst/>
                         </a:rPr>
                         <a:t>Показывают, как элементы связаны между собой</a:t>
                       </a:r>
-                      <a:endParaRPr lang="en-US" sz="1100">
+                      <a:endParaRPr lang="en-US" sz="1800" dirty="0">
                         <a:effectLst/>
                         <a:latin typeface="Calibri" panose="020F0502020204030204" pitchFamily="34" charset="0"/>
                         <a:ea typeface="Calibri" panose="020F0502020204030204" pitchFamily="34" charset="0"/>
@@ -11345,12 +11919,12 @@
                         </a:spcAft>
                       </a:pPr>
                       <a:r>
-                        <a:rPr lang="ru-RU" sz="1400">
+                        <a:rPr lang="ru-RU" sz="1800" dirty="0">
                           <a:effectLst/>
                         </a:rPr>
                         <a:t>Поток управления (сплошная стрелка), поток сообщений (пунктирная), ассоциации</a:t>
                       </a:r>
-                      <a:endParaRPr lang="en-US" sz="1100">
+                      <a:endParaRPr lang="en-US" sz="1800" dirty="0">
                         <a:effectLst/>
                         <a:latin typeface="Calibri" panose="020F0502020204030204" pitchFamily="34" charset="0"/>
                         <a:ea typeface="Calibri" panose="020F0502020204030204" pitchFamily="34" charset="0"/>
@@ -11381,12 +11955,12 @@
                         </a:spcAft>
                       </a:pPr>
                       <a:r>
-                        <a:rPr lang="ru-RU" sz="1400">
+                        <a:rPr lang="ru-RU" sz="1800">
                           <a:effectLst/>
                         </a:rPr>
                         <a:t>Зоны ответственности (Swimlanes)</a:t>
                       </a:r>
-                      <a:endParaRPr lang="en-US" sz="1100">
+                      <a:endParaRPr lang="en-US" sz="1800">
                         <a:effectLst/>
                         <a:latin typeface="Calibri" panose="020F0502020204030204" pitchFamily="34" charset="0"/>
                         <a:ea typeface="Calibri" panose="020F0502020204030204" pitchFamily="34" charset="0"/>
@@ -11410,12 +11984,12 @@
                         </a:spcAft>
                       </a:pPr>
                       <a:r>
-                        <a:rPr lang="ru-RU" sz="1400">
+                        <a:rPr lang="ru-RU" sz="1800">
                           <a:effectLst/>
                         </a:rPr>
                         <a:t>Группируют действия по исполнителям или отделам</a:t>
                       </a:r>
-                      <a:endParaRPr lang="en-US" sz="1100">
+                      <a:endParaRPr lang="en-US" sz="1800">
                         <a:effectLst/>
                         <a:latin typeface="Calibri" panose="020F0502020204030204" pitchFamily="34" charset="0"/>
                         <a:ea typeface="Calibri" panose="020F0502020204030204" pitchFamily="34" charset="0"/>
@@ -11439,12 +12013,12 @@
                         </a:spcAft>
                       </a:pPr>
                       <a:r>
-                        <a:rPr lang="ru-RU" sz="1400">
+                        <a:rPr lang="ru-RU" sz="1800" dirty="0">
                           <a:effectLst/>
                         </a:rPr>
                         <a:t>Пулы (целые организации) и дорожки (роли внутри пула)</a:t>
                       </a:r>
-                      <a:endParaRPr lang="en-US" sz="1100">
+                      <a:endParaRPr lang="en-US" sz="1800" dirty="0">
                         <a:effectLst/>
                         <a:latin typeface="Calibri" panose="020F0502020204030204" pitchFamily="34" charset="0"/>
                         <a:ea typeface="Calibri" panose="020F0502020204030204" pitchFamily="34" charset="0"/>
@@ -11475,12 +12049,12 @@
                         </a:spcAft>
                       </a:pPr>
                       <a:r>
-                        <a:rPr lang="ru-RU" sz="1400">
+                        <a:rPr lang="ru-RU" sz="1800">
                           <a:effectLst/>
                         </a:rPr>
                         <a:t>Артефакты (Artifacts)</a:t>
                       </a:r>
-                      <a:endParaRPr lang="en-US" sz="1100">
+                      <a:endParaRPr lang="en-US" sz="1800">
                         <a:effectLst/>
                         <a:latin typeface="Calibri" panose="020F0502020204030204" pitchFamily="34" charset="0"/>
                         <a:ea typeface="Calibri" panose="020F0502020204030204" pitchFamily="34" charset="0"/>
@@ -11504,12 +12078,12 @@
                         </a:spcAft>
                       </a:pPr>
                       <a:r>
-                        <a:rPr lang="ru-RU" sz="1400">
+                        <a:rPr lang="ru-RU" sz="1800">
                           <a:effectLst/>
                         </a:rPr>
                         <a:t>Добавляют дополнительную информацию</a:t>
                       </a:r>
-                      <a:endParaRPr lang="en-US" sz="1100">
+                      <a:endParaRPr lang="en-US" sz="1800">
                         <a:effectLst/>
                         <a:latin typeface="Calibri" panose="020F0502020204030204" pitchFamily="34" charset="0"/>
                         <a:ea typeface="Calibri" panose="020F0502020204030204" pitchFamily="34" charset="0"/>
@@ -11533,12 +12107,12 @@
                         </a:spcAft>
                       </a:pPr>
                       <a:r>
-                        <a:rPr lang="ru-RU" sz="1400" dirty="0">
+                        <a:rPr lang="ru-RU" sz="1800" dirty="0">
                           <a:effectLst/>
                         </a:rPr>
                         <a:t>Объекты данных, группы, текстовые аннотации</a:t>
                       </a:r>
-                      <a:endParaRPr lang="en-US" sz="1100" dirty="0">
+                      <a:endParaRPr lang="en-US" sz="1800" dirty="0">
                         <a:effectLst/>
                         <a:latin typeface="Calibri" panose="020F0502020204030204" pitchFamily="34" charset="0"/>
                         <a:ea typeface="Calibri" panose="020F0502020204030204" pitchFamily="34" charset="0"/>
@@ -11558,6 +12132,88 @@
           </a:graphicData>
         </a:graphic>
       </p:graphicFrame>
+      <p:sp>
+        <p:nvSpPr>
+          <p:cNvPr id="7" name="Прямоугольник 6">
+            <a:extLst>
+              <a:ext uri="{FF2B5EF4-FFF2-40B4-BE49-F238E27FC236}">
+                <a16:creationId xmlns:a16="http://schemas.microsoft.com/office/drawing/2014/main" id="{F4106D70-4919-41E5-A8E6-60407CDAF629}"/>
+              </a:ext>
+            </a:extLst>
+          </p:cNvPr>
+          <p:cNvSpPr/>
+          <p:nvPr/>
+        </p:nvSpPr>
+        <p:spPr>
+          <a:xfrm>
+            <a:off x="1047750" y="6410632"/>
+            <a:ext cx="2743200" cy="285136"/>
+          </a:xfrm>
+          <a:prstGeom prst="rect">
+            <a:avLst/>
+          </a:prstGeom>
+          <a:solidFill>
+            <a:srgbClr val="FFFFFF"/>
+          </a:solidFill>
+          <a:ln w="12700" cap="flat">
+            <a:noFill/>
+            <a:prstDash val="solid"/>
+            <a:miter lim="800000"/>
+          </a:ln>
+          <a:effectLst/>
+          <a:sp3d/>
+        </p:spPr>
+        <p:style>
+          <a:lnRef idx="0">
+            <a:scrgbClr r="0" g="0" b="0"/>
+          </a:lnRef>
+          <a:fillRef idx="0">
+            <a:scrgbClr r="0" g="0" b="0"/>
+          </a:fillRef>
+          <a:effectRef idx="0">
+            <a:scrgbClr r="0" g="0" b="0"/>
+          </a:effectRef>
+          <a:fontRef idx="none"/>
+        </p:style>
+        <p:txBody>
+          <a:bodyPr rot="0" spcFirstLastPara="1" vertOverflow="overflow" horzOverflow="overflow" vert="horz" wrap="square" lIns="45719" tIns="45719" rIns="45719" bIns="45719" numCol="1" spcCol="38100" rtlCol="0" anchor="ctr">
+            <a:spAutoFit/>
+          </a:bodyPr>
+          <a:lstStyle/>
+          <a:p>
+            <a:pPr marL="0" marR="0" indent="0" algn="l" defTabSz="457200" rtl="0" fontAlgn="auto" latinLnBrk="0" hangingPunct="0">
+              <a:lnSpc>
+                <a:spcPct val="100000"/>
+              </a:lnSpc>
+              <a:spcBef>
+                <a:spcPts val="0"/>
+              </a:spcBef>
+              <a:spcAft>
+                <a:spcPts val="0"/>
+              </a:spcAft>
+              <a:buClrTx/>
+              <a:buSzTx/>
+              <a:buFontTx/>
+              <a:buNone/>
+              <a:tabLst/>
+            </a:pPr>
+            <a:endParaRPr kumimoji="0" lang="ru-RU" sz="1800" b="0" i="0" u="none" strike="noStrike" cap="none" spc="0" normalizeH="0" baseline="0">
+              <a:ln>
+                <a:noFill/>
+              </a:ln>
+              <a:solidFill>
+                <a:srgbClr val="000000"/>
+              </a:solidFill>
+              <a:effectLst/>
+              <a:uFillTx/>
+              <a:latin typeface="Arial"/>
+              <a:ea typeface="Arial"/>
+              <a:cs typeface="Arial"/>
+              <a:sym typeface="Arial"/>
+            </a:endParaRPr>
+          </a:p>
+        </p:txBody>
+      </p:sp>
     </p:spTree>
     <p:extLst>
       <p:ext uri="{BB962C8B-B14F-4D97-AF65-F5344CB8AC3E}">
@@ -11687,8 +12343,8 @@
         </p:nvSpPr>
         <p:spPr>
           <a:xfrm>
-            <a:off x="154858" y="851604"/>
-            <a:ext cx="12644284" cy="5639364"/>
+            <a:off x="154858" y="1024044"/>
+            <a:ext cx="12644284" cy="5053371"/>
           </a:xfrm>
           <a:prstGeom prst="rect">
             <a:avLst/>
@@ -11891,21 +12547,6 @@
             <a:endParaRPr lang="en-US" sz="2400" dirty="0">
               <a:effectLst/>
               <a:latin typeface="+mn-lt"/>
-              <a:ea typeface="Times New Roman" panose="02020603050405020304" pitchFamily="18" charset="0"/>
-            </a:endParaRPr>
-          </a:p>
-          <a:p>
-            <a:pPr algn="just">
-              <a:lnSpc>
-                <a:spcPct val="150000"/>
-              </a:lnSpc>
-              <a:spcBef>
-                <a:spcPts val="1200"/>
-              </a:spcBef>
-            </a:pPr>
-            <a:endParaRPr lang="en-US" sz="1800" dirty="0">
-              <a:effectLst/>
-              <a:latin typeface="Times New Roman" panose="02020603050405020304" pitchFamily="18" charset="0"/>
               <a:ea typeface="Times New Roman" panose="02020603050405020304" pitchFamily="18" charset="0"/>
             </a:endParaRPr>
           </a:p>
@@ -12091,6 +12732,88 @@
               <a:effectLst/>
               <a:uFillTx/>
               <a:latin typeface="+mn-lt"/>
+              <a:ea typeface="Arial"/>
+              <a:cs typeface="Arial"/>
+              <a:sym typeface="Arial"/>
+            </a:endParaRPr>
+          </a:p>
+        </p:txBody>
+      </p:sp>
+      <p:sp>
+        <p:nvSpPr>
+          <p:cNvPr id="7" name="Прямоугольник 6">
+            <a:extLst>
+              <a:ext uri="{FF2B5EF4-FFF2-40B4-BE49-F238E27FC236}">
+                <a16:creationId xmlns:a16="http://schemas.microsoft.com/office/drawing/2014/main" id="{586CB0D9-8AAA-4A90-A494-6F6B00B6E61A}"/>
+              </a:ext>
+            </a:extLst>
+          </p:cNvPr>
+          <p:cNvSpPr/>
+          <p:nvPr/>
+        </p:nvSpPr>
+        <p:spPr>
+          <a:xfrm>
+            <a:off x="1047750" y="6410632"/>
+            <a:ext cx="2743200" cy="285136"/>
+          </a:xfrm>
+          <a:prstGeom prst="rect">
+            <a:avLst/>
+          </a:prstGeom>
+          <a:solidFill>
+            <a:srgbClr val="FFFFFF"/>
+          </a:solidFill>
+          <a:ln w="12700" cap="flat">
+            <a:noFill/>
+            <a:prstDash val="solid"/>
+            <a:miter lim="800000"/>
+          </a:ln>
+          <a:effectLst/>
+          <a:sp3d/>
+        </p:spPr>
+        <p:style>
+          <a:lnRef idx="0">
+            <a:scrgbClr r="0" g="0" b="0"/>
+          </a:lnRef>
+          <a:fillRef idx="0">
+            <a:scrgbClr r="0" g="0" b="0"/>
+          </a:fillRef>
+          <a:effectRef idx="0">
+            <a:scrgbClr r="0" g="0" b="0"/>
+          </a:effectRef>
+          <a:fontRef idx="none"/>
+        </p:style>
+        <p:txBody>
+          <a:bodyPr rot="0" spcFirstLastPara="1" vertOverflow="overflow" horzOverflow="overflow" vert="horz" wrap="square" lIns="45719" tIns="45719" rIns="45719" bIns="45719" numCol="1" spcCol="38100" rtlCol="0" anchor="ctr">
+            <a:spAutoFit/>
+          </a:bodyPr>
+          <a:lstStyle/>
+          <a:p>
+            <a:pPr marL="0" marR="0" indent="0" algn="l" defTabSz="457200" rtl="0" fontAlgn="auto" latinLnBrk="0" hangingPunct="0">
+              <a:lnSpc>
+                <a:spcPct val="100000"/>
+              </a:lnSpc>
+              <a:spcBef>
+                <a:spcPts val="0"/>
+              </a:spcBef>
+              <a:spcAft>
+                <a:spcPts val="0"/>
+              </a:spcAft>
+              <a:buClrTx/>
+              <a:buSzTx/>
+              <a:buFontTx/>
+              <a:buNone/>
+              <a:tabLst/>
+            </a:pPr>
+            <a:endParaRPr kumimoji="0" lang="ru-RU" sz="1800" b="0" i="0" u="none" strike="noStrike" cap="none" spc="0" normalizeH="0" baseline="0">
+              <a:ln>
+                <a:noFill/>
+              </a:ln>
+              <a:solidFill>
+                <a:srgbClr val="000000"/>
+              </a:solidFill>
+              <a:effectLst/>
+              <a:uFillTx/>
+              <a:latin typeface="Arial"/>
               <a:ea typeface="Arial"/>
               <a:cs typeface="Arial"/>
               <a:sym typeface="Arial"/>
@@ -12227,7 +12950,7 @@
         </p:nvSpPr>
         <p:spPr>
           <a:xfrm>
-            <a:off x="565354" y="1166236"/>
+            <a:off x="565354" y="1232911"/>
             <a:ext cx="10935929" cy="4987712"/>
           </a:xfrm>
           <a:prstGeom prst="rect">
@@ -12634,6 +13357,88 @@
               <a:effectLst/>
               <a:uFillTx/>
               <a:latin typeface="+mn-lt"/>
+              <a:ea typeface="Arial"/>
+              <a:cs typeface="Arial"/>
+              <a:sym typeface="Arial"/>
+            </a:endParaRPr>
+          </a:p>
+        </p:txBody>
+      </p:sp>
+      <p:sp>
+        <p:nvSpPr>
+          <p:cNvPr id="7" name="Прямоугольник 6">
+            <a:extLst>
+              <a:ext uri="{FF2B5EF4-FFF2-40B4-BE49-F238E27FC236}">
+                <a16:creationId xmlns:a16="http://schemas.microsoft.com/office/drawing/2014/main" id="{2432C915-7AF9-4D7C-9532-AD04DC64F6C7}"/>
+              </a:ext>
+            </a:extLst>
+          </p:cNvPr>
+          <p:cNvSpPr/>
+          <p:nvPr/>
+        </p:nvSpPr>
+        <p:spPr>
+          <a:xfrm>
+            <a:off x="1047750" y="6410632"/>
+            <a:ext cx="2743200" cy="285136"/>
+          </a:xfrm>
+          <a:prstGeom prst="rect">
+            <a:avLst/>
+          </a:prstGeom>
+          <a:solidFill>
+            <a:srgbClr val="FFFFFF"/>
+          </a:solidFill>
+          <a:ln w="12700" cap="flat">
+            <a:noFill/>
+            <a:prstDash val="solid"/>
+            <a:miter lim="800000"/>
+          </a:ln>
+          <a:effectLst/>
+          <a:sp3d/>
+        </p:spPr>
+        <p:style>
+          <a:lnRef idx="0">
+            <a:scrgbClr r="0" g="0" b="0"/>
+          </a:lnRef>
+          <a:fillRef idx="0">
+            <a:scrgbClr r="0" g="0" b="0"/>
+          </a:fillRef>
+          <a:effectRef idx="0">
+            <a:scrgbClr r="0" g="0" b="0"/>
+          </a:effectRef>
+          <a:fontRef idx="none"/>
+        </p:style>
+        <p:txBody>
+          <a:bodyPr rot="0" spcFirstLastPara="1" vertOverflow="overflow" horzOverflow="overflow" vert="horz" wrap="square" lIns="45719" tIns="45719" rIns="45719" bIns="45719" numCol="1" spcCol="38100" rtlCol="0" anchor="ctr">
+            <a:spAutoFit/>
+          </a:bodyPr>
+          <a:lstStyle/>
+          <a:p>
+            <a:pPr marL="0" marR="0" indent="0" algn="l" defTabSz="457200" rtl="0" fontAlgn="auto" latinLnBrk="0" hangingPunct="0">
+              <a:lnSpc>
+                <a:spcPct val="100000"/>
+              </a:lnSpc>
+              <a:spcBef>
+                <a:spcPts val="0"/>
+              </a:spcBef>
+              <a:spcAft>
+                <a:spcPts val="0"/>
+              </a:spcAft>
+              <a:buClrTx/>
+              <a:buSzTx/>
+              <a:buFontTx/>
+              <a:buNone/>
+              <a:tabLst/>
+            </a:pPr>
+            <a:endParaRPr kumimoji="0" lang="ru-RU" sz="1800" b="0" i="0" u="none" strike="noStrike" cap="none" spc="0" normalizeH="0" baseline="0">
+              <a:ln>
+                <a:noFill/>
+              </a:ln>
+              <a:solidFill>
+                <a:srgbClr val="000000"/>
+              </a:solidFill>
+              <a:effectLst/>
+              <a:uFillTx/>
+              <a:latin typeface="Arial"/>
               <a:ea typeface="Arial"/>
               <a:cs typeface="Arial"/>
               <a:sym typeface="Arial"/>
@@ -12962,8 +13767,8 @@
         </p:nvSpPr>
         <p:spPr>
           <a:xfrm>
-            <a:off x="2663333" y="830978"/>
-            <a:ext cx="7627334" cy="5170644"/>
+            <a:off x="2186756" y="719186"/>
+            <a:ext cx="8580488" cy="5632309"/>
           </a:xfrm>
           <a:prstGeom prst="rect">
             <a:avLst/>
@@ -13011,7 +13816,7 @@
               <a:tabLst/>
             </a:pPr>
             <a:r>
-              <a:rPr kumimoji="0" lang="ru-RU" sz="2200" b="0" i="0" u="none" strike="noStrike" cap="none" spc="0" normalizeH="0" baseline="0" dirty="0">
+              <a:rPr kumimoji="0" lang="ru-RU" sz="2400" b="0" i="0" u="none" strike="noStrike" cap="none" spc="0" normalizeH="0" baseline="0" dirty="0">
                 <a:ln>
                   <a:noFill/>
                 </a:ln>
@@ -13029,7 +13834,7 @@
               <a:t>Цель работы</a:t>
             </a:r>
             <a:r>
-              <a:rPr kumimoji="0" lang="ru-RU" sz="2000" b="0" i="0" u="none" strike="noStrike" cap="none" spc="0" normalizeH="0" baseline="0" dirty="0">
+              <a:rPr kumimoji="0" lang="ru-RU" sz="2400" b="0" i="0" u="none" strike="noStrike" cap="none" spc="0" normalizeH="0" baseline="0" dirty="0">
                 <a:ln>
                   <a:noFill/>
                 </a:ln>
@@ -13043,24 +13848,7 @@
                 <a:cs typeface="Arial"/>
                 <a:sym typeface="Arial"/>
               </a:rPr>
-              <a:t>…………………………………………………...</a:t>
-            </a:r>
-            <a:r>
-              <a:rPr kumimoji="0" lang="ru-RU" sz="2200" b="0" i="0" u="none" strike="noStrike" cap="none" spc="0" normalizeH="0" baseline="0" dirty="0">
-                <a:ln>
-                  <a:noFill/>
-                </a:ln>
-                <a:solidFill>
-                  <a:srgbClr val="000000"/>
-                </a:solidFill>
-                <a:effectLst/>
-                <a:uFillTx/>
-                <a:latin typeface="+mn-lt"/>
-                <a:ea typeface="Arial"/>
-                <a:cs typeface="Arial"/>
-                <a:sym typeface="Arial"/>
-              </a:rPr>
-              <a:t>3</a:t>
+              <a:t>………………………………………………………3</a:t>
             </a:r>
           </a:p>
           <a:p>
@@ -13081,14 +13869,14 @@
               <a:tabLst/>
             </a:pPr>
             <a:r>
-              <a:rPr lang="ru-RU" sz="2200" dirty="0">
+              <a:rPr lang="ru-RU" sz="2400" dirty="0">
                 <a:latin typeface="+mn-lt"/>
                 <a:hlinkClick r:id="rId3" action="ppaction://hlinksldjump"/>
               </a:rPr>
               <a:t>Задачи</a:t>
             </a:r>
             <a:r>
-              <a:rPr kumimoji="0" lang="ru-RU" sz="2000" b="0" i="0" u="none" strike="noStrike" cap="none" spc="0" normalizeH="0" baseline="0" dirty="0">
+              <a:rPr kumimoji="0" lang="ru-RU" sz="2400" b="0" i="0" u="none" strike="noStrike" cap="none" spc="0" normalizeH="0" baseline="0" dirty="0">
                 <a:ln>
                   <a:noFill/>
                 </a:ln>
@@ -13102,10 +13890,16 @@
                 <a:cs typeface="Arial"/>
                 <a:sym typeface="Arial"/>
               </a:rPr>
-              <a:t>…………………………………………………………..</a:t>
-            </a:r>
-            <a:r>
-              <a:rPr kumimoji="0" lang="ru-RU" sz="2200" b="0" i="0" u="none" strike="noStrike" cap="none" spc="0" normalizeH="0" baseline="0" dirty="0">
+              <a:t>……………………………………………………………</a:t>
+            </a:r>
+            <a:r>
+              <a:rPr lang="en-US" sz="2400" dirty="0">
+                <a:latin typeface="+mn-lt"/>
+              </a:rPr>
+              <a:t>..</a:t>
+            </a:r>
+            <a:r>
+              <a:rPr kumimoji="0" lang="ru-RU" sz="2400" b="0" i="0" u="none" strike="noStrike" cap="none" spc="0" normalizeH="0" baseline="0" dirty="0">
                 <a:ln>
                   <a:noFill/>
                 </a:ln>
@@ -13122,19 +13916,19 @@
               <a:t>4</a:t>
             </a:r>
             <a:br>
-              <a:rPr lang="ru-RU" sz="2200" dirty="0">
+              <a:rPr lang="ru-RU" sz="2400" dirty="0">
                 <a:latin typeface="+mn-lt"/>
               </a:rPr>
             </a:br>
             <a:r>
-              <a:rPr lang="ru-RU" sz="2200" dirty="0">
+              <a:rPr lang="ru-RU" sz="2400" dirty="0">
                 <a:latin typeface="+mn-lt"/>
                 <a:hlinkClick r:id="rId4" action="ppaction://hlinksldjump"/>
               </a:rPr>
               <a:t>Используемое ПО</a:t>
             </a:r>
             <a:r>
-              <a:rPr kumimoji="0" lang="ru-RU" sz="2000" b="0" i="0" u="none" strike="noStrike" cap="none" spc="0" normalizeH="0" baseline="0" dirty="0">
+              <a:rPr kumimoji="0" lang="ru-RU" sz="2400" b="0" i="0" u="none" strike="noStrike" cap="none" spc="0" normalizeH="0" baseline="0" dirty="0">
                 <a:ln>
                   <a:noFill/>
                 </a:ln>
@@ -13148,10 +13942,22 @@
                 <a:cs typeface="Arial"/>
                 <a:sym typeface="Arial"/>
               </a:rPr>
-              <a:t>……………...……………………………..</a:t>
-            </a:r>
-            <a:r>
-              <a:rPr kumimoji="0" lang="ru-RU" sz="2200" b="0" i="0" u="none" strike="noStrike" cap="none" spc="0" normalizeH="0" baseline="0" dirty="0">
+              <a:t>……………...…………………………………5</a:t>
+            </a:r>
+            <a:br>
+              <a:rPr lang="ru-RU" sz="2400" dirty="0">
+                <a:latin typeface="+mn-lt"/>
+              </a:rPr>
+            </a:br>
+            <a:r>
+              <a:rPr lang="ru-RU" sz="2400" dirty="0">
+                <a:latin typeface="+mn-lt"/>
+                <a:hlinkClick r:id="rId5" action="ppaction://hlinksldjump"/>
+              </a:rPr>
+              <a:t>Выбор документа</a:t>
+            </a:r>
+            <a:r>
+              <a:rPr kumimoji="0" lang="ru-RU" sz="2400" b="0" i="0" u="none" strike="noStrike" cap="none" spc="0" normalizeH="0" baseline="0" dirty="0">
                 <a:ln>
                   <a:noFill/>
                 </a:ln>
@@ -13165,22 +13971,22 @@
                 <a:cs typeface="Arial"/>
                 <a:sym typeface="Arial"/>
               </a:rPr>
-              <a:t>5</a:t>
+              <a:t>…………………………………………….…...6</a:t>
             </a:r>
             <a:br>
-              <a:rPr lang="ru-RU" sz="2200" dirty="0">
+              <a:rPr lang="ru-RU" sz="2400" dirty="0">
                 <a:latin typeface="+mn-lt"/>
               </a:rPr>
             </a:br>
             <a:r>
-              <a:rPr lang="ru-RU" sz="2200" dirty="0">
+              <a:rPr lang="ru-RU" sz="2400" dirty="0">
                 <a:latin typeface="+mn-lt"/>
-                <a:hlinkClick r:id="rId5" action="ppaction://hlinksldjump"/>
-              </a:rPr>
-              <a:t>Выбор документа</a:t>
-            </a:r>
-            <a:r>
-              <a:rPr kumimoji="0" lang="ru-RU" sz="2000" b="0" i="0" u="none" strike="noStrike" cap="none" spc="0" normalizeH="0" baseline="0" dirty="0">
+                <a:hlinkClick r:id="rId6" action="ppaction://hlinksldjump"/>
+              </a:rPr>
+              <a:t>Реквизитный анализ документа</a:t>
+            </a:r>
+            <a:r>
+              <a:rPr kumimoji="0" lang="ru-RU" sz="2400" b="0" i="0" u="none" strike="noStrike" cap="none" spc="0" normalizeH="0" baseline="0" dirty="0">
                 <a:ln>
                   <a:noFill/>
                 </a:ln>
@@ -13194,10 +14000,22 @@
                 <a:cs typeface="Arial"/>
                 <a:sym typeface="Arial"/>
               </a:rPr>
-              <a:t>……………………………………………..</a:t>
-            </a:r>
-            <a:r>
-              <a:rPr kumimoji="0" lang="ru-RU" sz="2200" b="0" i="0" u="none" strike="noStrike" cap="none" spc="0" normalizeH="0" baseline="0" dirty="0">
+              <a:t>…………………………………7</a:t>
+            </a:r>
+            <a:br>
+              <a:rPr lang="ru-RU" sz="2400" dirty="0">
+                <a:latin typeface="+mn-lt"/>
+              </a:rPr>
+            </a:br>
+            <a:r>
+              <a:rPr lang="ru-RU" sz="2400" dirty="0">
+                <a:latin typeface="+mn-lt"/>
+                <a:hlinkClick r:id="rId7" action="ppaction://hlinksldjump"/>
+              </a:rPr>
+              <a:t>Финансовые и экономические реквизиты</a:t>
+            </a:r>
+            <a:r>
+              <a:rPr kumimoji="0" lang="ru-RU" sz="2400" b="0" i="0" u="none" strike="noStrike" cap="none" spc="0" normalizeH="0" baseline="0" dirty="0">
                 <a:ln>
                   <a:noFill/>
                 </a:ln>
@@ -13211,101 +14029,9 @@
                 <a:cs typeface="Arial"/>
                 <a:sym typeface="Arial"/>
               </a:rPr>
-              <a:t>6</a:t>
-            </a:r>
-            <a:br>
-              <a:rPr lang="ru-RU" sz="2200" dirty="0">
-                <a:latin typeface="+mn-lt"/>
-              </a:rPr>
-            </a:br>
-            <a:r>
-              <a:rPr lang="ru-RU" sz="2200" dirty="0">
-                <a:latin typeface="+mn-lt"/>
-                <a:hlinkClick r:id="rId6" action="ppaction://hlinksldjump"/>
-              </a:rPr>
-              <a:t>Реквизитный анализ документа</a:t>
-            </a:r>
-            <a:r>
-              <a:rPr kumimoji="0" lang="ru-RU" sz="2000" b="0" i="0" u="none" strike="noStrike" cap="none" spc="0" normalizeH="0" baseline="0" dirty="0">
-                <a:ln>
-                  <a:noFill/>
-                </a:ln>
-                <a:solidFill>
-                  <a:srgbClr val="000000"/>
-                </a:solidFill>
-                <a:effectLst/>
-                <a:uFillTx/>
-                <a:latin typeface="+mn-lt"/>
-                <a:ea typeface="Arial"/>
-                <a:cs typeface="Arial"/>
-                <a:sym typeface="Arial"/>
-              </a:rPr>
-              <a:t>……………………………</a:t>
-            </a:r>
-            <a:r>
-              <a:rPr kumimoji="0" lang="ru-RU" sz="2200" b="0" i="0" u="none" strike="noStrike" cap="none" spc="0" normalizeH="0" baseline="0" dirty="0">
-                <a:ln>
-                  <a:noFill/>
-                </a:ln>
-                <a:solidFill>
-                  <a:srgbClr val="000000"/>
-                </a:solidFill>
-                <a:effectLst/>
-                <a:uFillTx/>
-                <a:latin typeface="+mn-lt"/>
-                <a:ea typeface="Arial"/>
-                <a:cs typeface="Arial"/>
-                <a:sym typeface="Arial"/>
-              </a:rPr>
-              <a:t>7</a:t>
-            </a:r>
-            <a:br>
-              <a:rPr lang="ru-RU" sz="2200" dirty="0">
-                <a:latin typeface="+mn-lt"/>
-              </a:rPr>
-            </a:br>
-            <a:r>
-              <a:rPr lang="ru-RU" sz="2200" dirty="0">
-                <a:latin typeface="+mn-lt"/>
-                <a:hlinkClick r:id="rId7" action="ppaction://hlinksldjump"/>
-              </a:rPr>
-              <a:t>Финансовые и экономические реквизиты</a:t>
-            </a:r>
-            <a:r>
-              <a:rPr kumimoji="0" lang="ru-RU" sz="2000" b="0" i="0" u="none" strike="noStrike" cap="none" spc="0" normalizeH="0" baseline="0" dirty="0">
-                <a:ln>
-                  <a:noFill/>
-                </a:ln>
-                <a:solidFill>
-                  <a:srgbClr val="000000"/>
-                </a:solidFill>
-                <a:effectLst/>
-                <a:uFillTx/>
-                <a:latin typeface="+mn-lt"/>
-                <a:ea typeface="Arial"/>
-                <a:cs typeface="Arial"/>
-                <a:sym typeface="Arial"/>
-              </a:rPr>
-              <a:t>………………</a:t>
-            </a:r>
-            <a:r>
-              <a:rPr kumimoji="0" lang="ru-RU" sz="2200" b="0" i="0" u="none" strike="noStrike" cap="none" spc="0" normalizeH="0" baseline="0" dirty="0">
-                <a:ln>
-                  <a:noFill/>
-                </a:ln>
-                <a:solidFill>
-                  <a:srgbClr val="000000"/>
-                </a:solidFill>
-                <a:effectLst/>
-                <a:uFillTx/>
-                <a:latin typeface="+mn-lt"/>
-                <a:ea typeface="Arial"/>
-                <a:cs typeface="Arial"/>
-                <a:sym typeface="Arial"/>
-              </a:rPr>
-              <a:t>11</a:t>
-            </a:r>
-            <a:endParaRPr lang="ru-RU" sz="2200" dirty="0">
+              <a:t>………………………11</a:t>
+            </a:r>
+            <a:endParaRPr lang="ru-RU" sz="2400" dirty="0">
               <a:latin typeface="+mn-lt"/>
             </a:endParaRPr>
           </a:p>
@@ -13327,14 +14053,14 @@
               <a:tabLst/>
             </a:pPr>
             <a:r>
-              <a:rPr lang="ru-RU" sz="2200" dirty="0">
+              <a:rPr lang="ru-RU" sz="2400" dirty="0">
                 <a:latin typeface="+mn-lt"/>
                 <a:hlinkClick r:id="rId8" action="ppaction://hlinksldjump"/>
               </a:rPr>
               <a:t>Описание процесса работы с документом</a:t>
             </a:r>
             <a:r>
-              <a:rPr kumimoji="0" lang="ru-RU" sz="2000" b="0" i="0" u="none" strike="noStrike" cap="none" spc="0" normalizeH="0" baseline="0" dirty="0">
+              <a:rPr kumimoji="0" lang="ru-RU" sz="2400" b="0" i="0" u="none" strike="noStrike" cap="none" spc="0" normalizeH="0" baseline="0" dirty="0">
                 <a:ln>
                   <a:noFill/>
                 </a:ln>
@@ -13348,26 +14074,9 @@
                 <a:cs typeface="Arial"/>
                 <a:sym typeface="Arial"/>
               </a:rPr>
-              <a:t>……………....</a:t>
-            </a:r>
-            <a:r>
-              <a:rPr kumimoji="0" lang="ru-RU" sz="2200" b="0" i="0" u="none" strike="noStrike" cap="none" spc="0" normalizeH="0" baseline="0" dirty="0">
-                <a:ln>
-                  <a:noFill/>
-                </a:ln>
-                <a:solidFill>
-                  <a:srgbClr val="000000"/>
-                </a:solidFill>
-                <a:effectLst/>
-                <a:uFillTx/>
-                <a:latin typeface="+mn-lt"/>
-                <a:ea typeface="Arial"/>
-                <a:cs typeface="Arial"/>
-                <a:sym typeface="Arial"/>
-              </a:rPr>
-              <a:t>13</a:t>
-            </a:r>
-            <a:endParaRPr lang="ru-RU" sz="2200" dirty="0">
+              <a:t>……………...………13</a:t>
+            </a:r>
+            <a:endParaRPr lang="ru-RU" sz="2400" dirty="0">
               <a:latin typeface="+mn-lt"/>
             </a:endParaRPr>
           </a:p>
@@ -13389,21 +14098,21 @@
               <a:tabLst/>
             </a:pPr>
             <a:r>
-              <a:rPr lang="ru-RU" sz="2200" dirty="0">
+              <a:rPr lang="ru-RU" sz="2400" dirty="0">
                 <a:latin typeface="+mn-lt"/>
                 <a:hlinkClick r:id="rId9" action="ppaction://hlinksldjump"/>
               </a:rPr>
               <a:t>Изучение назначения и особенностей </a:t>
             </a:r>
             <a:r>
-              <a:rPr lang="en-US" sz="2200" dirty="0">
+              <a:rPr lang="en-US" sz="2400" dirty="0">
                 <a:latin typeface="+mn-lt"/>
                 <a:hlinkClick r:id="rId9" action="ppaction://hlinksldjump"/>
               </a:rPr>
               <a:t>BPMN 2.0</a:t>
             </a:r>
             <a:r>
-              <a:rPr kumimoji="0" lang="ru-RU" sz="2000" b="0" i="0" u="none" strike="noStrike" cap="none" spc="0" normalizeH="0" baseline="0" dirty="0">
+              <a:rPr kumimoji="0" lang="ru-RU" sz="2400" b="0" i="0" u="none" strike="noStrike" cap="none" spc="0" normalizeH="0" baseline="0" dirty="0">
                 <a:ln>
                   <a:noFill/>
                 </a:ln>
@@ -13417,26 +14126,9 @@
                 <a:cs typeface="Arial"/>
                 <a:sym typeface="Arial"/>
               </a:rPr>
-              <a:t>……...</a:t>
-            </a:r>
-            <a:r>
-              <a:rPr kumimoji="0" lang="ru-RU" sz="2200" b="0" i="0" u="none" strike="noStrike" cap="none" spc="0" normalizeH="0" baseline="0" dirty="0">
-                <a:ln>
-                  <a:noFill/>
-                </a:ln>
-                <a:solidFill>
-                  <a:srgbClr val="000000"/>
-                </a:solidFill>
-                <a:effectLst/>
-                <a:uFillTx/>
-                <a:latin typeface="+mn-lt"/>
-                <a:ea typeface="Arial"/>
-                <a:cs typeface="Arial"/>
-                <a:sym typeface="Arial"/>
-              </a:rPr>
-              <a:t>15</a:t>
-            </a:r>
-            <a:endParaRPr lang="en-US" sz="2200" dirty="0">
+              <a:t>……... ………15</a:t>
+            </a:r>
+            <a:endParaRPr lang="en-US" sz="2400" dirty="0">
               <a:latin typeface="+mn-lt"/>
             </a:endParaRPr>
           </a:p>
@@ -13458,14 +14150,14 @@
               <a:tabLst/>
             </a:pPr>
             <a:r>
-              <a:rPr lang="ru-RU" sz="2200" dirty="0">
+              <a:rPr lang="ru-RU" sz="2400" dirty="0">
                 <a:latin typeface="+mn-lt"/>
                 <a:hlinkClick r:id="rId10" action="ppaction://hlinksldjump"/>
               </a:rPr>
               <a:t>История и стандартизация</a:t>
             </a:r>
             <a:r>
-              <a:rPr kumimoji="0" lang="ru-RU" sz="2000" b="0" i="0" u="none" strike="noStrike" cap="none" spc="0" normalizeH="0" baseline="0" dirty="0">
+              <a:rPr kumimoji="0" lang="ru-RU" sz="2400" b="0" i="0" u="none" strike="noStrike" cap="none" spc="0" normalizeH="0" baseline="0" dirty="0">
                 <a:ln>
                   <a:noFill/>
                 </a:ln>
@@ -13479,26 +14171,9 @@
                 <a:cs typeface="Arial"/>
                 <a:sym typeface="Arial"/>
               </a:rPr>
-              <a:t>………………………………....</a:t>
-            </a:r>
-            <a:r>
-              <a:rPr kumimoji="0" lang="ru-RU" sz="2200" b="0" i="0" u="none" strike="noStrike" cap="none" spc="0" normalizeH="0" baseline="0" dirty="0">
-                <a:ln>
-                  <a:noFill/>
-                </a:ln>
-                <a:solidFill>
-                  <a:srgbClr val="000000"/>
-                </a:solidFill>
-                <a:effectLst/>
-                <a:uFillTx/>
-                <a:latin typeface="+mn-lt"/>
-                <a:ea typeface="Arial"/>
-                <a:cs typeface="Arial"/>
-                <a:sym typeface="Arial"/>
-              </a:rPr>
-              <a:t>16</a:t>
-            </a:r>
-            <a:endParaRPr lang="ru-RU" sz="2200" dirty="0">
+              <a:t>……………………………….... ……16</a:t>
+            </a:r>
+            <a:endParaRPr lang="ru-RU" sz="2400" dirty="0">
               <a:latin typeface="+mn-lt"/>
             </a:endParaRPr>
           </a:p>
@@ -13520,21 +14195,21 @@
               <a:tabLst/>
             </a:pPr>
             <a:r>
-              <a:rPr lang="ru-RU" sz="2200" dirty="0">
+              <a:rPr lang="ru-RU" sz="2400" dirty="0">
                 <a:latin typeface="+mn-lt"/>
                 <a:hlinkClick r:id="rId11" action="ppaction://hlinksldjump"/>
               </a:rPr>
               <a:t>Ключевые особенности </a:t>
             </a:r>
             <a:r>
-              <a:rPr lang="en-US" sz="2200" dirty="0">
+              <a:rPr lang="en-US" sz="2400" dirty="0">
                 <a:latin typeface="+mn-lt"/>
                 <a:hlinkClick r:id="rId11" action="ppaction://hlinksldjump"/>
               </a:rPr>
               <a:t>BPMN 2.0</a:t>
             </a:r>
             <a:r>
-              <a:rPr kumimoji="0" lang="ru-RU" sz="2000" b="0" i="0" u="none" strike="noStrike" cap="none" spc="0" normalizeH="0" baseline="0" dirty="0">
+              <a:rPr kumimoji="0" lang="ru-RU" sz="2400" b="0" i="0" u="none" strike="noStrike" cap="none" spc="0" normalizeH="0" baseline="0" dirty="0">
                 <a:ln>
                   <a:noFill/>
                 </a:ln>
@@ -13548,26 +14223,9 @@
                 <a:cs typeface="Arial"/>
                 <a:sym typeface="Arial"/>
               </a:rPr>
-              <a:t>……………………….</a:t>
-            </a:r>
-            <a:r>
-              <a:rPr kumimoji="0" lang="ru-RU" sz="2200" b="0" i="0" u="none" strike="noStrike" cap="none" spc="0" normalizeH="0" baseline="0" dirty="0">
-                <a:ln>
-                  <a:noFill/>
-                </a:ln>
-                <a:solidFill>
-                  <a:srgbClr val="000000"/>
-                </a:solidFill>
-                <a:effectLst/>
-                <a:uFillTx/>
-                <a:latin typeface="+mn-lt"/>
-                <a:ea typeface="Arial"/>
-                <a:cs typeface="Arial"/>
-                <a:sym typeface="Arial"/>
-              </a:rPr>
-              <a:t>17</a:t>
-            </a:r>
-            <a:endParaRPr lang="ru-RU" sz="2200" dirty="0">
+              <a:t>……………………….……..17</a:t>
+            </a:r>
+            <a:endParaRPr lang="ru-RU" sz="2400" dirty="0">
               <a:latin typeface="+mn-lt"/>
             </a:endParaRPr>
           </a:p>
@@ -13589,21 +14247,21 @@
               <a:tabLst/>
             </a:pPr>
             <a:r>
-              <a:rPr lang="ru-RU" sz="2200" dirty="0">
+              <a:rPr lang="ru-RU" sz="2400" dirty="0">
                 <a:latin typeface="+mn-lt"/>
                 <a:hlinkClick r:id="rId12" action="ppaction://hlinksldjump"/>
               </a:rPr>
               <a:t>Преимущества использования </a:t>
             </a:r>
             <a:r>
-              <a:rPr lang="en-US" sz="2200" dirty="0">
+              <a:rPr lang="en-US" sz="2400" dirty="0">
                 <a:latin typeface="+mn-lt"/>
                 <a:hlinkClick r:id="rId12" action="ppaction://hlinksldjump"/>
               </a:rPr>
               <a:t>BPMN 2.0</a:t>
             </a:r>
             <a:r>
-              <a:rPr kumimoji="0" lang="ru-RU" sz="2000" b="0" i="0" u="none" strike="noStrike" cap="none" spc="0" normalizeH="0" baseline="0" dirty="0">
+              <a:rPr kumimoji="0" lang="ru-RU" sz="2400" b="0" i="0" u="none" strike="noStrike" cap="none" spc="0" normalizeH="0" baseline="0" dirty="0">
                 <a:ln>
                   <a:noFill/>
                 </a:ln>
@@ -13617,26 +14275,9 @@
                 <a:cs typeface="Arial"/>
                 <a:sym typeface="Arial"/>
               </a:rPr>
-              <a:t>……………….</a:t>
-            </a:r>
-            <a:r>
-              <a:rPr kumimoji="0" lang="ru-RU" sz="2200" b="0" i="0" u="none" strike="noStrike" cap="none" spc="0" normalizeH="0" baseline="0" dirty="0">
-                <a:ln>
-                  <a:noFill/>
-                </a:ln>
-                <a:solidFill>
-                  <a:srgbClr val="000000"/>
-                </a:solidFill>
-                <a:effectLst/>
-                <a:uFillTx/>
-                <a:latin typeface="+mn-lt"/>
-                <a:ea typeface="Arial"/>
-                <a:cs typeface="Arial"/>
-                <a:sym typeface="Arial"/>
-              </a:rPr>
-              <a:t>20</a:t>
-            </a:r>
-            <a:endParaRPr lang="ru-RU" sz="2200" dirty="0">
+              <a:t>……………….………20</a:t>
+            </a:r>
+            <a:endParaRPr lang="ru-RU" sz="2400" dirty="0">
               <a:latin typeface="+mn-lt"/>
             </a:endParaRPr>
           </a:p>
@@ -13658,21 +14299,21 @@
               <a:tabLst/>
             </a:pPr>
             <a:r>
-              <a:rPr lang="ru-RU" sz="2200" dirty="0">
+              <a:rPr lang="ru-RU" sz="2400" dirty="0">
                 <a:latin typeface="+mn-lt"/>
                 <a:hlinkClick r:id="rId13" action="ppaction://hlinksldjump"/>
               </a:rPr>
               <a:t>Моделирование процесса в нотации </a:t>
             </a:r>
             <a:r>
-              <a:rPr lang="en-US" sz="2200" dirty="0">
+              <a:rPr lang="en-US" sz="2400" dirty="0">
                 <a:latin typeface="+mn-lt"/>
                 <a:hlinkClick r:id="rId13" action="ppaction://hlinksldjump"/>
               </a:rPr>
               <a:t>BPMN 2.0</a:t>
             </a:r>
             <a:r>
-              <a:rPr kumimoji="0" lang="ru-RU" sz="2000" b="0" i="0" u="none" strike="noStrike" cap="none" spc="0" normalizeH="0" baseline="0" dirty="0">
+              <a:rPr kumimoji="0" lang="ru-RU" sz="2400" b="0" i="0" u="none" strike="noStrike" cap="none" spc="0" normalizeH="0" baseline="0" dirty="0">
                 <a:ln>
                   <a:noFill/>
                 </a:ln>
@@ -13686,26 +14327,9 @@
                 <a:cs typeface="Arial"/>
                 <a:sym typeface="Arial"/>
               </a:rPr>
-              <a:t>………..</a:t>
-            </a:r>
-            <a:r>
-              <a:rPr kumimoji="0" lang="ru-RU" sz="2200" b="0" i="0" u="none" strike="noStrike" cap="none" spc="0" normalizeH="0" baseline="0" dirty="0">
-                <a:ln>
-                  <a:noFill/>
-                </a:ln>
-                <a:solidFill>
-                  <a:srgbClr val="000000"/>
-                </a:solidFill>
-                <a:effectLst/>
-                <a:uFillTx/>
-                <a:latin typeface="+mn-lt"/>
-                <a:ea typeface="Arial"/>
-                <a:cs typeface="Arial"/>
-                <a:sym typeface="Arial"/>
-              </a:rPr>
-              <a:t>21</a:t>
-            </a:r>
-            <a:endParaRPr lang="ru-RU" sz="2200" dirty="0">
+              <a:t>………..………21</a:t>
+            </a:r>
+            <a:endParaRPr lang="ru-RU" sz="2400" dirty="0">
               <a:latin typeface="+mn-lt"/>
             </a:endParaRPr>
           </a:p>
@@ -13727,14 +14351,14 @@
               <a:tabLst/>
             </a:pPr>
             <a:r>
-              <a:rPr lang="ru-RU" sz="2200" dirty="0">
+              <a:rPr lang="ru-RU" sz="2400" dirty="0">
                 <a:latin typeface="+mn-lt"/>
                 <a:hlinkClick r:id="rId14" action="ppaction://hlinksldjump"/>
               </a:rPr>
               <a:t>Проектирование базы данных</a:t>
             </a:r>
             <a:r>
-              <a:rPr kumimoji="0" lang="ru-RU" sz="2000" b="0" i="0" u="none" strike="noStrike" cap="none" spc="0" normalizeH="0" baseline="0" dirty="0">
+              <a:rPr kumimoji="0" lang="ru-RU" sz="2400" b="0" i="0" u="none" strike="noStrike" cap="none" spc="0" normalizeH="0" baseline="0" dirty="0">
                 <a:ln>
                   <a:noFill/>
                 </a:ln>
@@ -13748,24 +14372,7 @@
                 <a:cs typeface="Arial"/>
                 <a:sym typeface="Arial"/>
               </a:rPr>
-              <a:t>……………………………..</a:t>
-            </a:r>
-            <a:r>
-              <a:rPr kumimoji="0" lang="ru-RU" sz="2200" b="0" i="0" u="none" strike="noStrike" cap="none" spc="0" normalizeH="0" baseline="0" dirty="0">
-                <a:ln>
-                  <a:noFill/>
-                </a:ln>
-                <a:solidFill>
-                  <a:srgbClr val="000000"/>
-                </a:solidFill>
-                <a:effectLst/>
-                <a:uFillTx/>
-                <a:latin typeface="+mn-lt"/>
-                <a:ea typeface="Arial"/>
-                <a:cs typeface="Arial"/>
-                <a:sym typeface="Arial"/>
-              </a:rPr>
-              <a:t>23</a:t>
+              <a:t>…………………………….. ……23</a:t>
             </a:r>
           </a:p>
           <a:p>
@@ -13786,14 +14393,14 @@
               <a:tabLst/>
             </a:pPr>
             <a:r>
-              <a:rPr lang="ru-RU" sz="2200" dirty="0">
+              <a:rPr lang="ru-RU" sz="2400" dirty="0">
                 <a:latin typeface="+mn-lt"/>
                 <a:hlinkClick r:id="rId15" action="ppaction://hlinksldjump"/>
               </a:rPr>
               <a:t>Вывод</a:t>
             </a:r>
             <a:r>
-              <a:rPr kumimoji="0" lang="ru-RU" sz="2000" b="0" i="0" u="none" strike="noStrike" cap="none" spc="0" normalizeH="0" baseline="0" dirty="0">
+              <a:rPr kumimoji="0" lang="ru-RU" sz="2400" b="0" i="0" u="none" strike="noStrike" cap="none" spc="0" normalizeH="0" baseline="0" dirty="0">
                 <a:ln>
                   <a:noFill/>
                 </a:ln>
@@ -13807,10 +14414,22 @@
                 <a:cs typeface="Arial"/>
                 <a:sym typeface="Arial"/>
               </a:rPr>
-              <a:t>……………………………….………………………….</a:t>
-            </a:r>
-            <a:r>
-              <a:rPr kumimoji="0" lang="ru-RU" sz="2200" b="0" i="0" u="none" strike="noStrike" cap="none" spc="0" normalizeH="0" baseline="0" dirty="0">
+              <a:t>……………………………….……………………………..36</a:t>
+            </a:r>
+            <a:br>
+              <a:rPr lang="ru-RU" sz="2400" dirty="0">
+                <a:latin typeface="+mn-lt"/>
+              </a:rPr>
+            </a:br>
+            <a:r>
+              <a:rPr lang="ru-RU" sz="2400" dirty="0">
+                <a:latin typeface="+mn-lt"/>
+                <a:hlinkClick r:id="rId16" action="ppaction://hlinksldjump"/>
+              </a:rPr>
+              <a:t>Используемые источники</a:t>
+            </a:r>
+            <a:r>
+              <a:rPr kumimoji="0" lang="ru-RU" sz="2400" b="0" i="0" u="none" strike="noStrike" cap="none" spc="0" normalizeH="0" baseline="0" dirty="0">
                 <a:ln>
                   <a:noFill/>
                 </a:ln>
@@ -13824,56 +14443,92 @@
                 <a:cs typeface="Arial"/>
                 <a:sym typeface="Arial"/>
               </a:rPr>
-              <a:t>36</a:t>
-            </a:r>
-            <a:br>
-              <a:rPr lang="ru-RU" sz="2200" dirty="0">
-                <a:latin typeface="+mn-lt"/>
-              </a:rPr>
-            </a:br>
-            <a:r>
-              <a:rPr lang="ru-RU" sz="2200" dirty="0">
-                <a:latin typeface="+mn-lt"/>
-                <a:hlinkClick r:id="rId16" action="ppaction://hlinksldjump"/>
-              </a:rPr>
-              <a:t>Используемые источники</a:t>
-            </a:r>
-            <a:r>
-              <a:rPr kumimoji="0" lang="ru-RU" sz="2000" b="0" i="0" u="none" strike="noStrike" cap="none" spc="0" normalizeH="0" baseline="0" dirty="0">
-                <a:ln>
-                  <a:noFill/>
-                </a:ln>
-                <a:solidFill>
-                  <a:srgbClr val="000000"/>
-                </a:solidFill>
-                <a:effectLst/>
-                <a:uFillTx/>
-                <a:latin typeface="+mn-lt"/>
-                <a:ea typeface="Arial"/>
-                <a:cs typeface="Arial"/>
-                <a:sym typeface="Arial"/>
-              </a:rPr>
-              <a:t>…………………………………..</a:t>
-            </a:r>
-            <a:r>
-              <a:rPr kumimoji="0" lang="ru-RU" sz="2200" b="0" i="0" u="none" strike="noStrike" cap="none" spc="0" normalizeH="0" baseline="0" dirty="0">
-                <a:ln>
-                  <a:noFill/>
-                </a:ln>
-                <a:solidFill>
-                  <a:srgbClr val="000000"/>
-                </a:solidFill>
-                <a:effectLst/>
-                <a:uFillTx/>
-                <a:latin typeface="+mn-lt"/>
-                <a:ea typeface="Arial"/>
-                <a:cs typeface="Arial"/>
-                <a:sym typeface="Arial"/>
-              </a:rPr>
-              <a:t>37</a:t>
-            </a:r>
-            <a:endParaRPr lang="ru-RU" sz="2200" dirty="0">
+              <a:t>…………………………………..……37</a:t>
+            </a:r>
+            <a:endParaRPr lang="ru-RU" sz="2400" dirty="0">
               <a:latin typeface="+mn-lt"/>
+            </a:endParaRPr>
+          </a:p>
+        </p:txBody>
+      </p:sp>
+      <p:sp>
+        <p:nvSpPr>
+          <p:cNvPr id="3" name="Прямоугольник 2">
+            <a:extLst>
+              <a:ext uri="{FF2B5EF4-FFF2-40B4-BE49-F238E27FC236}">
+                <a16:creationId xmlns:a16="http://schemas.microsoft.com/office/drawing/2014/main" id="{D1F2BEEC-FADE-4C2E-8620-928B9C15F43F}"/>
+              </a:ext>
+            </a:extLst>
+          </p:cNvPr>
+          <p:cNvSpPr/>
+          <p:nvPr/>
+        </p:nvSpPr>
+        <p:spPr>
+          <a:xfrm>
+            <a:off x="1047750" y="6410632"/>
+            <a:ext cx="2743200" cy="285136"/>
+          </a:xfrm>
+          <a:prstGeom prst="rect">
+            <a:avLst/>
+          </a:prstGeom>
+          <a:solidFill>
+            <a:srgbClr val="FFFFFF"/>
+          </a:solidFill>
+          <a:ln w="12700" cap="flat">
+            <a:noFill/>
+            <a:prstDash val="solid"/>
+            <a:miter lim="800000"/>
+          </a:ln>
+          <a:effectLst/>
+          <a:sp3d/>
+        </p:spPr>
+        <p:style>
+          <a:lnRef idx="0">
+            <a:scrgbClr r="0" g="0" b="0"/>
+          </a:lnRef>
+          <a:fillRef idx="0">
+            <a:scrgbClr r="0" g="0" b="0"/>
+          </a:fillRef>
+          <a:effectRef idx="0">
+            <a:scrgbClr r="0" g="0" b="0"/>
+          </a:effectRef>
+          <a:fontRef idx="none"/>
+        </p:style>
+        <p:txBody>
+          <a:bodyPr rot="0" spcFirstLastPara="1" vertOverflow="overflow" horzOverflow="overflow" vert="horz" wrap="square" lIns="45719" tIns="45719" rIns="45719" bIns="45719" numCol="1" spcCol="38100" rtlCol="0" anchor="ctr">
+            <a:spAutoFit/>
+          </a:bodyPr>
+          <a:lstStyle/>
+          <a:p>
+            <a:pPr marL="0" marR="0" indent="0" algn="l" defTabSz="457200" rtl="0" fontAlgn="auto" latinLnBrk="0" hangingPunct="0">
+              <a:lnSpc>
+                <a:spcPct val="100000"/>
+              </a:lnSpc>
+              <a:spcBef>
+                <a:spcPts val="0"/>
+              </a:spcBef>
+              <a:spcAft>
+                <a:spcPts val="0"/>
+              </a:spcAft>
+              <a:buClrTx/>
+              <a:buSzTx/>
+              <a:buFontTx/>
+              <a:buNone/>
+              <a:tabLst/>
+            </a:pPr>
+            <a:endParaRPr kumimoji="0" lang="ru-RU" sz="1800" b="0" i="0" u="none" strike="noStrike" cap="none" spc="0" normalizeH="0" baseline="0">
+              <a:ln>
+                <a:noFill/>
+              </a:ln>
+              <a:solidFill>
+                <a:srgbClr val="000000"/>
+              </a:solidFill>
+              <a:effectLst/>
+              <a:uFillTx/>
+              <a:latin typeface="Arial"/>
+              <a:ea typeface="Arial"/>
+              <a:cs typeface="Arial"/>
+              <a:sym typeface="Arial"/>
             </a:endParaRPr>
           </a:p>
         </p:txBody>
@@ -14002,8 +14657,8 @@
         </p:nvSpPr>
         <p:spPr>
           <a:xfrm>
-            <a:off x="920545" y="2295320"/>
-            <a:ext cx="11112910" cy="2241960"/>
+            <a:off x="953728" y="1604299"/>
+            <a:ext cx="10895372" cy="3892861"/>
           </a:xfrm>
           <a:prstGeom prst="rect">
             <a:avLst/>
@@ -14046,7 +14701,7 @@
               </a:tabLst>
             </a:pPr>
             <a:r>
-              <a:rPr lang="ru-RU" sz="2400" b="1" dirty="0">
+              <a:rPr lang="ru-RU" sz="2800" b="1" dirty="0">
                 <a:solidFill>
                   <a:srgbClr val="0F1115"/>
                 </a:solidFill>
@@ -14057,7 +14712,7 @@
               <a:t>Стандартизация</a:t>
             </a:r>
             <a:r>
-              <a:rPr lang="ru-RU" sz="2400" dirty="0">
+              <a:rPr lang="ru-RU" sz="2800" dirty="0">
                 <a:solidFill>
                   <a:srgbClr val="0F1115"/>
                 </a:solidFill>
@@ -14067,7 +14722,7 @@
               </a:rPr>
               <a:t> — единый язык понятен всем участникам,</a:t>
             </a:r>
-            <a:endParaRPr lang="en-US" sz="2400" dirty="0">
+            <a:endParaRPr lang="en-US" sz="2800" dirty="0">
               <a:effectLst/>
               <a:latin typeface="Times New Roman" panose="02020603050405020304" pitchFamily="18" charset="0"/>
               <a:ea typeface="Times New Roman" panose="02020603050405020304" pitchFamily="18" charset="0"/>
@@ -14086,7 +14741,7 @@
               </a:tabLst>
             </a:pPr>
             <a:r>
-              <a:rPr lang="ru-RU" sz="2400" b="1" dirty="0">
+              <a:rPr lang="ru-RU" sz="2800" b="1" dirty="0">
                 <a:solidFill>
                   <a:srgbClr val="0F1115"/>
                 </a:solidFill>
@@ -14097,7 +14752,7 @@
               <a:t>Интуитивность</a:t>
             </a:r>
             <a:r>
-              <a:rPr lang="ru-RU" sz="2400" dirty="0">
+              <a:rPr lang="ru-RU" sz="2800" dirty="0">
                 <a:solidFill>
                   <a:srgbClr val="0F1115"/>
                 </a:solidFill>
@@ -14107,7 +14762,7 @@
               </a:rPr>
               <a:t> — даже нетехнические специалисты могут читать диаграммы,</a:t>
             </a:r>
-            <a:endParaRPr lang="en-US" sz="2400" dirty="0">
+            <a:endParaRPr lang="en-US" sz="2800" dirty="0">
               <a:effectLst/>
               <a:latin typeface="Times New Roman" panose="02020603050405020304" pitchFamily="18" charset="0"/>
               <a:ea typeface="Times New Roman" panose="02020603050405020304" pitchFamily="18" charset="0"/>
@@ -14126,7 +14781,7 @@
               </a:tabLst>
             </a:pPr>
             <a:r>
-              <a:rPr lang="ru-RU" sz="2400" b="1" dirty="0" err="1">
+              <a:rPr lang="ru-RU" sz="2800" b="1" dirty="0" err="1">
                 <a:solidFill>
                   <a:srgbClr val="0F1115"/>
                 </a:solidFill>
@@ -14137,7 +14792,7 @@
               <a:t>Межфункциональное</a:t>
             </a:r>
             <a:r>
-              <a:rPr lang="ru-RU" sz="2400" b="1" dirty="0">
+              <a:rPr lang="ru-RU" sz="2800" b="1" dirty="0">
                 <a:solidFill>
                   <a:srgbClr val="0F1115"/>
                 </a:solidFill>
@@ -14148,7 +14803,7 @@
               <a:t> взаимодействие</a:t>
             </a:r>
             <a:r>
-              <a:rPr lang="ru-RU" sz="2400" dirty="0">
+              <a:rPr lang="ru-RU" sz="2800" dirty="0">
                 <a:solidFill>
                   <a:srgbClr val="0F1115"/>
                 </a:solidFill>
@@ -14158,7 +14813,7 @@
               </a:rPr>
               <a:t> — объединяет бизнес и IT,</a:t>
             </a:r>
-            <a:endParaRPr lang="en-US" sz="2400" dirty="0">
+            <a:endParaRPr lang="en-US" sz="2800" dirty="0">
               <a:effectLst/>
               <a:latin typeface="Times New Roman" panose="02020603050405020304" pitchFamily="18" charset="0"/>
               <a:ea typeface="Times New Roman" panose="02020603050405020304" pitchFamily="18" charset="0"/>
@@ -14177,7 +14832,7 @@
               </a:tabLst>
             </a:pPr>
             <a:r>
-              <a:rPr lang="ru-RU" sz="2400" b="1" dirty="0">
+              <a:rPr lang="ru-RU" sz="2800" b="1" dirty="0">
                 <a:solidFill>
                   <a:srgbClr val="0F1115"/>
                 </a:solidFill>
@@ -14188,7 +14843,7 @@
               <a:t>Масштабируемость</a:t>
             </a:r>
             <a:r>
-              <a:rPr lang="ru-RU" sz="2400" dirty="0">
+              <a:rPr lang="ru-RU" sz="2800" dirty="0">
                 <a:solidFill>
                   <a:srgbClr val="0F1115"/>
                 </a:solidFill>
@@ -14198,7 +14853,7 @@
               </a:rPr>
               <a:t> — подходит для простых и сверхсложных процессов.</a:t>
             </a:r>
-            <a:endParaRPr lang="en-US" sz="2400" dirty="0">
+            <a:endParaRPr lang="en-US" sz="2800" dirty="0">
               <a:effectLst/>
               <a:latin typeface="Times New Roman" panose="02020603050405020304" pitchFamily="18" charset="0"/>
               <a:ea typeface="Times New Roman" panose="02020603050405020304" pitchFamily="18" charset="0"/>
@@ -14394,6 +15049,88 @@
               <a:effectLst/>
               <a:uFillTx/>
               <a:latin typeface="+mn-lt"/>
+              <a:ea typeface="Arial"/>
+              <a:cs typeface="Arial"/>
+              <a:sym typeface="Arial"/>
+            </a:endParaRPr>
+          </a:p>
+        </p:txBody>
+      </p:sp>
+      <p:sp>
+        <p:nvSpPr>
+          <p:cNvPr id="7" name="Прямоугольник 6">
+            <a:extLst>
+              <a:ext uri="{FF2B5EF4-FFF2-40B4-BE49-F238E27FC236}">
+                <a16:creationId xmlns:a16="http://schemas.microsoft.com/office/drawing/2014/main" id="{1AED6FE5-F155-414A-8F8F-09A05D0CC35C}"/>
+              </a:ext>
+            </a:extLst>
+          </p:cNvPr>
+          <p:cNvSpPr/>
+          <p:nvPr/>
+        </p:nvSpPr>
+        <p:spPr>
+          <a:xfrm>
+            <a:off x="1047750" y="6410632"/>
+            <a:ext cx="2743200" cy="285136"/>
+          </a:xfrm>
+          <a:prstGeom prst="rect">
+            <a:avLst/>
+          </a:prstGeom>
+          <a:solidFill>
+            <a:srgbClr val="FFFFFF"/>
+          </a:solidFill>
+          <a:ln w="12700" cap="flat">
+            <a:noFill/>
+            <a:prstDash val="solid"/>
+            <a:miter lim="800000"/>
+          </a:ln>
+          <a:effectLst/>
+          <a:sp3d/>
+        </p:spPr>
+        <p:style>
+          <a:lnRef idx="0">
+            <a:scrgbClr r="0" g="0" b="0"/>
+          </a:lnRef>
+          <a:fillRef idx="0">
+            <a:scrgbClr r="0" g="0" b="0"/>
+          </a:fillRef>
+          <a:effectRef idx="0">
+            <a:scrgbClr r="0" g="0" b="0"/>
+          </a:effectRef>
+          <a:fontRef idx="none"/>
+        </p:style>
+        <p:txBody>
+          <a:bodyPr rot="0" spcFirstLastPara="1" vertOverflow="overflow" horzOverflow="overflow" vert="horz" wrap="square" lIns="45719" tIns="45719" rIns="45719" bIns="45719" numCol="1" spcCol="38100" rtlCol="0" anchor="ctr">
+            <a:spAutoFit/>
+          </a:bodyPr>
+          <a:lstStyle/>
+          <a:p>
+            <a:pPr marL="0" marR="0" indent="0" algn="l" defTabSz="457200" rtl="0" fontAlgn="auto" latinLnBrk="0" hangingPunct="0">
+              <a:lnSpc>
+                <a:spcPct val="100000"/>
+              </a:lnSpc>
+              <a:spcBef>
+                <a:spcPts val="0"/>
+              </a:spcBef>
+              <a:spcAft>
+                <a:spcPts val="0"/>
+              </a:spcAft>
+              <a:buClrTx/>
+              <a:buSzTx/>
+              <a:buFontTx/>
+              <a:buNone/>
+              <a:tabLst/>
+            </a:pPr>
+            <a:endParaRPr kumimoji="0" lang="ru-RU" sz="1800" b="0" i="0" u="none" strike="noStrike" cap="none" spc="0" normalizeH="0" baseline="0">
+              <a:ln>
+                <a:noFill/>
+              </a:ln>
+              <a:solidFill>
+                <a:srgbClr val="000000"/>
+              </a:solidFill>
+              <a:effectLst/>
+              <a:uFillTx/>
+              <a:latin typeface="Arial"/>
               <a:ea typeface="Arial"/>
               <a:cs typeface="Arial"/>
               <a:sym typeface="Arial"/>
@@ -16747,6 +17484,88 @@
           </a:p>
         </p:txBody>
       </p:sp>
+      <p:sp>
+        <p:nvSpPr>
+          <p:cNvPr id="7" name="Прямоугольник 6">
+            <a:extLst>
+              <a:ext uri="{FF2B5EF4-FFF2-40B4-BE49-F238E27FC236}">
+                <a16:creationId xmlns:a16="http://schemas.microsoft.com/office/drawing/2014/main" id="{A97B7558-2F56-4700-B4DE-FE0A976464E7}"/>
+              </a:ext>
+            </a:extLst>
+          </p:cNvPr>
+          <p:cNvSpPr/>
+          <p:nvPr/>
+        </p:nvSpPr>
+        <p:spPr>
+          <a:xfrm>
+            <a:off x="1047750" y="6410632"/>
+            <a:ext cx="2743200" cy="285136"/>
+          </a:xfrm>
+          <a:prstGeom prst="rect">
+            <a:avLst/>
+          </a:prstGeom>
+          <a:solidFill>
+            <a:srgbClr val="FFFFFF"/>
+          </a:solidFill>
+          <a:ln w="12700" cap="flat">
+            <a:noFill/>
+            <a:prstDash val="solid"/>
+            <a:miter lim="800000"/>
+          </a:ln>
+          <a:effectLst/>
+          <a:sp3d/>
+        </p:spPr>
+        <p:style>
+          <a:lnRef idx="0">
+            <a:scrgbClr r="0" g="0" b="0"/>
+          </a:lnRef>
+          <a:fillRef idx="0">
+            <a:scrgbClr r="0" g="0" b="0"/>
+          </a:fillRef>
+          <a:effectRef idx="0">
+            <a:scrgbClr r="0" g="0" b="0"/>
+          </a:effectRef>
+          <a:fontRef idx="none"/>
+        </p:style>
+        <p:txBody>
+          <a:bodyPr rot="0" spcFirstLastPara="1" vertOverflow="overflow" horzOverflow="overflow" vert="horz" wrap="square" lIns="45719" tIns="45719" rIns="45719" bIns="45719" numCol="1" spcCol="38100" rtlCol="0" anchor="ctr">
+            <a:spAutoFit/>
+          </a:bodyPr>
+          <a:lstStyle/>
+          <a:p>
+            <a:pPr marL="0" marR="0" indent="0" algn="l" defTabSz="457200" rtl="0" fontAlgn="auto" latinLnBrk="0" hangingPunct="0">
+              <a:lnSpc>
+                <a:spcPct val="100000"/>
+              </a:lnSpc>
+              <a:spcBef>
+                <a:spcPts val="0"/>
+              </a:spcBef>
+              <a:spcAft>
+                <a:spcPts val="0"/>
+              </a:spcAft>
+              <a:buClrTx/>
+              <a:buSzTx/>
+              <a:buFontTx/>
+              <a:buNone/>
+              <a:tabLst/>
+            </a:pPr>
+            <a:endParaRPr kumimoji="0" lang="ru-RU" sz="1800" b="0" i="0" u="none" strike="noStrike" cap="none" spc="0" normalizeH="0" baseline="0">
+              <a:ln>
+                <a:noFill/>
+              </a:ln>
+              <a:solidFill>
+                <a:srgbClr val="000000"/>
+              </a:solidFill>
+              <a:effectLst/>
+              <a:uFillTx/>
+              <a:latin typeface="Arial"/>
+              <a:ea typeface="Arial"/>
+              <a:cs typeface="Arial"/>
+              <a:sym typeface="Arial"/>
+            </a:endParaRPr>
+          </a:p>
+        </p:txBody>
+      </p:sp>
     </p:spTree>
     <p:extLst>
       <p:ext uri="{BB962C8B-B14F-4D97-AF65-F5344CB8AC3E}">
@@ -17077,7 +17896,7 @@
         </p:nvSpPr>
         <p:spPr>
           <a:xfrm>
-            <a:off x="0" y="574733"/>
+            <a:off x="161925" y="870008"/>
             <a:ext cx="3677265" cy="461665"/>
           </a:xfrm>
           <a:prstGeom prst="rect">
@@ -17142,7 +17961,7 @@
         </p:nvSpPr>
         <p:spPr>
           <a:xfrm>
-            <a:off x="290051" y="1008326"/>
+            <a:off x="404351" y="1332176"/>
             <a:ext cx="3913239" cy="2862322"/>
           </a:xfrm>
           <a:prstGeom prst="rect">
@@ -17396,7 +18215,7 @@
         </p:nvSpPr>
         <p:spPr>
           <a:xfrm>
-            <a:off x="290051" y="4277774"/>
+            <a:off x="404351" y="4601624"/>
             <a:ext cx="3795252" cy="1289071"/>
           </a:xfrm>
           <a:prstGeom prst="rect">
@@ -17549,7 +18368,7 @@
         </p:nvSpPr>
         <p:spPr>
           <a:xfrm>
-            <a:off x="4537588" y="958254"/>
+            <a:off x="4651888" y="1282104"/>
             <a:ext cx="4621161" cy="4197559"/>
           </a:xfrm>
           <a:prstGeom prst="rect">
@@ -17898,7 +18717,7 @@
         </p:nvSpPr>
         <p:spPr>
           <a:xfrm>
-            <a:off x="8298426" y="958254"/>
+            <a:off x="8412726" y="1282104"/>
             <a:ext cx="4424516" cy="2535566"/>
           </a:xfrm>
           <a:prstGeom prst="rect">
@@ -18406,6 +19225,88 @@
               <a:tabLst/>
             </a:pPr>
             <a:endParaRPr kumimoji="0" lang="en-US" sz="1800" b="0" i="0" u="none" strike="noStrike" cap="none" spc="0" normalizeH="0" baseline="0">
+              <a:ln>
+                <a:noFill/>
+              </a:ln>
+              <a:solidFill>
+                <a:srgbClr val="000000"/>
+              </a:solidFill>
+              <a:effectLst/>
+              <a:uFillTx/>
+              <a:latin typeface="Arial"/>
+              <a:ea typeface="Arial"/>
+              <a:cs typeface="Arial"/>
+              <a:sym typeface="Arial"/>
+            </a:endParaRPr>
+          </a:p>
+        </p:txBody>
+      </p:sp>
+      <p:sp>
+        <p:nvSpPr>
+          <p:cNvPr id="13" name="Прямоугольник 12">
+            <a:extLst>
+              <a:ext uri="{FF2B5EF4-FFF2-40B4-BE49-F238E27FC236}">
+                <a16:creationId xmlns:a16="http://schemas.microsoft.com/office/drawing/2014/main" id="{F073D41C-7FF3-4D55-9C75-E0C96D32CC63}"/>
+              </a:ext>
+            </a:extLst>
+          </p:cNvPr>
+          <p:cNvSpPr/>
+          <p:nvPr/>
+        </p:nvSpPr>
+        <p:spPr>
+          <a:xfrm>
+            <a:off x="1047750" y="6410632"/>
+            <a:ext cx="2743200" cy="285136"/>
+          </a:xfrm>
+          <a:prstGeom prst="rect">
+            <a:avLst/>
+          </a:prstGeom>
+          <a:solidFill>
+            <a:srgbClr val="FFFFFF"/>
+          </a:solidFill>
+          <a:ln w="12700" cap="flat">
+            <a:noFill/>
+            <a:prstDash val="solid"/>
+            <a:miter lim="800000"/>
+          </a:ln>
+          <a:effectLst/>
+          <a:sp3d/>
+        </p:spPr>
+        <p:style>
+          <a:lnRef idx="0">
+            <a:scrgbClr r="0" g="0" b="0"/>
+          </a:lnRef>
+          <a:fillRef idx="0">
+            <a:scrgbClr r="0" g="0" b="0"/>
+          </a:fillRef>
+          <a:effectRef idx="0">
+            <a:scrgbClr r="0" g="0" b="0"/>
+          </a:effectRef>
+          <a:fontRef idx="none"/>
+        </p:style>
+        <p:txBody>
+          <a:bodyPr rot="0" spcFirstLastPara="1" vertOverflow="overflow" horzOverflow="overflow" vert="horz" wrap="square" lIns="45719" tIns="45719" rIns="45719" bIns="45719" numCol="1" spcCol="38100" rtlCol="0" anchor="ctr">
+            <a:spAutoFit/>
+          </a:bodyPr>
+          <a:lstStyle/>
+          <a:p>
+            <a:pPr marL="0" marR="0" indent="0" algn="l" defTabSz="457200" rtl="0" fontAlgn="auto" latinLnBrk="0" hangingPunct="0">
+              <a:lnSpc>
+                <a:spcPct val="100000"/>
+              </a:lnSpc>
+              <a:spcBef>
+                <a:spcPts val="0"/>
+              </a:spcBef>
+              <a:spcAft>
+                <a:spcPts val="0"/>
+              </a:spcAft>
+              <a:buClrTx/>
+              <a:buSzTx/>
+              <a:buFontTx/>
+              <a:buNone/>
+              <a:tabLst/>
+            </a:pPr>
+            <a:endParaRPr kumimoji="0" lang="ru-RU" sz="1800" b="0" i="0" u="none" strike="noStrike" cap="none" spc="0" normalizeH="0" baseline="0">
               <a:ln>
                 <a:noFill/>
               </a:ln>
@@ -18752,8 +19653,8 @@
         </p:nvSpPr>
         <p:spPr>
           <a:xfrm>
-            <a:off x="1049593" y="1043086"/>
-            <a:ext cx="10854813" cy="4746428"/>
+            <a:off x="1049593" y="1310435"/>
+            <a:ext cx="10854813" cy="4211730"/>
           </a:xfrm>
           <a:prstGeom prst="rect">
             <a:avLst/>
@@ -19048,27 +19949,86 @@
               <a:cs typeface="Times New Roman" panose="02020603050405020304" pitchFamily="18" charset="0"/>
             </a:endParaRPr>
           </a:p>
-          <a:p>
-            <a:pPr indent="449580" algn="just">
+        </p:txBody>
+      </p:sp>
+      <p:sp>
+        <p:nvSpPr>
+          <p:cNvPr id="7" name="Прямоугольник 6">
+            <a:extLst>
+              <a:ext uri="{FF2B5EF4-FFF2-40B4-BE49-F238E27FC236}">
+                <a16:creationId xmlns:a16="http://schemas.microsoft.com/office/drawing/2014/main" id="{AB24F1FC-7302-442E-B6B3-62FD76E6502D}"/>
+              </a:ext>
+            </a:extLst>
+          </p:cNvPr>
+          <p:cNvSpPr/>
+          <p:nvPr/>
+        </p:nvSpPr>
+        <p:spPr>
+          <a:xfrm>
+            <a:off x="1047750" y="6410632"/>
+            <a:ext cx="2743200" cy="285136"/>
+          </a:xfrm>
+          <a:prstGeom prst="rect">
+            <a:avLst/>
+          </a:prstGeom>
+          <a:solidFill>
+            <a:srgbClr val="FFFFFF"/>
+          </a:solidFill>
+          <a:ln w="12700" cap="flat">
+            <a:noFill/>
+            <a:prstDash val="solid"/>
+            <a:miter lim="800000"/>
+          </a:ln>
+          <a:effectLst/>
+          <a:sp3d/>
+        </p:spPr>
+        <p:style>
+          <a:lnRef idx="0">
+            <a:scrgbClr r="0" g="0" b="0"/>
+          </a:lnRef>
+          <a:fillRef idx="0">
+            <a:scrgbClr r="0" g="0" b="0"/>
+          </a:fillRef>
+          <a:effectRef idx="0">
+            <a:scrgbClr r="0" g="0" b="0"/>
+          </a:effectRef>
+          <a:fontRef idx="none"/>
+        </p:style>
+        <p:txBody>
+          <a:bodyPr rot="0" spcFirstLastPara="1" vertOverflow="overflow" horzOverflow="overflow" vert="horz" wrap="square" lIns="45719" tIns="45719" rIns="45719" bIns="45719" numCol="1" spcCol="38100" rtlCol="0" anchor="ctr">
+            <a:spAutoFit/>
+          </a:bodyPr>
+          <a:lstStyle/>
+          <a:p>
+            <a:pPr marL="0" marR="0" indent="0" algn="l" defTabSz="457200" rtl="0" fontAlgn="auto" latinLnBrk="0" hangingPunct="0">
               <a:lnSpc>
-                <a:spcPct val="150000"/>
+                <a:spcPct val="100000"/>
               </a:lnSpc>
+              <a:spcBef>
+                <a:spcPts val="0"/>
+              </a:spcBef>
+              <a:spcAft>
+                <a:spcPts val="0"/>
+              </a:spcAft>
+              <a:buClrTx/>
+              <a:buSzTx/>
+              <a:buFontTx/>
+              <a:buNone/>
+              <a:tabLst/>
             </a:pPr>
-            <a:r>
-              <a:rPr lang="ru-RU" sz="1800" dirty="0">
-                <a:solidFill>
-                  <a:srgbClr val="0F1115"/>
-                </a:solidFill>
-                <a:effectLst/>
-                <a:latin typeface="Times New Roman" panose="02020603050405020304" pitchFamily="18" charset="0"/>
-                <a:ea typeface="Times New Roman" panose="02020603050405020304" pitchFamily="18" charset="0"/>
-              </a:rPr>
-              <a:t> </a:t>
-            </a:r>
-            <a:endParaRPr lang="en-US" sz="1600" dirty="0">
+            <a:endParaRPr kumimoji="0" lang="ru-RU" sz="1800" b="0" i="0" u="none" strike="noStrike" cap="none" spc="0" normalizeH="0" baseline="0">
+              <a:ln>
+                <a:noFill/>
+              </a:ln>
+              <a:solidFill>
+                <a:srgbClr val="000000"/>
+              </a:solidFill>
               <a:effectLst/>
-              <a:latin typeface="Times New Roman" panose="02020603050405020304" pitchFamily="18" charset="0"/>
-              <a:ea typeface="Times New Roman" panose="02020603050405020304" pitchFamily="18" charset="0"/>
+              <a:uFillTx/>
+              <a:latin typeface="Arial"/>
+              <a:ea typeface="Arial"/>
+              <a:cs typeface="Arial"/>
+              <a:sym typeface="Arial"/>
             </a:endParaRPr>
           </a:p>
         </p:txBody>
@@ -19404,7 +20364,7 @@
           <p:nvPr>
             <p:extLst>
               <p:ext uri="{D42A27DB-BD31-4B8C-83A1-F6EECF244321}">
-                <p14:modId xmlns:p14="http://schemas.microsoft.com/office/powerpoint/2010/main" val="503699564"/>
+                <p14:modId xmlns:p14="http://schemas.microsoft.com/office/powerpoint/2010/main" val="3996276703"/>
               </p:ext>
             </p:extLst>
           </p:nvPr>
@@ -19470,7 +20430,7 @@
                         </a:rPr>
                         <a:t>Поле</a:t>
                       </a:r>
-                      <a:endParaRPr lang="en-US" sz="1400" b="1" dirty="0">
+                      <a:endParaRPr lang="en-US" sz="1800" b="1" dirty="0">
                         <a:effectLst/>
                         <a:latin typeface="+mn-lt"/>
                         <a:ea typeface="Calibri" panose="020F0502020204030204" pitchFamily="34" charset="0"/>
@@ -19507,7 +20467,7 @@
                         </a:rPr>
                         <a:t>Тип данных</a:t>
                       </a:r>
-                      <a:endParaRPr lang="en-US" sz="1400" b="1" dirty="0">
+                      <a:endParaRPr lang="en-US" sz="1800" b="1" dirty="0">
                         <a:effectLst/>
                         <a:latin typeface="+mn-lt"/>
                         <a:ea typeface="Calibri" panose="020F0502020204030204" pitchFamily="34" charset="0"/>
@@ -19544,7 +20504,7 @@
                         </a:rPr>
                         <a:t>Описание</a:t>
                       </a:r>
-                      <a:endParaRPr lang="en-US" sz="1400" b="1" dirty="0">
+                      <a:endParaRPr lang="en-US" sz="1800" b="1" dirty="0">
                         <a:effectLst/>
                         <a:latin typeface="+mn-lt"/>
                         <a:ea typeface="Calibri" panose="020F0502020204030204" pitchFamily="34" charset="0"/>
@@ -19581,7 +20541,7 @@
                         </a:rPr>
                         <a:t>Ограничения</a:t>
                       </a:r>
-                      <a:endParaRPr lang="en-US" sz="1400" b="1" dirty="0">
+                      <a:endParaRPr lang="en-US" sz="1800" b="1" dirty="0">
                         <a:effectLst/>
                         <a:latin typeface="+mn-lt"/>
                         <a:ea typeface="Calibri" panose="020F0502020204030204" pitchFamily="34" charset="0"/>
@@ -19625,7 +20585,7 @@
                         </a:rPr>
                         <a:t>seller_id</a:t>
                       </a:r>
-                      <a:endParaRPr lang="en-US" sz="1400" dirty="0">
+                      <a:endParaRPr lang="en-US" sz="1800" dirty="0">
                         <a:effectLst/>
                         <a:latin typeface="+mn-lt"/>
                         <a:ea typeface="Calibri" panose="020F0502020204030204" pitchFamily="34" charset="0"/>
@@ -19655,7 +20615,7 @@
                         </a:rPr>
                         <a:t>INT</a:t>
                       </a:r>
-                      <a:endParaRPr lang="en-US" sz="1400" dirty="0">
+                      <a:endParaRPr lang="en-US" sz="1800" dirty="0">
                         <a:effectLst/>
                         <a:latin typeface="+mn-lt"/>
                         <a:ea typeface="Calibri" panose="020F0502020204030204" pitchFamily="34" charset="0"/>
@@ -19685,7 +20645,7 @@
                         </a:rPr>
                         <a:t>Идентификатор продавца</a:t>
                       </a:r>
-                      <a:endParaRPr lang="en-US" sz="1400">
+                      <a:endParaRPr lang="en-US" sz="1800">
                         <a:effectLst/>
                         <a:latin typeface="+mn-lt"/>
                         <a:ea typeface="Calibri" panose="020F0502020204030204" pitchFamily="34" charset="0"/>
@@ -19715,7 +20675,7 @@
                         </a:rPr>
                         <a:t>PRIMARY KEY, AUTO_INCREMENT</a:t>
                       </a:r>
-                      <a:endParaRPr lang="en-US" sz="1400">
+                      <a:endParaRPr lang="en-US" sz="1800">
                         <a:effectLst/>
                         <a:latin typeface="+mn-lt"/>
                         <a:ea typeface="Calibri" panose="020F0502020204030204" pitchFamily="34" charset="0"/>
@@ -19752,7 +20712,7 @@
                         </a:rPr>
                         <a:t>name</a:t>
                       </a:r>
-                      <a:endParaRPr lang="en-US" sz="1400">
+                      <a:endParaRPr lang="en-US" sz="1800">
                         <a:effectLst/>
                         <a:latin typeface="+mn-lt"/>
                         <a:ea typeface="Calibri" panose="020F0502020204030204" pitchFamily="34" charset="0"/>
@@ -19782,7 +20742,7 @@
                         </a:rPr>
                         <a:t>VARCHAR(255)</a:t>
                       </a:r>
-                      <a:endParaRPr lang="en-US" sz="1400">
+                      <a:endParaRPr lang="en-US" sz="1800">
                         <a:effectLst/>
                         <a:latin typeface="+mn-lt"/>
                         <a:ea typeface="Calibri" panose="020F0502020204030204" pitchFamily="34" charset="0"/>
@@ -19812,7 +20772,7 @@
                         </a:rPr>
                         <a:t>Наименование организации</a:t>
                       </a:r>
-                      <a:endParaRPr lang="en-US" sz="1400">
+                      <a:endParaRPr lang="en-US" sz="1800">
                         <a:effectLst/>
                         <a:latin typeface="+mn-lt"/>
                         <a:ea typeface="Calibri" panose="020F0502020204030204" pitchFamily="34" charset="0"/>
@@ -19842,7 +20802,7 @@
                         </a:rPr>
                         <a:t>NOT NULL</a:t>
                       </a:r>
-                      <a:endParaRPr lang="en-US" sz="1400">
+                      <a:endParaRPr lang="en-US" sz="1800">
                         <a:effectLst/>
                         <a:latin typeface="+mn-lt"/>
                         <a:ea typeface="Calibri" panose="020F0502020204030204" pitchFamily="34" charset="0"/>
@@ -19879,7 +20839,7 @@
                         </a:rPr>
                         <a:t>inn</a:t>
                       </a:r>
-                      <a:endParaRPr lang="en-US" sz="1400">
+                      <a:endParaRPr lang="en-US" sz="1800">
                         <a:effectLst/>
                         <a:latin typeface="+mn-lt"/>
                         <a:ea typeface="Calibri" panose="020F0502020204030204" pitchFamily="34" charset="0"/>
@@ -19909,7 +20869,7 @@
                         </a:rPr>
                         <a:t>VARCHAR(12)</a:t>
                       </a:r>
-                      <a:endParaRPr lang="en-US" sz="1400" dirty="0">
+                      <a:endParaRPr lang="en-US" sz="1800" dirty="0">
                         <a:effectLst/>
                         <a:latin typeface="+mn-lt"/>
                         <a:ea typeface="Calibri" panose="020F0502020204030204" pitchFamily="34" charset="0"/>
@@ -19933,13 +20893,13 @@
                         </a:spcAft>
                       </a:pPr>
                       <a:r>
-                        <a:rPr lang="ru-RU" sz="1800">
+                        <a:rPr lang="ru-RU" sz="1800" dirty="0">
                           <a:effectLst/>
                           <a:latin typeface="+mn-lt"/>
                         </a:rPr>
                         <a:t>ИНН (12 символов для юрлиц)</a:t>
                       </a:r>
-                      <a:endParaRPr lang="en-US" sz="1400">
+                      <a:endParaRPr lang="en-US" sz="1800" dirty="0">
                         <a:effectLst/>
                         <a:latin typeface="+mn-lt"/>
                         <a:ea typeface="Calibri" panose="020F0502020204030204" pitchFamily="34" charset="0"/>
@@ -19969,7 +20929,7 @@
                         </a:rPr>
                         <a:t>NOT NULL, UNIQUE</a:t>
                       </a:r>
-                      <a:endParaRPr lang="en-US" sz="1400">
+                      <a:endParaRPr lang="en-US" sz="1800">
                         <a:effectLst/>
                         <a:latin typeface="+mn-lt"/>
                         <a:ea typeface="Calibri" panose="020F0502020204030204" pitchFamily="34" charset="0"/>
@@ -20006,7 +20966,7 @@
                         </a:rPr>
                         <a:t>address</a:t>
                       </a:r>
-                      <a:endParaRPr lang="en-US" sz="1400">
+                      <a:endParaRPr lang="en-US" sz="1800">
                         <a:effectLst/>
                         <a:latin typeface="+mn-lt"/>
                         <a:ea typeface="Calibri" panose="020F0502020204030204" pitchFamily="34" charset="0"/>
@@ -20036,7 +20996,7 @@
                         </a:rPr>
                         <a:t>TEXT</a:t>
                       </a:r>
-                      <a:endParaRPr lang="en-US" sz="1400" dirty="0">
+                      <a:endParaRPr lang="en-US" sz="1800" dirty="0">
                         <a:effectLst/>
                         <a:latin typeface="+mn-lt"/>
                         <a:ea typeface="Calibri" panose="020F0502020204030204" pitchFamily="34" charset="0"/>
@@ -20060,13 +21020,13 @@
                         </a:spcAft>
                       </a:pPr>
                       <a:r>
-                        <a:rPr lang="ru-RU" sz="1800">
+                        <a:rPr lang="ru-RU" sz="1800" dirty="0">
                           <a:effectLst/>
                           <a:latin typeface="+mn-lt"/>
                         </a:rPr>
                         <a:t>Юридический адрес</a:t>
                       </a:r>
-                      <a:endParaRPr lang="en-US" sz="1400">
+                      <a:endParaRPr lang="en-US" sz="1800" dirty="0">
                         <a:effectLst/>
                         <a:latin typeface="+mn-lt"/>
                         <a:ea typeface="Calibri" panose="020F0502020204030204" pitchFamily="34" charset="0"/>
@@ -20081,7 +21041,7 @@
                     <a:bodyPr/>
                     <a:lstStyle/>
                     <a:p>
-                      <a:endParaRPr lang="en-US" sz="1400">
+                      <a:endParaRPr lang="en-US" sz="1800">
                         <a:effectLst/>
                         <a:latin typeface="+mn-lt"/>
                         <a:cs typeface="Times New Roman" panose="02020603050405020304" pitchFamily="18" charset="0"/>
@@ -20117,7 +21077,7 @@
                         </a:rPr>
                         <a:t>tax_system</a:t>
                       </a:r>
-                      <a:endParaRPr lang="en-US" sz="1400">
+                      <a:endParaRPr lang="en-US" sz="1800">
                         <a:effectLst/>
                         <a:latin typeface="+mn-lt"/>
                         <a:ea typeface="Calibri" panose="020F0502020204030204" pitchFamily="34" charset="0"/>
@@ -20147,7 +21107,7 @@
                         </a:rPr>
                         <a:t>VARCHAR(50)</a:t>
                       </a:r>
-                      <a:endParaRPr lang="en-US" sz="1400" dirty="0">
+                      <a:endParaRPr lang="en-US" sz="1800" dirty="0">
                         <a:effectLst/>
                         <a:latin typeface="+mn-lt"/>
                         <a:ea typeface="Calibri" panose="020F0502020204030204" pitchFamily="34" charset="0"/>
@@ -20171,13 +21131,13 @@
                         </a:spcAft>
                       </a:pPr>
                       <a:r>
-                        <a:rPr lang="ru-RU" sz="1800">
+                        <a:rPr lang="ru-RU" sz="1800" dirty="0">
                           <a:effectLst/>
                           <a:latin typeface="+mn-lt"/>
                         </a:rPr>
                         <a:t>Система налогообложения (ОСН, УСН и т.д.)</a:t>
                       </a:r>
-                      <a:endParaRPr lang="en-US" sz="1400">
+                      <a:endParaRPr lang="en-US" sz="1800" dirty="0">
                         <a:effectLst/>
                         <a:latin typeface="+mn-lt"/>
                         <a:ea typeface="Calibri" panose="020F0502020204030204" pitchFamily="34" charset="0"/>
@@ -20192,7 +21152,7 @@
                     <a:bodyPr/>
                     <a:lstStyle/>
                     <a:p>
-                      <a:endParaRPr lang="en-US" sz="1400">
+                      <a:endParaRPr lang="en-US" sz="1800">
                         <a:effectLst/>
                         <a:latin typeface="+mn-lt"/>
                         <a:cs typeface="Times New Roman" panose="02020603050405020304" pitchFamily="18" charset="0"/>
@@ -20228,7 +21188,7 @@
                         </a:rPr>
                         <a:t>kkt_reg_number</a:t>
                       </a:r>
-                      <a:endParaRPr lang="en-US" sz="1400">
+                      <a:endParaRPr lang="en-US" sz="1800">
                         <a:effectLst/>
                         <a:latin typeface="+mn-lt"/>
                         <a:ea typeface="Calibri" panose="020F0502020204030204" pitchFamily="34" charset="0"/>
@@ -20258,7 +21218,7 @@
                         </a:rPr>
                         <a:t>VARCHAR(20)</a:t>
                       </a:r>
-                      <a:endParaRPr lang="en-US" sz="1400">
+                      <a:endParaRPr lang="en-US" sz="1800">
                         <a:effectLst/>
                         <a:latin typeface="+mn-lt"/>
                         <a:ea typeface="Calibri" panose="020F0502020204030204" pitchFamily="34" charset="0"/>
@@ -20288,7 +21248,7 @@
                         </a:rPr>
                         <a:t>Регистрационный номер ККТ</a:t>
                       </a:r>
-                      <a:endParaRPr lang="en-US" sz="1400" dirty="0">
+                      <a:endParaRPr lang="en-US" sz="1800" dirty="0">
                         <a:effectLst/>
                         <a:latin typeface="+mn-lt"/>
                         <a:ea typeface="Calibri" panose="020F0502020204030204" pitchFamily="34" charset="0"/>
@@ -20303,7 +21263,7 @@
                     <a:bodyPr/>
                     <a:lstStyle/>
                     <a:p>
-                      <a:endParaRPr lang="en-US" sz="1400" dirty="0">
+                      <a:endParaRPr lang="en-US" sz="1800" dirty="0">
                         <a:effectLst/>
                         <a:latin typeface="+mn-lt"/>
                         <a:cs typeface="Times New Roman" panose="02020603050405020304" pitchFamily="18" charset="0"/>
@@ -20457,6 +21417,88 @@
               </a:solidFill>
               <a:effectLst/>
               <a:latin typeface="+mn-lt"/>
+            </a:endParaRPr>
+          </a:p>
+        </p:txBody>
+      </p:sp>
+      <p:sp>
+        <p:nvSpPr>
+          <p:cNvPr id="7" name="Прямоугольник 6">
+            <a:extLst>
+              <a:ext uri="{FF2B5EF4-FFF2-40B4-BE49-F238E27FC236}">
+                <a16:creationId xmlns:a16="http://schemas.microsoft.com/office/drawing/2014/main" id="{BA5433DA-6C03-40F3-9B38-D37566090615}"/>
+              </a:ext>
+            </a:extLst>
+          </p:cNvPr>
+          <p:cNvSpPr/>
+          <p:nvPr/>
+        </p:nvSpPr>
+        <p:spPr>
+          <a:xfrm>
+            <a:off x="1047750" y="6410632"/>
+            <a:ext cx="2743200" cy="285136"/>
+          </a:xfrm>
+          <a:prstGeom prst="rect">
+            <a:avLst/>
+          </a:prstGeom>
+          <a:solidFill>
+            <a:srgbClr val="FFFFFF"/>
+          </a:solidFill>
+          <a:ln w="12700" cap="flat">
+            <a:noFill/>
+            <a:prstDash val="solid"/>
+            <a:miter lim="800000"/>
+          </a:ln>
+          <a:effectLst/>
+          <a:sp3d/>
+        </p:spPr>
+        <p:style>
+          <a:lnRef idx="0">
+            <a:scrgbClr r="0" g="0" b="0"/>
+          </a:lnRef>
+          <a:fillRef idx="0">
+            <a:scrgbClr r="0" g="0" b="0"/>
+          </a:fillRef>
+          <a:effectRef idx="0">
+            <a:scrgbClr r="0" g="0" b="0"/>
+          </a:effectRef>
+          <a:fontRef idx="none"/>
+        </p:style>
+        <p:txBody>
+          <a:bodyPr rot="0" spcFirstLastPara="1" vertOverflow="overflow" horzOverflow="overflow" vert="horz" wrap="square" lIns="45719" tIns="45719" rIns="45719" bIns="45719" numCol="1" spcCol="38100" rtlCol="0" anchor="ctr">
+            <a:spAutoFit/>
+          </a:bodyPr>
+          <a:lstStyle/>
+          <a:p>
+            <a:pPr marL="0" marR="0" indent="0" algn="l" defTabSz="457200" rtl="0" fontAlgn="auto" latinLnBrk="0" hangingPunct="0">
+              <a:lnSpc>
+                <a:spcPct val="100000"/>
+              </a:lnSpc>
+              <a:spcBef>
+                <a:spcPts val="0"/>
+              </a:spcBef>
+              <a:spcAft>
+                <a:spcPts val="0"/>
+              </a:spcAft>
+              <a:buClrTx/>
+              <a:buSzTx/>
+              <a:buFontTx/>
+              <a:buNone/>
+              <a:tabLst/>
+            </a:pPr>
+            <a:endParaRPr kumimoji="0" lang="ru-RU" sz="1800" b="0" i="0" u="none" strike="noStrike" cap="none" spc="0" normalizeH="0" baseline="0">
+              <a:ln>
+                <a:noFill/>
+              </a:ln>
+              <a:solidFill>
+                <a:srgbClr val="000000"/>
+              </a:solidFill>
+              <a:effectLst/>
+              <a:uFillTx/>
+              <a:latin typeface="Arial"/>
+              <a:ea typeface="Arial"/>
+              <a:cs typeface="Arial"/>
+              <a:sym typeface="Arial"/>
             </a:endParaRPr>
           </a:p>
         </p:txBody>
@@ -21259,6 +22301,88 @@
           </a:p>
         </p:txBody>
       </p:sp>
+      <p:sp>
+        <p:nvSpPr>
+          <p:cNvPr id="7" name="Прямоугольник 6">
+            <a:extLst>
+              <a:ext uri="{FF2B5EF4-FFF2-40B4-BE49-F238E27FC236}">
+                <a16:creationId xmlns:a16="http://schemas.microsoft.com/office/drawing/2014/main" id="{07F53600-356B-43F7-ADE9-B7F0E5FE25EB}"/>
+              </a:ext>
+            </a:extLst>
+          </p:cNvPr>
+          <p:cNvSpPr/>
+          <p:nvPr/>
+        </p:nvSpPr>
+        <p:spPr>
+          <a:xfrm>
+            <a:off x="1047750" y="6410632"/>
+            <a:ext cx="2743200" cy="285136"/>
+          </a:xfrm>
+          <a:prstGeom prst="rect">
+            <a:avLst/>
+          </a:prstGeom>
+          <a:solidFill>
+            <a:srgbClr val="FFFFFF"/>
+          </a:solidFill>
+          <a:ln w="12700" cap="flat">
+            <a:noFill/>
+            <a:prstDash val="solid"/>
+            <a:miter lim="800000"/>
+          </a:ln>
+          <a:effectLst/>
+          <a:sp3d/>
+        </p:spPr>
+        <p:style>
+          <a:lnRef idx="0">
+            <a:scrgbClr r="0" g="0" b="0"/>
+          </a:lnRef>
+          <a:fillRef idx="0">
+            <a:scrgbClr r="0" g="0" b="0"/>
+          </a:fillRef>
+          <a:effectRef idx="0">
+            <a:scrgbClr r="0" g="0" b="0"/>
+          </a:effectRef>
+          <a:fontRef idx="none"/>
+        </p:style>
+        <p:txBody>
+          <a:bodyPr rot="0" spcFirstLastPara="1" vertOverflow="overflow" horzOverflow="overflow" vert="horz" wrap="square" lIns="45719" tIns="45719" rIns="45719" bIns="45719" numCol="1" spcCol="38100" rtlCol="0" anchor="ctr">
+            <a:spAutoFit/>
+          </a:bodyPr>
+          <a:lstStyle/>
+          <a:p>
+            <a:pPr marL="0" marR="0" indent="0" algn="l" defTabSz="457200" rtl="0" fontAlgn="auto" latinLnBrk="0" hangingPunct="0">
+              <a:lnSpc>
+                <a:spcPct val="100000"/>
+              </a:lnSpc>
+              <a:spcBef>
+                <a:spcPts val="0"/>
+              </a:spcBef>
+              <a:spcAft>
+                <a:spcPts val="0"/>
+              </a:spcAft>
+              <a:buClrTx/>
+              <a:buSzTx/>
+              <a:buFontTx/>
+              <a:buNone/>
+              <a:tabLst/>
+            </a:pPr>
+            <a:endParaRPr kumimoji="0" lang="ru-RU" sz="1800" b="0" i="0" u="none" strike="noStrike" cap="none" spc="0" normalizeH="0" baseline="0">
+              <a:ln>
+                <a:noFill/>
+              </a:ln>
+              <a:solidFill>
+                <a:srgbClr val="000000"/>
+              </a:solidFill>
+              <a:effectLst/>
+              <a:uFillTx/>
+              <a:latin typeface="Arial"/>
+              <a:ea typeface="Arial"/>
+              <a:cs typeface="Arial"/>
+              <a:sym typeface="Arial"/>
+            </a:endParaRPr>
+          </a:p>
+        </p:txBody>
+      </p:sp>
     </p:spTree>
     <p:extLst>
       <p:ext uri="{BB962C8B-B14F-4D97-AF65-F5344CB8AC3E}">
@@ -21590,7 +22714,7 @@
           <p:nvPr>
             <p:extLst>
               <p:ext uri="{D42A27DB-BD31-4B8C-83A1-F6EECF244321}">
-                <p14:modId xmlns:p14="http://schemas.microsoft.com/office/powerpoint/2010/main" val="345238066"/>
+                <p14:modId xmlns:p14="http://schemas.microsoft.com/office/powerpoint/2010/main" val="333533865"/>
               </p:ext>
             </p:extLst>
           </p:nvPr>
@@ -21770,12 +22894,12 @@
                     <a:p>
                       <a:pPr algn="ctr" fontAlgn="ctr"/>
                       <a:r>
-                        <a:rPr lang="ru-RU" sz="1600" u="none" strike="noStrike">
+                        <a:rPr lang="ru-RU" sz="1600" u="none" strike="noStrike" dirty="0" err="1">
                           <a:effectLst/>
                         </a:rPr>
                         <a:t>receipt_id</a:t>
                       </a:r>
-                      <a:endParaRPr lang="en-US" sz="1600" b="0" i="0" u="none" strike="noStrike">
+                      <a:endParaRPr lang="en-US" sz="1600" b="0" i="0" u="none" strike="noStrike" dirty="0">
                         <a:solidFill>
                           <a:srgbClr val="000000"/>
                         </a:solidFill>
@@ -21892,12 +23016,12 @@
                     <a:p>
                       <a:pPr algn="ctr" fontAlgn="ctr"/>
                       <a:r>
-                        <a:rPr lang="ru-RU" sz="1600" u="none" strike="noStrike">
+                        <a:rPr lang="ru-RU" sz="1600" u="none" strike="noStrike" dirty="0">
                           <a:effectLst/>
                         </a:rPr>
                         <a:t>DATETIME</a:t>
                       </a:r>
-                      <a:endParaRPr lang="en-US" sz="1600" b="0" i="0" u="none" strike="noStrike">
+                      <a:endParaRPr lang="en-US" sz="1600" b="0" i="0" u="none" strike="noStrike" dirty="0">
                         <a:solidFill>
                           <a:srgbClr val="000000"/>
                         </a:solidFill>
@@ -22212,12 +23336,12 @@
                     <a:p>
                       <a:pPr algn="ctr" fontAlgn="ctr"/>
                       <a:r>
-                        <a:rPr lang="ru-RU" sz="1600" u="none" strike="noStrike">
+                        <a:rPr lang="ru-RU" sz="1600" u="none" strike="noStrike" dirty="0">
                           <a:effectLst/>
                         </a:rPr>
                         <a:t>Форма оплаты (НАЛИЧНЫМИ, БЕЗНАЛ и т.д.)</a:t>
                       </a:r>
-                      <a:endParaRPr lang="en-US" sz="1600" b="0" i="0" u="none" strike="noStrike">
+                      <a:endParaRPr lang="en-US" sz="1600" b="0" i="0" u="none" strike="noStrike" dirty="0">
                         <a:solidFill>
                           <a:srgbClr val="000000"/>
                         </a:solidFill>
@@ -22675,6 +23799,88 @@
           </a:p>
         </p:txBody>
       </p:sp>
+      <p:sp>
+        <p:nvSpPr>
+          <p:cNvPr id="8" name="Прямоугольник 7">
+            <a:extLst>
+              <a:ext uri="{FF2B5EF4-FFF2-40B4-BE49-F238E27FC236}">
+                <a16:creationId xmlns:a16="http://schemas.microsoft.com/office/drawing/2014/main" id="{52581573-B5FA-42C2-AF07-2C690490DFEA}"/>
+              </a:ext>
+            </a:extLst>
+          </p:cNvPr>
+          <p:cNvSpPr/>
+          <p:nvPr/>
+        </p:nvSpPr>
+        <p:spPr>
+          <a:xfrm>
+            <a:off x="1047750" y="6448732"/>
+            <a:ext cx="2743200" cy="285136"/>
+          </a:xfrm>
+          <a:prstGeom prst="rect">
+            <a:avLst/>
+          </a:prstGeom>
+          <a:solidFill>
+            <a:srgbClr val="FFFFFF"/>
+          </a:solidFill>
+          <a:ln w="12700" cap="flat">
+            <a:noFill/>
+            <a:prstDash val="solid"/>
+            <a:miter lim="800000"/>
+          </a:ln>
+          <a:effectLst/>
+          <a:sp3d/>
+        </p:spPr>
+        <p:style>
+          <a:lnRef idx="0">
+            <a:scrgbClr r="0" g="0" b="0"/>
+          </a:lnRef>
+          <a:fillRef idx="0">
+            <a:scrgbClr r="0" g="0" b="0"/>
+          </a:fillRef>
+          <a:effectRef idx="0">
+            <a:scrgbClr r="0" g="0" b="0"/>
+          </a:effectRef>
+          <a:fontRef idx="none"/>
+        </p:style>
+        <p:txBody>
+          <a:bodyPr rot="0" spcFirstLastPara="1" vertOverflow="overflow" horzOverflow="overflow" vert="horz" wrap="square" lIns="45719" tIns="45719" rIns="45719" bIns="45719" numCol="1" spcCol="38100" rtlCol="0" anchor="ctr">
+            <a:spAutoFit/>
+          </a:bodyPr>
+          <a:lstStyle/>
+          <a:p>
+            <a:pPr marL="0" marR="0" indent="0" algn="l" defTabSz="457200" rtl="0" fontAlgn="auto" latinLnBrk="0" hangingPunct="0">
+              <a:lnSpc>
+                <a:spcPct val="100000"/>
+              </a:lnSpc>
+              <a:spcBef>
+                <a:spcPts val="0"/>
+              </a:spcBef>
+              <a:spcAft>
+                <a:spcPts val="0"/>
+              </a:spcAft>
+              <a:buClrTx/>
+              <a:buSzTx/>
+              <a:buFontTx/>
+              <a:buNone/>
+              <a:tabLst/>
+            </a:pPr>
+            <a:endParaRPr kumimoji="0" lang="ru-RU" sz="1800" b="0" i="0" u="none" strike="noStrike" cap="none" spc="0" normalizeH="0" baseline="0">
+              <a:ln>
+                <a:noFill/>
+              </a:ln>
+              <a:solidFill>
+                <a:srgbClr val="000000"/>
+              </a:solidFill>
+              <a:effectLst/>
+              <a:uFillTx/>
+              <a:latin typeface="Arial"/>
+              <a:ea typeface="Arial"/>
+              <a:cs typeface="Arial"/>
+              <a:sym typeface="Arial"/>
+            </a:endParaRPr>
+          </a:p>
+        </p:txBody>
+      </p:sp>
     </p:spTree>
     <p:extLst>
       <p:ext uri="{BB962C8B-B14F-4D97-AF65-F5344CB8AC3E}">
@@ -22706,6 +23912,88 @@
           <a:chExt cx="0" cy="0"/>
         </a:xfrm>
       </p:grpSpPr>
+      <p:sp>
+        <p:nvSpPr>
+          <p:cNvPr id="10" name="Прямоугольник 9">
+            <a:extLst>
+              <a:ext uri="{FF2B5EF4-FFF2-40B4-BE49-F238E27FC236}">
+                <a16:creationId xmlns:a16="http://schemas.microsoft.com/office/drawing/2014/main" id="{3CBFB36D-74D2-4A7F-A4C8-CD3CFFB6EAEF}"/>
+              </a:ext>
+            </a:extLst>
+          </p:cNvPr>
+          <p:cNvSpPr/>
+          <p:nvPr/>
+        </p:nvSpPr>
+        <p:spPr>
+          <a:xfrm>
+            <a:off x="1047750" y="6410632"/>
+            <a:ext cx="2743200" cy="285136"/>
+          </a:xfrm>
+          <a:prstGeom prst="rect">
+            <a:avLst/>
+          </a:prstGeom>
+          <a:solidFill>
+            <a:srgbClr val="FFFFFF"/>
+          </a:solidFill>
+          <a:ln w="12700" cap="flat">
+            <a:noFill/>
+            <a:prstDash val="solid"/>
+            <a:miter lim="800000"/>
+          </a:ln>
+          <a:effectLst/>
+          <a:sp3d/>
+        </p:spPr>
+        <p:style>
+          <a:lnRef idx="0">
+            <a:scrgbClr r="0" g="0" b="0"/>
+          </a:lnRef>
+          <a:fillRef idx="0">
+            <a:scrgbClr r="0" g="0" b="0"/>
+          </a:fillRef>
+          <a:effectRef idx="0">
+            <a:scrgbClr r="0" g="0" b="0"/>
+          </a:effectRef>
+          <a:fontRef idx="none"/>
+        </p:style>
+        <p:txBody>
+          <a:bodyPr rot="0" spcFirstLastPara="1" vertOverflow="overflow" horzOverflow="overflow" vert="horz" wrap="square" lIns="45719" tIns="45719" rIns="45719" bIns="45719" numCol="1" spcCol="38100" rtlCol="0" anchor="ctr">
+            <a:spAutoFit/>
+          </a:bodyPr>
+          <a:lstStyle/>
+          <a:p>
+            <a:pPr marL="0" marR="0" indent="0" algn="l" defTabSz="457200" rtl="0" fontAlgn="auto" latinLnBrk="0" hangingPunct="0">
+              <a:lnSpc>
+                <a:spcPct val="100000"/>
+              </a:lnSpc>
+              <a:spcBef>
+                <a:spcPts val="0"/>
+              </a:spcBef>
+              <a:spcAft>
+                <a:spcPts val="0"/>
+              </a:spcAft>
+              <a:buClrTx/>
+              <a:buSzTx/>
+              <a:buFontTx/>
+              <a:buNone/>
+              <a:tabLst/>
+            </a:pPr>
+            <a:endParaRPr kumimoji="0" lang="ru-RU" sz="1800" b="0" i="0" u="none" strike="noStrike" cap="none" spc="0" normalizeH="0" baseline="0">
+              <a:ln>
+                <a:noFill/>
+              </a:ln>
+              <a:solidFill>
+                <a:srgbClr val="000000"/>
+              </a:solidFill>
+              <a:effectLst/>
+              <a:uFillTx/>
+              <a:latin typeface="Arial"/>
+              <a:ea typeface="Arial"/>
+              <a:cs typeface="Arial"/>
+              <a:sym typeface="Arial"/>
+            </a:endParaRPr>
+          </a:p>
+        </p:txBody>
+      </p:sp>
       <p:sp>
         <p:nvSpPr>
           <p:cNvPr id="2" name="Прямоугольник 1">
@@ -23669,14 +24957,14 @@
           <p:nvPr>
             <p:extLst>
               <p:ext uri="{D42A27DB-BD31-4B8C-83A1-F6EECF244321}">
-                <p14:modId xmlns:p14="http://schemas.microsoft.com/office/powerpoint/2010/main" val="2869279846"/>
+                <p14:modId xmlns:p14="http://schemas.microsoft.com/office/powerpoint/2010/main" val="4118208555"/>
               </p:ext>
             </p:extLst>
           </p:nvPr>
         </p:nvGraphicFramePr>
         <p:xfrm>
           <a:off x="309716" y="5146237"/>
-          <a:ext cx="8519652" cy="925894"/>
+          <a:ext cx="8519652" cy="1512951"/>
         </p:xfrm>
         <a:graphic>
           <a:graphicData uri="http://schemas.openxmlformats.org/drawingml/2006/table">
@@ -23729,12 +25017,12 @@
                         </a:spcAft>
                       </a:pPr>
                       <a:r>
-                        <a:rPr lang="ru-RU" sz="1400">
+                        <a:rPr lang="ru-RU" sz="1700" dirty="0" err="1">
                           <a:effectLst/>
                         </a:rPr>
                         <a:t>receipt_id</a:t>
                       </a:r>
-                      <a:endParaRPr lang="en-US" sz="1100">
+                      <a:endParaRPr lang="en-US" sz="1700" dirty="0">
                         <a:effectLst/>
                         <a:latin typeface="Calibri" panose="020F0502020204030204" pitchFamily="34" charset="0"/>
                         <a:ea typeface="Calibri" panose="020F0502020204030204" pitchFamily="34" charset="0"/>
@@ -23758,12 +25046,12 @@
                         </a:spcAft>
                       </a:pPr>
                       <a:r>
-                        <a:rPr lang="ru-RU" sz="1400" dirty="0">
+                        <a:rPr lang="ru-RU" sz="1700" dirty="0">
                           <a:effectLst/>
                         </a:rPr>
                         <a:t>INT</a:t>
                       </a:r>
-                      <a:endParaRPr lang="en-US" sz="1100" dirty="0">
+                      <a:endParaRPr lang="en-US" sz="1700" dirty="0">
                         <a:effectLst/>
                         <a:latin typeface="Calibri" panose="020F0502020204030204" pitchFamily="34" charset="0"/>
                         <a:ea typeface="Calibri" panose="020F0502020204030204" pitchFamily="34" charset="0"/>
@@ -23787,12 +25075,12 @@
                         </a:spcAft>
                       </a:pPr>
                       <a:r>
-                        <a:rPr lang="ru-RU" sz="1400">
+                        <a:rPr lang="ru-RU" sz="1700" dirty="0">
                           <a:effectLst/>
                         </a:rPr>
                         <a:t>ID чека</a:t>
                       </a:r>
-                      <a:endParaRPr lang="en-US" sz="1100">
+                      <a:endParaRPr lang="en-US" sz="1700" dirty="0">
                         <a:effectLst/>
                         <a:latin typeface="Calibri" panose="020F0502020204030204" pitchFamily="34" charset="0"/>
                         <a:ea typeface="Calibri" panose="020F0502020204030204" pitchFamily="34" charset="0"/>
@@ -23816,24 +25104,24 @@
                         </a:spcAft>
                       </a:pPr>
                       <a:r>
-                        <a:rPr lang="en-US" sz="1400" dirty="0">
+                        <a:rPr lang="en-US" sz="1700" dirty="0">
                           <a:effectLst/>
                         </a:rPr>
                         <a:t>FOREIGN KEY REFERENCES Receipts(</a:t>
                       </a:r>
                       <a:r>
-                        <a:rPr lang="en-US" sz="1400" dirty="0" err="1">
+                        <a:rPr lang="en-US" sz="1700" dirty="0" err="1">
                           <a:effectLst/>
                         </a:rPr>
                         <a:t>receipt_id</a:t>
                       </a:r>
                       <a:r>
-                        <a:rPr lang="en-US" sz="1400" dirty="0">
+                        <a:rPr lang="en-US" sz="1700" dirty="0">
                           <a:effectLst/>
                         </a:rPr>
                         <a:t>) ON DELETE CASCADE</a:t>
                       </a:r>
-                      <a:endParaRPr lang="en-US" sz="1100" dirty="0">
+                      <a:endParaRPr lang="en-US" sz="1700" dirty="0">
                         <a:effectLst/>
                         <a:latin typeface="Calibri" panose="020F0502020204030204" pitchFamily="34" charset="0"/>
                         <a:ea typeface="Calibri" panose="020F0502020204030204" pitchFamily="34" charset="0"/>
@@ -24110,8 +25398,8 @@
         </p:nvSpPr>
         <p:spPr>
           <a:xfrm>
-            <a:off x="2030361" y="1503452"/>
-            <a:ext cx="8893277" cy="2803140"/>
+            <a:off x="963561" y="1788867"/>
+            <a:ext cx="10980789" cy="3254865"/>
           </a:xfrm>
           <a:prstGeom prst="rect">
             <a:avLst/>
@@ -24151,7 +25439,7 @@
               </a:spcAft>
             </a:pPr>
             <a:r>
-              <a:rPr lang="ru-RU" sz="2400" dirty="0">
+              <a:rPr lang="ru-RU" sz="2800" dirty="0">
                 <a:solidFill>
                   <a:schemeClr val="tx1"/>
                 </a:solidFill>
@@ -24163,7 +25451,7 @@
               <a:t>Провести реквизитный анализ экономического документа (кассового чека), смоделировать процесс его обработки с использованием нотации BPMN 2.0 и разработать структуру базы данных (концептуальную, логическую, физическую) для хранения его </a:t>
             </a:r>
             <a:r>
-              <a:rPr lang="ru-RU" sz="2400" dirty="0" err="1">
+              <a:rPr lang="ru-RU" sz="2800" dirty="0" err="1">
                 <a:solidFill>
                   <a:schemeClr val="tx1"/>
                 </a:solidFill>
@@ -24175,7 +25463,7 @@
               <a:t>внутримашинного</a:t>
             </a:r>
             <a:r>
-              <a:rPr lang="ru-RU" sz="2400" dirty="0">
+              <a:rPr lang="ru-RU" sz="2800" dirty="0">
                 <a:solidFill>
                   <a:schemeClr val="tx1"/>
                 </a:solidFill>
@@ -24186,7 +25474,7 @@
               </a:rPr>
               <a:t> представления.</a:t>
             </a:r>
-            <a:endParaRPr lang="en-US" dirty="0">
+            <a:endParaRPr lang="en-US" sz="2000" dirty="0">
               <a:solidFill>
                 <a:schemeClr val="tx1"/>
               </a:solidFill>
@@ -24375,6 +25663,88 @@
               <a:effectLst/>
               <a:uFillTx/>
               <a:latin typeface="+mn-lt"/>
+              <a:ea typeface="Arial"/>
+              <a:cs typeface="Arial"/>
+              <a:sym typeface="Arial"/>
+            </a:endParaRPr>
+          </a:p>
+        </p:txBody>
+      </p:sp>
+      <p:sp>
+        <p:nvSpPr>
+          <p:cNvPr id="7" name="Прямоугольник 6">
+            <a:extLst>
+              <a:ext uri="{FF2B5EF4-FFF2-40B4-BE49-F238E27FC236}">
+                <a16:creationId xmlns:a16="http://schemas.microsoft.com/office/drawing/2014/main" id="{2A33A025-EA53-49B8-A528-192EFD0584F8}"/>
+              </a:ext>
+            </a:extLst>
+          </p:cNvPr>
+          <p:cNvSpPr/>
+          <p:nvPr/>
+        </p:nvSpPr>
+        <p:spPr>
+          <a:xfrm>
+            <a:off x="1047750" y="6410632"/>
+            <a:ext cx="2743200" cy="285136"/>
+          </a:xfrm>
+          <a:prstGeom prst="rect">
+            <a:avLst/>
+          </a:prstGeom>
+          <a:solidFill>
+            <a:srgbClr val="FFFFFF"/>
+          </a:solidFill>
+          <a:ln w="12700" cap="flat">
+            <a:noFill/>
+            <a:prstDash val="solid"/>
+            <a:miter lim="800000"/>
+          </a:ln>
+          <a:effectLst/>
+          <a:sp3d/>
+        </p:spPr>
+        <p:style>
+          <a:lnRef idx="0">
+            <a:scrgbClr r="0" g="0" b="0"/>
+          </a:lnRef>
+          <a:fillRef idx="0">
+            <a:scrgbClr r="0" g="0" b="0"/>
+          </a:fillRef>
+          <a:effectRef idx="0">
+            <a:scrgbClr r="0" g="0" b="0"/>
+          </a:effectRef>
+          <a:fontRef idx="none"/>
+        </p:style>
+        <p:txBody>
+          <a:bodyPr rot="0" spcFirstLastPara="1" vertOverflow="overflow" horzOverflow="overflow" vert="horz" wrap="square" lIns="45719" tIns="45719" rIns="45719" bIns="45719" numCol="1" spcCol="38100" rtlCol="0" anchor="ctr">
+            <a:spAutoFit/>
+          </a:bodyPr>
+          <a:lstStyle/>
+          <a:p>
+            <a:pPr marL="0" marR="0" indent="0" algn="l" defTabSz="457200" rtl="0" fontAlgn="auto" latinLnBrk="0" hangingPunct="0">
+              <a:lnSpc>
+                <a:spcPct val="100000"/>
+              </a:lnSpc>
+              <a:spcBef>
+                <a:spcPts val="0"/>
+              </a:spcBef>
+              <a:spcAft>
+                <a:spcPts val="0"/>
+              </a:spcAft>
+              <a:buClrTx/>
+              <a:buSzTx/>
+              <a:buFontTx/>
+              <a:buNone/>
+              <a:tabLst/>
+            </a:pPr>
+            <a:endParaRPr kumimoji="0" lang="ru-RU" sz="1800" b="0" i="0" u="none" strike="noStrike" cap="none" spc="0" normalizeH="0" baseline="0">
+              <a:ln>
+                <a:noFill/>
+              </a:ln>
+              <a:solidFill>
+                <a:srgbClr val="000000"/>
+              </a:solidFill>
+              <a:effectLst/>
+              <a:uFillTx/>
+              <a:latin typeface="Arial"/>
               <a:ea typeface="Arial"/>
               <a:cs typeface="Arial"/>
               <a:sym typeface="Arial"/>
@@ -25673,6 +27043,88 @@
           </a:prstGeom>
         </p:spPr>
       </p:pic>
+      <p:sp>
+        <p:nvSpPr>
+          <p:cNvPr id="8" name="Прямоугольник 7">
+            <a:extLst>
+              <a:ext uri="{FF2B5EF4-FFF2-40B4-BE49-F238E27FC236}">
+                <a16:creationId xmlns:a16="http://schemas.microsoft.com/office/drawing/2014/main" id="{5C0E542D-F9F0-4013-AF5E-A2B3FA0B24C0}"/>
+              </a:ext>
+            </a:extLst>
+          </p:cNvPr>
+          <p:cNvSpPr/>
+          <p:nvPr/>
+        </p:nvSpPr>
+        <p:spPr>
+          <a:xfrm>
+            <a:off x="1047750" y="6410632"/>
+            <a:ext cx="2743200" cy="285136"/>
+          </a:xfrm>
+          <a:prstGeom prst="rect">
+            <a:avLst/>
+          </a:prstGeom>
+          <a:solidFill>
+            <a:srgbClr val="FFFFFF"/>
+          </a:solidFill>
+          <a:ln w="12700" cap="flat">
+            <a:noFill/>
+            <a:prstDash val="solid"/>
+            <a:miter lim="800000"/>
+          </a:ln>
+          <a:effectLst/>
+          <a:sp3d/>
+        </p:spPr>
+        <p:style>
+          <a:lnRef idx="0">
+            <a:scrgbClr r="0" g="0" b="0"/>
+          </a:lnRef>
+          <a:fillRef idx="0">
+            <a:scrgbClr r="0" g="0" b="0"/>
+          </a:fillRef>
+          <a:effectRef idx="0">
+            <a:scrgbClr r="0" g="0" b="0"/>
+          </a:effectRef>
+          <a:fontRef idx="none"/>
+        </p:style>
+        <p:txBody>
+          <a:bodyPr rot="0" spcFirstLastPara="1" vertOverflow="overflow" horzOverflow="overflow" vert="horz" wrap="square" lIns="45719" tIns="45719" rIns="45719" bIns="45719" numCol="1" spcCol="38100" rtlCol="0" anchor="ctr">
+            <a:spAutoFit/>
+          </a:bodyPr>
+          <a:lstStyle/>
+          <a:p>
+            <a:pPr marL="0" marR="0" indent="0" algn="l" defTabSz="457200" rtl="0" fontAlgn="auto" latinLnBrk="0" hangingPunct="0">
+              <a:lnSpc>
+                <a:spcPct val="100000"/>
+              </a:lnSpc>
+              <a:spcBef>
+                <a:spcPts val="0"/>
+              </a:spcBef>
+              <a:spcAft>
+                <a:spcPts val="0"/>
+              </a:spcAft>
+              <a:buClrTx/>
+              <a:buSzTx/>
+              <a:buFontTx/>
+              <a:buNone/>
+              <a:tabLst/>
+            </a:pPr>
+            <a:endParaRPr kumimoji="0" lang="ru-RU" sz="1800" b="0" i="0" u="none" strike="noStrike" cap="none" spc="0" normalizeH="0" baseline="0">
+              <a:ln>
+                <a:noFill/>
+              </a:ln>
+              <a:solidFill>
+                <a:srgbClr val="000000"/>
+              </a:solidFill>
+              <a:effectLst/>
+              <a:uFillTx/>
+              <a:latin typeface="Arial"/>
+              <a:ea typeface="Arial"/>
+              <a:cs typeface="Arial"/>
+              <a:sym typeface="Arial"/>
+            </a:endParaRPr>
+          </a:p>
+        </p:txBody>
+      </p:sp>
     </p:spTree>
     <p:extLst>
       <p:ext uri="{BB962C8B-B14F-4D97-AF65-F5344CB8AC3E}">
@@ -25704,6 +27156,88 @@
           <a:chExt cx="0" cy="0"/>
         </a:xfrm>
       </p:grpSpPr>
+      <p:sp>
+        <p:nvSpPr>
+          <p:cNvPr id="17" name="Прямоугольник 16">
+            <a:extLst>
+              <a:ext uri="{FF2B5EF4-FFF2-40B4-BE49-F238E27FC236}">
+                <a16:creationId xmlns:a16="http://schemas.microsoft.com/office/drawing/2014/main" id="{AB9CFF62-20E8-4601-BBC2-C911889796EE}"/>
+              </a:ext>
+            </a:extLst>
+          </p:cNvPr>
+          <p:cNvSpPr/>
+          <p:nvPr/>
+        </p:nvSpPr>
+        <p:spPr>
+          <a:xfrm>
+            <a:off x="1047750" y="6410632"/>
+            <a:ext cx="2743200" cy="285136"/>
+          </a:xfrm>
+          <a:prstGeom prst="rect">
+            <a:avLst/>
+          </a:prstGeom>
+          <a:solidFill>
+            <a:srgbClr val="FFFFFF"/>
+          </a:solidFill>
+          <a:ln w="12700" cap="flat">
+            <a:noFill/>
+            <a:prstDash val="solid"/>
+            <a:miter lim="800000"/>
+          </a:ln>
+          <a:effectLst/>
+          <a:sp3d/>
+        </p:spPr>
+        <p:style>
+          <a:lnRef idx="0">
+            <a:scrgbClr r="0" g="0" b="0"/>
+          </a:lnRef>
+          <a:fillRef idx="0">
+            <a:scrgbClr r="0" g="0" b="0"/>
+          </a:fillRef>
+          <a:effectRef idx="0">
+            <a:scrgbClr r="0" g="0" b="0"/>
+          </a:effectRef>
+          <a:fontRef idx="none"/>
+        </p:style>
+        <p:txBody>
+          <a:bodyPr rot="0" spcFirstLastPara="1" vertOverflow="overflow" horzOverflow="overflow" vert="horz" wrap="square" lIns="45719" tIns="45719" rIns="45719" bIns="45719" numCol="1" spcCol="38100" rtlCol="0" anchor="ctr">
+            <a:spAutoFit/>
+          </a:bodyPr>
+          <a:lstStyle/>
+          <a:p>
+            <a:pPr marL="0" marR="0" indent="0" algn="l" defTabSz="457200" rtl="0" fontAlgn="auto" latinLnBrk="0" hangingPunct="0">
+              <a:lnSpc>
+                <a:spcPct val="100000"/>
+              </a:lnSpc>
+              <a:spcBef>
+                <a:spcPts val="0"/>
+              </a:spcBef>
+              <a:spcAft>
+                <a:spcPts val="0"/>
+              </a:spcAft>
+              <a:buClrTx/>
+              <a:buSzTx/>
+              <a:buFontTx/>
+              <a:buNone/>
+              <a:tabLst/>
+            </a:pPr>
+            <a:endParaRPr kumimoji="0" lang="ru-RU" sz="1800" b="0" i="0" u="none" strike="noStrike" cap="none" spc="0" normalizeH="0" baseline="0">
+              <a:ln>
+                <a:noFill/>
+              </a:ln>
+              <a:solidFill>
+                <a:srgbClr val="000000"/>
+              </a:solidFill>
+              <a:effectLst/>
+              <a:uFillTx/>
+              <a:latin typeface="Arial"/>
+              <a:ea typeface="Arial"/>
+              <a:cs typeface="Arial"/>
+              <a:sym typeface="Arial"/>
+            </a:endParaRPr>
+          </a:p>
+        </p:txBody>
+      </p:sp>
       <p:sp>
         <p:nvSpPr>
           <p:cNvPr id="2" name="Прямоугольник 1">
@@ -25986,7 +27520,7 @@
         </p:nvSpPr>
         <p:spPr>
           <a:xfrm>
-            <a:off x="149942" y="688249"/>
+            <a:off x="292817" y="688249"/>
             <a:ext cx="6479458" cy="461665"/>
           </a:xfrm>
           <a:prstGeom prst="rect">
@@ -26132,7 +27666,7 @@
         </p:nvSpPr>
         <p:spPr>
           <a:xfrm>
-            <a:off x="2998839" y="1670554"/>
+            <a:off x="2875014" y="1594354"/>
             <a:ext cx="1740310" cy="393290"/>
           </a:xfrm>
           <a:prstGeom prst="rect">
@@ -26216,7 +27750,7 @@
         </p:nvSpPr>
         <p:spPr>
           <a:xfrm>
-            <a:off x="5879690" y="852719"/>
+            <a:off x="5879690" y="913679"/>
             <a:ext cx="2108749" cy="393290"/>
           </a:xfrm>
           <a:prstGeom prst="rect">
@@ -26300,7 +27834,7 @@
         </p:nvSpPr>
         <p:spPr>
           <a:xfrm>
-            <a:off x="9014721" y="1894564"/>
+            <a:off x="8673345" y="1754356"/>
             <a:ext cx="1995949" cy="393290"/>
           </a:xfrm>
           <a:prstGeom prst="rect">
@@ -26468,7 +28002,7 @@
         </p:nvSpPr>
         <p:spPr>
           <a:xfrm>
-            <a:off x="3497825" y="1609001"/>
+            <a:off x="3374000" y="1542326"/>
             <a:ext cx="993059" cy="461663"/>
           </a:xfrm>
           <a:prstGeom prst="rect">
@@ -26564,7 +28098,7 @@
         </p:nvSpPr>
         <p:spPr>
           <a:xfrm>
-            <a:off x="5879690" y="787754"/>
+            <a:off x="5879690" y="883004"/>
             <a:ext cx="2450867" cy="461665"/>
           </a:xfrm>
           <a:prstGeom prst="rect">
@@ -26631,7 +28165,7 @@
         </p:nvSpPr>
         <p:spPr>
           <a:xfrm>
-            <a:off x="9189540" y="1833011"/>
+            <a:off x="8848164" y="1692803"/>
             <a:ext cx="2235435" cy="461665"/>
           </a:xfrm>
           <a:prstGeom prst="rect">
@@ -26774,6 +28308,88 @@
           <a:chExt cx="0" cy="0"/>
         </a:xfrm>
       </p:grpSpPr>
+      <p:sp>
+        <p:nvSpPr>
+          <p:cNvPr id="10" name="Прямоугольник 9">
+            <a:extLst>
+              <a:ext uri="{FF2B5EF4-FFF2-40B4-BE49-F238E27FC236}">
+                <a16:creationId xmlns:a16="http://schemas.microsoft.com/office/drawing/2014/main" id="{EEC70FE0-5DC5-472D-BFDC-5162CF3C6B83}"/>
+              </a:ext>
+            </a:extLst>
+          </p:cNvPr>
+          <p:cNvSpPr/>
+          <p:nvPr/>
+        </p:nvSpPr>
+        <p:spPr>
+          <a:xfrm>
+            <a:off x="1047750" y="6410632"/>
+            <a:ext cx="2743200" cy="285136"/>
+          </a:xfrm>
+          <a:prstGeom prst="rect">
+            <a:avLst/>
+          </a:prstGeom>
+          <a:solidFill>
+            <a:srgbClr val="FFFFFF"/>
+          </a:solidFill>
+          <a:ln w="12700" cap="flat">
+            <a:noFill/>
+            <a:prstDash val="solid"/>
+            <a:miter lim="800000"/>
+          </a:ln>
+          <a:effectLst/>
+          <a:sp3d/>
+        </p:spPr>
+        <p:style>
+          <a:lnRef idx="0">
+            <a:scrgbClr r="0" g="0" b="0"/>
+          </a:lnRef>
+          <a:fillRef idx="0">
+            <a:scrgbClr r="0" g="0" b="0"/>
+          </a:fillRef>
+          <a:effectRef idx="0">
+            <a:scrgbClr r="0" g="0" b="0"/>
+          </a:effectRef>
+          <a:fontRef idx="none"/>
+        </p:style>
+        <p:txBody>
+          <a:bodyPr rot="0" spcFirstLastPara="1" vertOverflow="overflow" horzOverflow="overflow" vert="horz" wrap="square" lIns="45719" tIns="45719" rIns="45719" bIns="45719" numCol="1" spcCol="38100" rtlCol="0" anchor="ctr">
+            <a:spAutoFit/>
+          </a:bodyPr>
+          <a:lstStyle/>
+          <a:p>
+            <a:pPr marL="0" marR="0" indent="0" algn="l" defTabSz="457200" rtl="0" fontAlgn="auto" latinLnBrk="0" hangingPunct="0">
+              <a:lnSpc>
+                <a:spcPct val="100000"/>
+              </a:lnSpc>
+              <a:spcBef>
+                <a:spcPts val="0"/>
+              </a:spcBef>
+              <a:spcAft>
+                <a:spcPts val="0"/>
+              </a:spcAft>
+              <a:buClrTx/>
+              <a:buSzTx/>
+              <a:buFontTx/>
+              <a:buNone/>
+              <a:tabLst/>
+            </a:pPr>
+            <a:endParaRPr kumimoji="0" lang="ru-RU" sz="1800" b="0" i="0" u="none" strike="noStrike" cap="none" spc="0" normalizeH="0" baseline="0">
+              <a:ln>
+                <a:noFill/>
+              </a:ln>
+              <a:solidFill>
+                <a:srgbClr val="000000"/>
+              </a:solidFill>
+              <a:effectLst/>
+              <a:uFillTx/>
+              <a:latin typeface="Arial"/>
+              <a:ea typeface="Arial"/>
+              <a:cs typeface="Arial"/>
+              <a:sym typeface="Arial"/>
+            </a:endParaRPr>
+          </a:p>
+        </p:txBody>
+      </p:sp>
       <p:sp>
         <p:nvSpPr>
           <p:cNvPr id="2" name="Прямоугольник 1">
@@ -27299,6 +28915,88 @@
       </p:grpSpPr>
       <p:sp>
         <p:nvSpPr>
+          <p:cNvPr id="8" name="Прямоугольник 7">
+            <a:extLst>
+              <a:ext uri="{FF2B5EF4-FFF2-40B4-BE49-F238E27FC236}">
+                <a16:creationId xmlns:a16="http://schemas.microsoft.com/office/drawing/2014/main" id="{3B663D4C-B3AE-4236-92BA-155C2F86E928}"/>
+              </a:ext>
+            </a:extLst>
+          </p:cNvPr>
+          <p:cNvSpPr/>
+          <p:nvPr/>
+        </p:nvSpPr>
+        <p:spPr>
+          <a:xfrm>
+            <a:off x="1047750" y="6410632"/>
+            <a:ext cx="2743200" cy="285136"/>
+          </a:xfrm>
+          <a:prstGeom prst="rect">
+            <a:avLst/>
+          </a:prstGeom>
+          <a:solidFill>
+            <a:srgbClr val="FFFFFF"/>
+          </a:solidFill>
+          <a:ln w="12700" cap="flat">
+            <a:noFill/>
+            <a:prstDash val="solid"/>
+            <a:miter lim="800000"/>
+          </a:ln>
+          <a:effectLst/>
+          <a:sp3d/>
+        </p:spPr>
+        <p:style>
+          <a:lnRef idx="0">
+            <a:scrgbClr r="0" g="0" b="0"/>
+          </a:lnRef>
+          <a:fillRef idx="0">
+            <a:scrgbClr r="0" g="0" b="0"/>
+          </a:fillRef>
+          <a:effectRef idx="0">
+            <a:scrgbClr r="0" g="0" b="0"/>
+          </a:effectRef>
+          <a:fontRef idx="none"/>
+        </p:style>
+        <p:txBody>
+          <a:bodyPr rot="0" spcFirstLastPara="1" vertOverflow="overflow" horzOverflow="overflow" vert="horz" wrap="square" lIns="45719" tIns="45719" rIns="45719" bIns="45719" numCol="1" spcCol="38100" rtlCol="0" anchor="ctr">
+            <a:spAutoFit/>
+          </a:bodyPr>
+          <a:lstStyle/>
+          <a:p>
+            <a:pPr marL="0" marR="0" indent="0" algn="l" defTabSz="457200" rtl="0" fontAlgn="auto" latinLnBrk="0" hangingPunct="0">
+              <a:lnSpc>
+                <a:spcPct val="100000"/>
+              </a:lnSpc>
+              <a:spcBef>
+                <a:spcPts val="0"/>
+              </a:spcBef>
+              <a:spcAft>
+                <a:spcPts val="0"/>
+              </a:spcAft>
+              <a:buClrTx/>
+              <a:buSzTx/>
+              <a:buFontTx/>
+              <a:buNone/>
+              <a:tabLst/>
+            </a:pPr>
+            <a:endParaRPr kumimoji="0" lang="ru-RU" sz="1800" b="0" i="0" u="none" strike="noStrike" cap="none" spc="0" normalizeH="0" baseline="0">
+              <a:ln>
+                <a:noFill/>
+              </a:ln>
+              <a:solidFill>
+                <a:srgbClr val="000000"/>
+              </a:solidFill>
+              <a:effectLst/>
+              <a:uFillTx/>
+              <a:latin typeface="Arial"/>
+              <a:ea typeface="Arial"/>
+              <a:cs typeface="Arial"/>
+              <a:sym typeface="Arial"/>
+            </a:endParaRPr>
+          </a:p>
+        </p:txBody>
+      </p:sp>
+      <p:sp>
+        <p:nvSpPr>
           <p:cNvPr id="2" name="Прямоугольник 1">
             <a:extLst>
               <a:ext uri="{FF2B5EF4-FFF2-40B4-BE49-F238E27FC236}">
@@ -28503,6 +30201,88 @@
           </a:p>
         </p:txBody>
       </p:sp>
+      <p:sp>
+        <p:nvSpPr>
+          <p:cNvPr id="8" name="Прямоугольник 7">
+            <a:extLst>
+              <a:ext uri="{FF2B5EF4-FFF2-40B4-BE49-F238E27FC236}">
+                <a16:creationId xmlns:a16="http://schemas.microsoft.com/office/drawing/2014/main" id="{9B6D0F46-F0B3-48D4-9944-9862A60EFC97}"/>
+              </a:ext>
+            </a:extLst>
+          </p:cNvPr>
+          <p:cNvSpPr/>
+          <p:nvPr/>
+        </p:nvSpPr>
+        <p:spPr>
+          <a:xfrm>
+            <a:off x="1047750" y="6410632"/>
+            <a:ext cx="2743200" cy="285136"/>
+          </a:xfrm>
+          <a:prstGeom prst="rect">
+            <a:avLst/>
+          </a:prstGeom>
+          <a:solidFill>
+            <a:srgbClr val="FFFFFF"/>
+          </a:solidFill>
+          <a:ln w="12700" cap="flat">
+            <a:noFill/>
+            <a:prstDash val="solid"/>
+            <a:miter lim="800000"/>
+          </a:ln>
+          <a:effectLst/>
+          <a:sp3d/>
+        </p:spPr>
+        <p:style>
+          <a:lnRef idx="0">
+            <a:scrgbClr r="0" g="0" b="0"/>
+          </a:lnRef>
+          <a:fillRef idx="0">
+            <a:scrgbClr r="0" g="0" b="0"/>
+          </a:fillRef>
+          <a:effectRef idx="0">
+            <a:scrgbClr r="0" g="0" b="0"/>
+          </a:effectRef>
+          <a:fontRef idx="none"/>
+        </p:style>
+        <p:txBody>
+          <a:bodyPr rot="0" spcFirstLastPara="1" vertOverflow="overflow" horzOverflow="overflow" vert="horz" wrap="square" lIns="45719" tIns="45719" rIns="45719" bIns="45719" numCol="1" spcCol="38100" rtlCol="0" anchor="ctr">
+            <a:spAutoFit/>
+          </a:bodyPr>
+          <a:lstStyle/>
+          <a:p>
+            <a:pPr marL="0" marR="0" indent="0" algn="l" defTabSz="457200" rtl="0" fontAlgn="auto" latinLnBrk="0" hangingPunct="0">
+              <a:lnSpc>
+                <a:spcPct val="100000"/>
+              </a:lnSpc>
+              <a:spcBef>
+                <a:spcPts val="0"/>
+              </a:spcBef>
+              <a:spcAft>
+                <a:spcPts val="0"/>
+              </a:spcAft>
+              <a:buClrTx/>
+              <a:buSzTx/>
+              <a:buFontTx/>
+              <a:buNone/>
+              <a:tabLst/>
+            </a:pPr>
+            <a:endParaRPr kumimoji="0" lang="ru-RU" sz="1800" b="0" i="0" u="none" strike="noStrike" cap="none" spc="0" normalizeH="0" baseline="0">
+              <a:ln>
+                <a:noFill/>
+              </a:ln>
+              <a:solidFill>
+                <a:srgbClr val="000000"/>
+              </a:solidFill>
+              <a:effectLst/>
+              <a:uFillTx/>
+              <a:latin typeface="Arial"/>
+              <a:ea typeface="Arial"/>
+              <a:cs typeface="Arial"/>
+              <a:sym typeface="Arial"/>
+            </a:endParaRPr>
+          </a:p>
+        </p:txBody>
+      </p:sp>
     </p:spTree>
     <p:extLst>
       <p:ext uri="{BB962C8B-B14F-4D97-AF65-F5344CB8AC3E}">
@@ -28816,7 +30596,7 @@
         </p:nvSpPr>
         <p:spPr>
           <a:xfrm>
-            <a:off x="565354" y="969476"/>
+            <a:off x="565354" y="1073128"/>
             <a:ext cx="11724969" cy="4893647"/>
           </a:xfrm>
           <a:prstGeom prst="rect">
@@ -28857,7 +30637,7 @@
                 <a:effectLst/>
                 <a:latin typeface="+mn-lt"/>
               </a:rPr>
-              <a:t>В ходе выполнения лабораторной работы был проведен полный цикл анализа и моделирования первичного учетного документа на примере кассового чека ООО «Альфа». Выполнен реквизитный анализ документа с классификацией реквизитов на постоянные и переменные, а также выделены ключевые финансовые и экономические показатели. Изучена нормативная база (ФЗ-54) и описан бизнес-процесс работы с кассовым чеком от инициации покупки до </a:t>
+              <a:t>	В ходе выполнения лабораторной работы был проведен полный цикл анализа и моделирования первичного учетного документа на примере кассового чека ООО «Альфа». Выполнен реквизитный анализ документа с классификацией реквизитов на постоянные и переменные, а также выделены ключевые финансовые и экономические показатели. Изучена нормативная база (ФЗ-54) и описан бизнес-процесс работы с кассовым чеком от инициации покупки до </a:t>
             </a:r>
             <a:r>
               <a:rPr lang="ru-RU" sz="2400" b="0" i="0" dirty="0" err="1">
@@ -28921,6 +30701,88 @@
             </a:r>
             <a:endParaRPr lang="en-US" sz="2400" dirty="0">
               <a:latin typeface="+mn-lt"/>
+            </a:endParaRPr>
+          </a:p>
+        </p:txBody>
+      </p:sp>
+      <p:sp>
+        <p:nvSpPr>
+          <p:cNvPr id="8" name="Прямоугольник 7">
+            <a:extLst>
+              <a:ext uri="{FF2B5EF4-FFF2-40B4-BE49-F238E27FC236}">
+                <a16:creationId xmlns:a16="http://schemas.microsoft.com/office/drawing/2014/main" id="{91EAFD35-1D28-46A9-AD8F-5374747C23E0}"/>
+              </a:ext>
+            </a:extLst>
+          </p:cNvPr>
+          <p:cNvSpPr/>
+          <p:nvPr/>
+        </p:nvSpPr>
+        <p:spPr>
+          <a:xfrm>
+            <a:off x="1047750" y="6410632"/>
+            <a:ext cx="2743200" cy="285136"/>
+          </a:xfrm>
+          <a:prstGeom prst="rect">
+            <a:avLst/>
+          </a:prstGeom>
+          <a:solidFill>
+            <a:srgbClr val="FFFFFF"/>
+          </a:solidFill>
+          <a:ln w="12700" cap="flat">
+            <a:noFill/>
+            <a:prstDash val="solid"/>
+            <a:miter lim="800000"/>
+          </a:ln>
+          <a:effectLst/>
+          <a:sp3d/>
+        </p:spPr>
+        <p:style>
+          <a:lnRef idx="0">
+            <a:scrgbClr r="0" g="0" b="0"/>
+          </a:lnRef>
+          <a:fillRef idx="0">
+            <a:scrgbClr r="0" g="0" b="0"/>
+          </a:fillRef>
+          <a:effectRef idx="0">
+            <a:scrgbClr r="0" g="0" b="0"/>
+          </a:effectRef>
+          <a:fontRef idx="none"/>
+        </p:style>
+        <p:txBody>
+          <a:bodyPr rot="0" spcFirstLastPara="1" vertOverflow="overflow" horzOverflow="overflow" vert="horz" wrap="square" lIns="45719" tIns="45719" rIns="45719" bIns="45719" numCol="1" spcCol="38100" rtlCol="0" anchor="ctr">
+            <a:spAutoFit/>
+          </a:bodyPr>
+          <a:lstStyle/>
+          <a:p>
+            <a:pPr marL="0" marR="0" indent="0" algn="l" defTabSz="457200" rtl="0" fontAlgn="auto" latinLnBrk="0" hangingPunct="0">
+              <a:lnSpc>
+                <a:spcPct val="100000"/>
+              </a:lnSpc>
+              <a:spcBef>
+                <a:spcPts val="0"/>
+              </a:spcBef>
+              <a:spcAft>
+                <a:spcPts val="0"/>
+              </a:spcAft>
+              <a:buClrTx/>
+              <a:buSzTx/>
+              <a:buFontTx/>
+              <a:buNone/>
+              <a:tabLst/>
+            </a:pPr>
+            <a:endParaRPr kumimoji="0" lang="ru-RU" sz="1800" b="0" i="0" u="none" strike="noStrike" cap="none" spc="0" normalizeH="0" baseline="0">
+              <a:ln>
+                <a:noFill/>
+              </a:ln>
+              <a:solidFill>
+                <a:srgbClr val="000000"/>
+              </a:solidFill>
+              <a:effectLst/>
+              <a:uFillTx/>
+              <a:latin typeface="Arial"/>
+              <a:ea typeface="Arial"/>
+              <a:cs typeface="Arial"/>
+              <a:sym typeface="Arial"/>
             </a:endParaRPr>
           </a:p>
         </p:txBody>
@@ -28958,6 +30820,88 @@
       </p:grpSpPr>
       <p:sp>
         <p:nvSpPr>
+          <p:cNvPr id="8" name="Прямоугольник 7">
+            <a:extLst>
+              <a:ext uri="{FF2B5EF4-FFF2-40B4-BE49-F238E27FC236}">
+                <a16:creationId xmlns:a16="http://schemas.microsoft.com/office/drawing/2014/main" id="{2FCD03E4-71FE-4FDD-A6B2-34F0F90DC0E6}"/>
+              </a:ext>
+            </a:extLst>
+          </p:cNvPr>
+          <p:cNvSpPr/>
+          <p:nvPr/>
+        </p:nvSpPr>
+        <p:spPr>
+          <a:xfrm>
+            <a:off x="1047750" y="6410632"/>
+            <a:ext cx="2743200" cy="285136"/>
+          </a:xfrm>
+          <a:prstGeom prst="rect">
+            <a:avLst/>
+          </a:prstGeom>
+          <a:solidFill>
+            <a:srgbClr val="FFFFFF"/>
+          </a:solidFill>
+          <a:ln w="12700" cap="flat">
+            <a:noFill/>
+            <a:prstDash val="solid"/>
+            <a:miter lim="800000"/>
+          </a:ln>
+          <a:effectLst/>
+          <a:sp3d/>
+        </p:spPr>
+        <p:style>
+          <a:lnRef idx="0">
+            <a:scrgbClr r="0" g="0" b="0"/>
+          </a:lnRef>
+          <a:fillRef idx="0">
+            <a:scrgbClr r="0" g="0" b="0"/>
+          </a:fillRef>
+          <a:effectRef idx="0">
+            <a:scrgbClr r="0" g="0" b="0"/>
+          </a:effectRef>
+          <a:fontRef idx="none"/>
+        </p:style>
+        <p:txBody>
+          <a:bodyPr rot="0" spcFirstLastPara="1" vertOverflow="overflow" horzOverflow="overflow" vert="horz" wrap="square" lIns="45719" tIns="45719" rIns="45719" bIns="45719" numCol="1" spcCol="38100" rtlCol="0" anchor="ctr">
+            <a:spAutoFit/>
+          </a:bodyPr>
+          <a:lstStyle/>
+          <a:p>
+            <a:pPr marL="0" marR="0" indent="0" algn="l" defTabSz="457200" rtl="0" fontAlgn="auto" latinLnBrk="0" hangingPunct="0">
+              <a:lnSpc>
+                <a:spcPct val="100000"/>
+              </a:lnSpc>
+              <a:spcBef>
+                <a:spcPts val="0"/>
+              </a:spcBef>
+              <a:spcAft>
+                <a:spcPts val="0"/>
+              </a:spcAft>
+              <a:buClrTx/>
+              <a:buSzTx/>
+              <a:buFontTx/>
+              <a:buNone/>
+              <a:tabLst/>
+            </a:pPr>
+            <a:endParaRPr kumimoji="0" lang="ru-RU" sz="1800" b="0" i="0" u="none" strike="noStrike" cap="none" spc="0" normalizeH="0" baseline="0">
+              <a:ln>
+                <a:noFill/>
+              </a:ln>
+              <a:solidFill>
+                <a:srgbClr val="000000"/>
+              </a:solidFill>
+              <a:effectLst/>
+              <a:uFillTx/>
+              <a:latin typeface="Arial"/>
+              <a:ea typeface="Arial"/>
+              <a:cs typeface="Arial"/>
+              <a:sym typeface="Arial"/>
+            </a:endParaRPr>
+          </a:p>
+        </p:txBody>
+      </p:sp>
+      <p:sp>
+        <p:nvSpPr>
           <p:cNvPr id="2" name="Прямоугольник 1">
             <a:extLst>
               <a:ext uri="{FF2B5EF4-FFF2-40B4-BE49-F238E27FC236}">
@@ -29238,8 +31182,8 @@
         </p:nvSpPr>
         <p:spPr>
           <a:xfrm>
-            <a:off x="309716" y="942323"/>
-            <a:ext cx="12403394" cy="5278368"/>
+            <a:off x="243041" y="808973"/>
+            <a:ext cx="12403394" cy="6270947"/>
           </a:xfrm>
           <a:prstGeom prst="rect">
             <a:avLst/>
@@ -29284,7 +31228,7 @@
               </a:tabLst>
             </a:pPr>
             <a:r>
-              <a:rPr lang="ru-RU" sz="1400" dirty="0">
+              <a:rPr lang="ru-RU" sz="1500" dirty="0">
                 <a:solidFill>
                   <a:schemeClr val="tx1"/>
                 </a:solidFill>
@@ -29296,7 +31240,7 @@
               <a:t>Российская Федерация. Законы. О применении контрольно-кассовой техники при осуществлении расчетов в Российской Федерации : Федеральный закон № 54-ФЗ : [принят Государственной Думой 25 апреля 2003 года : одобрен Советом Федерации 14 мая 2003 года]. — Москва : Кремль, 2003. — Текст : электронный // КонсультантПлюс : [сайт]. — URL: </a:t>
             </a:r>
             <a:r>
-              <a:rPr lang="ru-RU" sz="1400" u="none" strike="noStrike" dirty="0">
+              <a:rPr lang="ru-RU" sz="1500" u="none" strike="noStrike" dirty="0">
                 <a:solidFill>
                   <a:schemeClr val="tx1"/>
                 </a:solidFill>
@@ -29315,7 +31259,7 @@
               <a:t>http://www.consultant.ru/document/cons_doc_LAW_42359/</a:t>
             </a:r>
             <a:r>
-              <a:rPr lang="ru-RU" sz="1400" dirty="0">
+              <a:rPr lang="ru-RU" sz="1500" dirty="0">
                 <a:solidFill>
                   <a:schemeClr val="tx1"/>
                 </a:solidFill>
@@ -29326,7 +31270,7 @@
               </a:rPr>
               <a:t> (дата обращения: 03.03.2026).</a:t>
             </a:r>
-            <a:endParaRPr lang="en-US" sz="1400" dirty="0">
+            <a:endParaRPr lang="en-US" sz="1500" dirty="0">
               <a:solidFill>
                 <a:schemeClr val="tx1"/>
               </a:solidFill>
@@ -29351,7 +31295,7 @@
               </a:tabLst>
             </a:pPr>
             <a:r>
-              <a:rPr lang="ru-RU" sz="1400" dirty="0">
+              <a:rPr lang="ru-RU" sz="1500" dirty="0">
                 <a:solidFill>
                   <a:schemeClr val="tx1"/>
                 </a:solidFill>
@@ -29363,7 +31307,7 @@
               <a:t>Как работать на кассе: инструкция для кассира : Как пробивать товары, закрывать смену и возвращать покупки. — Текст : электронный // Онлайн-касса : [сайт]. — 2024. — URL: </a:t>
             </a:r>
             <a:r>
-              <a:rPr lang="ru-RU" sz="1400" u="none" strike="noStrike" dirty="0">
+              <a:rPr lang="ru-RU" sz="1500" u="none" strike="noStrike" dirty="0">
                 <a:solidFill>
                   <a:schemeClr val="tx1"/>
                 </a:solidFill>
@@ -29382,7 +31326,7 @@
               <a:t>https://online-kassa.ru/blog/kak-rabotat-na-kasse-instruktsiya-dlya-kassira/</a:t>
             </a:r>
             <a:r>
-              <a:rPr lang="ru-RU" sz="1400" dirty="0">
+              <a:rPr lang="ru-RU" sz="1500" dirty="0">
                 <a:solidFill>
                   <a:schemeClr val="tx1"/>
                 </a:solidFill>
@@ -29393,7 +31337,7 @@
               </a:rPr>
               <a:t> (дата обращения: 03.03.2026).</a:t>
             </a:r>
-            <a:endParaRPr lang="en-US" sz="1400" dirty="0">
+            <a:endParaRPr lang="en-US" sz="1500" dirty="0">
               <a:solidFill>
                 <a:schemeClr val="tx1"/>
               </a:solidFill>
@@ -29418,7 +31362,7 @@
               </a:tabLst>
             </a:pPr>
             <a:r>
-              <a:rPr lang="ru-RU" sz="1400" dirty="0">
+              <a:rPr lang="ru-RU" sz="1500" dirty="0">
                 <a:solidFill>
                   <a:schemeClr val="tx1"/>
                 </a:solidFill>
@@ -29430,7 +31374,7 @@
               <a:t>Регламент порядка работы пользователей на контрольно-кассовой технике (ККТ) в приложениях "1С:Розница 8", "1С:Управление торговлей 8", "1С:Комплексная автоматизация 8", "1С:ERP Управление холдингом 8". — Текст : электронный // 1С:ИТС : [сайт]. — Москва : Фирма "1С", 2025. — URL: </a:t>
             </a:r>
             <a:r>
-              <a:rPr lang="ru-RU" sz="1400" u="none" strike="noStrike" dirty="0">
+              <a:rPr lang="ru-RU" sz="1500" u="none" strike="noStrike" dirty="0">
                 <a:solidFill>
                   <a:schemeClr val="tx1"/>
                 </a:solidFill>
@@ -29449,7 +31393,7 @@
               <a:t>https://torg.1c.ru/upload/iblock/5eb/5eb2d08927a7fe3ffebcf4a866836949.pdf</a:t>
             </a:r>
             <a:r>
-              <a:rPr lang="ru-RU" sz="1400" dirty="0">
+              <a:rPr lang="ru-RU" sz="1500" dirty="0">
                 <a:solidFill>
                   <a:schemeClr val="tx1"/>
                 </a:solidFill>
@@ -29460,7 +31404,7 @@
               </a:rPr>
               <a:t> (дата обращения: 03.03.2026).</a:t>
             </a:r>
-            <a:endParaRPr lang="en-US" sz="1400" dirty="0">
+            <a:endParaRPr lang="en-US" sz="1500" dirty="0">
               <a:solidFill>
                 <a:schemeClr val="tx1"/>
               </a:solidFill>
@@ -29485,7 +31429,7 @@
               </a:tabLst>
             </a:pPr>
             <a:r>
-              <a:rPr lang="ru-RU" sz="1400" dirty="0">
+              <a:rPr lang="ru-RU" sz="1500" dirty="0">
                 <a:solidFill>
                   <a:schemeClr val="tx1"/>
                 </a:solidFill>
@@ -29497,7 +31441,7 @@
               <a:t>Федеральная налоговая служба : официальный сайт. — Москва. — Обновляется в течение суток. — URL: </a:t>
             </a:r>
             <a:r>
-              <a:rPr lang="ru-RU" sz="1400" u="none" strike="noStrike" dirty="0">
+              <a:rPr lang="ru-RU" sz="1500" u="none" strike="noStrike" dirty="0">
                 <a:solidFill>
                   <a:schemeClr val="tx1"/>
                 </a:solidFill>
@@ -29516,7 +31460,7 @@
               <a:t>https://www.nalog.gov.ru/</a:t>
             </a:r>
             <a:r>
-              <a:rPr lang="ru-RU" sz="1400" dirty="0">
+              <a:rPr lang="ru-RU" sz="1500" dirty="0">
                 <a:solidFill>
                   <a:schemeClr val="tx1"/>
                 </a:solidFill>
@@ -29527,7 +31471,7 @@
               </a:rPr>
               <a:t> (дата обращения: 03.03.2026). — Текст : электронный.</a:t>
             </a:r>
-            <a:endParaRPr lang="en-US" sz="1400" dirty="0">
+            <a:endParaRPr lang="en-US" sz="1500" dirty="0">
               <a:solidFill>
                 <a:schemeClr val="tx1"/>
               </a:solidFill>
@@ -29552,7 +31496,7 @@
               </a:tabLst>
             </a:pPr>
             <a:r>
-              <a:rPr lang="ru-RU" sz="1400" dirty="0">
+              <a:rPr lang="ru-RU" sz="1500" dirty="0">
                 <a:solidFill>
                   <a:schemeClr val="tx1"/>
                 </a:solidFill>
@@ -29564,7 +31508,7 @@
               <a:t>Официальная документация BPMN. — Текст : электронный // </a:t>
             </a:r>
             <a:r>
-              <a:rPr lang="ru-RU" sz="1400" u="none" strike="noStrike" dirty="0">
+              <a:rPr lang="ru-RU" sz="1500" u="none" strike="noStrike" dirty="0">
                 <a:solidFill>
                   <a:schemeClr val="tx1"/>
                 </a:solidFill>
@@ -29583,7 +31527,7 @@
               <a:t>BPMN2.0.ru</a:t>
             </a:r>
             <a:r>
-              <a:rPr lang="ru-RU" sz="1400" dirty="0">
+              <a:rPr lang="ru-RU" sz="1500" dirty="0">
                 <a:solidFill>
                   <a:schemeClr val="tx1"/>
                 </a:solidFill>
@@ -29595,7 +31539,7 @@
               <a:t> : Документация по нотации BPMN. — URL: </a:t>
             </a:r>
             <a:r>
-              <a:rPr lang="ru-RU" sz="1400" u="none" strike="noStrike" dirty="0">
+              <a:rPr lang="ru-RU" sz="1500" u="none" strike="noStrike" dirty="0">
                 <a:solidFill>
                   <a:schemeClr val="tx1"/>
                 </a:solidFill>
@@ -29614,7 +31558,7 @@
               <a:t>https://bpmn20.ru/docs/docly-documentation/elements/oficzialnaya-dokumentacziya-bpmn/</a:t>
             </a:r>
             <a:r>
-              <a:rPr lang="ru-RU" sz="1400" dirty="0">
+              <a:rPr lang="ru-RU" sz="1500" dirty="0">
                 <a:solidFill>
                   <a:schemeClr val="tx1"/>
                 </a:solidFill>
@@ -29625,7 +31569,7 @@
               </a:rPr>
               <a:t> (дата обращения: 03.03.2026).</a:t>
             </a:r>
-            <a:endParaRPr lang="en-US" sz="1400" dirty="0">
+            <a:endParaRPr lang="en-US" sz="1500" dirty="0">
               <a:solidFill>
                 <a:schemeClr val="tx1"/>
               </a:solidFill>
@@ -29650,7 +31594,7 @@
               </a:tabLst>
             </a:pPr>
             <a:r>
-              <a:rPr lang="ru-RU" sz="1400" dirty="0" err="1">
+              <a:rPr lang="ru-RU" sz="1500" dirty="0" err="1">
                 <a:solidFill>
                   <a:schemeClr val="tx1"/>
                 </a:solidFill>
@@ -29662,7 +31606,7 @@
               <a:t>Stormbpmn</a:t>
             </a:r>
             <a:r>
-              <a:rPr lang="ru-RU" sz="1400" dirty="0">
+              <a:rPr lang="ru-RU" sz="1500" dirty="0">
                 <a:solidFill>
                   <a:schemeClr val="tx1"/>
                 </a:solidFill>
@@ -29674,7 +31618,7 @@
               <a:t> : онлайн-сервис для моделирования бизнес-процессов. — URL: </a:t>
             </a:r>
             <a:r>
-              <a:rPr lang="ru-RU" sz="1400" u="none" strike="noStrike" dirty="0">
+              <a:rPr lang="ru-RU" sz="1500" u="none" strike="noStrike" dirty="0">
                 <a:solidFill>
                   <a:schemeClr val="tx1"/>
                 </a:solidFill>
@@ -29693,7 +31637,7 @@
               <a:t>https://stormbpmn.com/</a:t>
             </a:r>
             <a:r>
-              <a:rPr lang="ru-RU" sz="1400" dirty="0">
+              <a:rPr lang="ru-RU" sz="1500" dirty="0">
                 <a:solidFill>
                   <a:schemeClr val="tx1"/>
                 </a:solidFill>
@@ -29704,7 +31648,7 @@
               </a:rPr>
               <a:t> (дата обращения: 03.03.2026). — Текст : электронный.</a:t>
             </a:r>
-            <a:endParaRPr lang="en-US" sz="1400" dirty="0">
+            <a:endParaRPr lang="en-US" sz="1500" dirty="0">
               <a:solidFill>
                 <a:schemeClr val="tx1"/>
               </a:solidFill>
@@ -29764,6 +31708,10 @@
           </p:nvPr>
         </p:nvSpPr>
         <p:spPr>
+          <a:xfrm>
+            <a:off x="1065253" y="2235758"/>
+            <a:ext cx="10423444" cy="2200944"/>
+          </a:xfrm>
           <a:prstGeom prst="rect">
             <a:avLst/>
           </a:prstGeom>
@@ -29772,7 +31720,9 @@
           <a:bodyPr/>
           <a:lstStyle/>
           <a:p>
-            <a:r>
+            <a:pPr algn="ctr"/>
+            <a:r>
+              <a:rPr dirty="0"/>
               <a:t>СПАСИБО ЗА ВНИМАНИЕ!</a:t>
             </a:r>
           </a:p>
@@ -29797,7 +31747,7 @@
           </a:ln>
           <a:extLst>
             <a:ext uri="{C572A759-6A51-4108-AA02-DFA0A04FC94B}">
-              <ma14:wrappingTextBoxFlag xmlns="" xmlns:m="http://schemas.openxmlformats.org/officeDocument/2006/math" xmlns:a14="http://schemas.microsoft.com/office/drawing/2010/main" xmlns:ma14="http://schemas.microsoft.com/office/mac/drawingml/2011/main" val="1"/>
+              <ma14:wrappingTextBoxFlag xmlns:ma14="http://schemas.microsoft.com/office/mac/drawingml/2011/main" xmlns:a14="http://schemas.microsoft.com/office/drawing/2010/main" xmlns:m="http://schemas.openxmlformats.org/officeDocument/2006/math" xmlns="" val="1"/>
             </a:ext>
           </a:extLst>
         </p:spPr>
@@ -30047,8 +31997,8 @@
         </p:nvSpPr>
         <p:spPr>
           <a:xfrm>
-            <a:off x="462116" y="702546"/>
-            <a:ext cx="9896168" cy="5819478"/>
+            <a:off x="963561" y="849445"/>
+            <a:ext cx="9896168" cy="5371792"/>
           </a:xfrm>
           <a:prstGeom prst="rect">
             <a:avLst/>
@@ -30338,22 +32288,6 @@
             <a:endParaRPr lang="en-US" sz="2000" dirty="0">
               <a:effectLst/>
               <a:latin typeface="+mn-lt"/>
-              <a:ea typeface="Calibri" panose="020F0502020204030204" pitchFamily="34" charset="0"/>
-              <a:cs typeface="Times New Roman" panose="02020603050405020304" pitchFamily="18" charset="0"/>
-            </a:endParaRPr>
-          </a:p>
-          <a:p>
-            <a:pPr indent="449580" algn="just">
-              <a:lnSpc>
-                <a:spcPct val="150000"/>
-              </a:lnSpc>
-              <a:spcAft>
-                <a:spcPts val="800"/>
-              </a:spcAft>
-            </a:pPr>
-            <a:endParaRPr lang="en-US" sz="1400" dirty="0">
-              <a:effectLst/>
-              <a:latin typeface="Calibri" panose="020F0502020204030204" pitchFamily="34" charset="0"/>
               <a:ea typeface="Calibri" panose="020F0502020204030204" pitchFamily="34" charset="0"/>
               <a:cs typeface="Times New Roman" panose="02020603050405020304" pitchFamily="18" charset="0"/>
             </a:endParaRPr>
@@ -30545,6 +32479,88 @@
               <a:effectLst/>
               <a:uFillTx/>
               <a:latin typeface="+mn-lt"/>
+              <a:ea typeface="Arial"/>
+              <a:cs typeface="Arial"/>
+              <a:sym typeface="Arial"/>
+            </a:endParaRPr>
+          </a:p>
+        </p:txBody>
+      </p:sp>
+      <p:sp>
+        <p:nvSpPr>
+          <p:cNvPr id="7" name="Прямоугольник 6">
+            <a:extLst>
+              <a:ext uri="{FF2B5EF4-FFF2-40B4-BE49-F238E27FC236}">
+                <a16:creationId xmlns:a16="http://schemas.microsoft.com/office/drawing/2014/main" id="{3307E25E-5F0A-4713-A6B6-B7F18546D085}"/>
+              </a:ext>
+            </a:extLst>
+          </p:cNvPr>
+          <p:cNvSpPr/>
+          <p:nvPr/>
+        </p:nvSpPr>
+        <p:spPr>
+          <a:xfrm>
+            <a:off x="1047750" y="6410632"/>
+            <a:ext cx="2743200" cy="285136"/>
+          </a:xfrm>
+          <a:prstGeom prst="rect">
+            <a:avLst/>
+          </a:prstGeom>
+          <a:solidFill>
+            <a:srgbClr val="FFFFFF"/>
+          </a:solidFill>
+          <a:ln w="12700" cap="flat">
+            <a:noFill/>
+            <a:prstDash val="solid"/>
+            <a:miter lim="800000"/>
+          </a:ln>
+          <a:effectLst/>
+          <a:sp3d/>
+        </p:spPr>
+        <p:style>
+          <a:lnRef idx="0">
+            <a:scrgbClr r="0" g="0" b="0"/>
+          </a:lnRef>
+          <a:fillRef idx="0">
+            <a:scrgbClr r="0" g="0" b="0"/>
+          </a:fillRef>
+          <a:effectRef idx="0">
+            <a:scrgbClr r="0" g="0" b="0"/>
+          </a:effectRef>
+          <a:fontRef idx="none"/>
+        </p:style>
+        <p:txBody>
+          <a:bodyPr rot="0" spcFirstLastPara="1" vertOverflow="overflow" horzOverflow="overflow" vert="horz" wrap="square" lIns="45719" tIns="45719" rIns="45719" bIns="45719" numCol="1" spcCol="38100" rtlCol="0" anchor="ctr">
+            <a:spAutoFit/>
+          </a:bodyPr>
+          <a:lstStyle/>
+          <a:p>
+            <a:pPr marL="0" marR="0" indent="0" algn="l" defTabSz="457200" rtl="0" fontAlgn="auto" latinLnBrk="0" hangingPunct="0">
+              <a:lnSpc>
+                <a:spcPct val="100000"/>
+              </a:lnSpc>
+              <a:spcBef>
+                <a:spcPts val="0"/>
+              </a:spcBef>
+              <a:spcAft>
+                <a:spcPts val="0"/>
+              </a:spcAft>
+              <a:buClrTx/>
+              <a:buSzTx/>
+              <a:buFontTx/>
+              <a:buNone/>
+              <a:tabLst/>
+            </a:pPr>
+            <a:endParaRPr kumimoji="0" lang="ru-RU" sz="1800" b="0" i="0" u="none" strike="noStrike" cap="none" spc="0" normalizeH="0" baseline="0">
+              <a:ln>
+                <a:noFill/>
+              </a:ln>
+              <a:solidFill>
+                <a:srgbClr val="000000"/>
+              </a:solidFill>
+              <a:effectLst/>
+              <a:uFillTx/>
+              <a:latin typeface="Arial"/>
               <a:ea typeface="Arial"/>
               <a:cs typeface="Arial"/>
               <a:sym typeface="Arial"/>
@@ -30681,7 +32697,7 @@
         </p:nvSpPr>
         <p:spPr>
           <a:xfrm>
-            <a:off x="565354" y="1455182"/>
+            <a:off x="963561" y="1532547"/>
             <a:ext cx="10849898" cy="3767506"/>
           </a:xfrm>
           <a:prstGeom prst="rect">
@@ -31149,6 +33165,88 @@
               <a:effectLst/>
               <a:uFillTx/>
               <a:latin typeface="+mn-lt"/>
+              <a:ea typeface="Arial"/>
+              <a:cs typeface="Arial"/>
+              <a:sym typeface="Arial"/>
+            </a:endParaRPr>
+          </a:p>
+        </p:txBody>
+      </p:sp>
+      <p:sp>
+        <p:nvSpPr>
+          <p:cNvPr id="7" name="Прямоугольник 6">
+            <a:extLst>
+              <a:ext uri="{FF2B5EF4-FFF2-40B4-BE49-F238E27FC236}">
+                <a16:creationId xmlns:a16="http://schemas.microsoft.com/office/drawing/2014/main" id="{0F1C9547-3C72-46E1-93E5-458F1EE393AF}"/>
+              </a:ext>
+            </a:extLst>
+          </p:cNvPr>
+          <p:cNvSpPr/>
+          <p:nvPr/>
+        </p:nvSpPr>
+        <p:spPr>
+          <a:xfrm>
+            <a:off x="1047750" y="6410632"/>
+            <a:ext cx="2743200" cy="285136"/>
+          </a:xfrm>
+          <a:prstGeom prst="rect">
+            <a:avLst/>
+          </a:prstGeom>
+          <a:solidFill>
+            <a:srgbClr val="FFFFFF"/>
+          </a:solidFill>
+          <a:ln w="12700" cap="flat">
+            <a:noFill/>
+            <a:prstDash val="solid"/>
+            <a:miter lim="800000"/>
+          </a:ln>
+          <a:effectLst/>
+          <a:sp3d/>
+        </p:spPr>
+        <p:style>
+          <a:lnRef idx="0">
+            <a:scrgbClr r="0" g="0" b="0"/>
+          </a:lnRef>
+          <a:fillRef idx="0">
+            <a:scrgbClr r="0" g="0" b="0"/>
+          </a:fillRef>
+          <a:effectRef idx="0">
+            <a:scrgbClr r="0" g="0" b="0"/>
+          </a:effectRef>
+          <a:fontRef idx="none"/>
+        </p:style>
+        <p:txBody>
+          <a:bodyPr rot="0" spcFirstLastPara="1" vertOverflow="overflow" horzOverflow="overflow" vert="horz" wrap="square" lIns="45719" tIns="45719" rIns="45719" bIns="45719" numCol="1" spcCol="38100" rtlCol="0" anchor="ctr">
+            <a:spAutoFit/>
+          </a:bodyPr>
+          <a:lstStyle/>
+          <a:p>
+            <a:pPr marL="0" marR="0" indent="0" algn="l" defTabSz="457200" rtl="0" fontAlgn="auto" latinLnBrk="0" hangingPunct="0">
+              <a:lnSpc>
+                <a:spcPct val="100000"/>
+              </a:lnSpc>
+              <a:spcBef>
+                <a:spcPts val="0"/>
+              </a:spcBef>
+              <a:spcAft>
+                <a:spcPts val="0"/>
+              </a:spcAft>
+              <a:buClrTx/>
+              <a:buSzTx/>
+              <a:buFontTx/>
+              <a:buNone/>
+              <a:tabLst/>
+            </a:pPr>
+            <a:endParaRPr kumimoji="0" lang="ru-RU" sz="1800" b="0" i="0" u="none" strike="noStrike" cap="none" spc="0" normalizeH="0" baseline="0">
+              <a:ln>
+                <a:noFill/>
+              </a:ln>
+              <a:solidFill>
+                <a:srgbClr val="000000"/>
+              </a:solidFill>
+              <a:effectLst/>
+              <a:uFillTx/>
+              <a:latin typeface="Arial"/>
               <a:ea typeface="Arial"/>
               <a:cs typeface="Arial"/>
               <a:sym typeface="Arial"/>
@@ -31574,6 +33672,88 @@
           </a:prstGeom>
         </p:spPr>
       </p:pic>
+      <p:sp>
+        <p:nvSpPr>
+          <p:cNvPr id="7" name="Прямоугольник 6">
+            <a:extLst>
+              <a:ext uri="{FF2B5EF4-FFF2-40B4-BE49-F238E27FC236}">
+                <a16:creationId xmlns:a16="http://schemas.microsoft.com/office/drawing/2014/main" id="{EE4C8503-7455-49B9-8A5E-C67C95CC2575}"/>
+              </a:ext>
+            </a:extLst>
+          </p:cNvPr>
+          <p:cNvSpPr/>
+          <p:nvPr/>
+        </p:nvSpPr>
+        <p:spPr>
+          <a:xfrm>
+            <a:off x="1047750" y="6410632"/>
+            <a:ext cx="2743200" cy="285136"/>
+          </a:xfrm>
+          <a:prstGeom prst="rect">
+            <a:avLst/>
+          </a:prstGeom>
+          <a:solidFill>
+            <a:srgbClr val="FFFFFF"/>
+          </a:solidFill>
+          <a:ln w="12700" cap="flat">
+            <a:noFill/>
+            <a:prstDash val="solid"/>
+            <a:miter lim="800000"/>
+          </a:ln>
+          <a:effectLst/>
+          <a:sp3d/>
+        </p:spPr>
+        <p:style>
+          <a:lnRef idx="0">
+            <a:scrgbClr r="0" g="0" b="0"/>
+          </a:lnRef>
+          <a:fillRef idx="0">
+            <a:scrgbClr r="0" g="0" b="0"/>
+          </a:fillRef>
+          <a:effectRef idx="0">
+            <a:scrgbClr r="0" g="0" b="0"/>
+          </a:effectRef>
+          <a:fontRef idx="none"/>
+        </p:style>
+        <p:txBody>
+          <a:bodyPr rot="0" spcFirstLastPara="1" vertOverflow="overflow" horzOverflow="overflow" vert="horz" wrap="square" lIns="45719" tIns="45719" rIns="45719" bIns="45719" numCol="1" spcCol="38100" rtlCol="0" anchor="ctr">
+            <a:spAutoFit/>
+          </a:bodyPr>
+          <a:lstStyle/>
+          <a:p>
+            <a:pPr marL="0" marR="0" indent="0" algn="l" defTabSz="457200" rtl="0" fontAlgn="auto" latinLnBrk="0" hangingPunct="0">
+              <a:lnSpc>
+                <a:spcPct val="100000"/>
+              </a:lnSpc>
+              <a:spcBef>
+                <a:spcPts val="0"/>
+              </a:spcBef>
+              <a:spcAft>
+                <a:spcPts val="0"/>
+              </a:spcAft>
+              <a:buClrTx/>
+              <a:buSzTx/>
+              <a:buFontTx/>
+              <a:buNone/>
+              <a:tabLst/>
+            </a:pPr>
+            <a:endParaRPr kumimoji="0" lang="ru-RU" sz="1800" b="0" i="0" u="none" strike="noStrike" cap="none" spc="0" normalizeH="0" baseline="0">
+              <a:ln>
+                <a:noFill/>
+              </a:ln>
+              <a:solidFill>
+                <a:srgbClr val="000000"/>
+              </a:solidFill>
+              <a:effectLst/>
+              <a:uFillTx/>
+              <a:latin typeface="Arial"/>
+              <a:ea typeface="Arial"/>
+              <a:cs typeface="Arial"/>
+              <a:sym typeface="Arial"/>
+            </a:endParaRPr>
+          </a:p>
+        </p:txBody>
+      </p:sp>
     </p:spTree>
     <p:extLst>
       <p:ext uri="{BB962C8B-B14F-4D97-AF65-F5344CB8AC3E}">
@@ -31703,8 +33883,8 @@
         </p:nvSpPr>
         <p:spPr>
           <a:xfrm>
-            <a:off x="1337187" y="1622732"/>
-            <a:ext cx="10279626" cy="3587136"/>
+            <a:off x="980766" y="975032"/>
+            <a:ext cx="10658783" cy="5341462"/>
           </a:xfrm>
           <a:prstGeom prst="rect">
             <a:avLst/>
@@ -31744,20 +33924,20 @@
               </a:spcAft>
             </a:pPr>
             <a:r>
-              <a:rPr lang="ru-RU" sz="2400" dirty="0">
+              <a:rPr lang="ru-RU" sz="2800" dirty="0">
                 <a:solidFill>
                   <a:srgbClr val="0F1115"/>
                 </a:solidFill>
                 <a:effectLst/>
-                <a:latin typeface="Times New Roman" panose="02020603050405020304" pitchFamily="18" charset="0"/>
+                <a:latin typeface="+mn-lt"/>
                 <a:ea typeface="Times New Roman" panose="02020603050405020304" pitchFamily="18" charset="0"/>
                 <a:cs typeface="Times New Roman" panose="02020603050405020304" pitchFamily="18" charset="0"/>
               </a:rPr>
               <a:t>В ходе анализа структуры кассового чека были выделены постоянные и переменные реквизиты, а также идентифицированы обязательные элементы, предусмотренные Федеральным законом № 54-ФЗ.</a:t>
             </a:r>
-            <a:endParaRPr lang="en-US" sz="2400" dirty="0">
+            <a:endParaRPr lang="en-US" sz="2800" dirty="0">
               <a:effectLst/>
-              <a:latin typeface="Calibri" panose="020F0502020204030204" pitchFamily="34" charset="0"/>
+              <a:latin typeface="+mn-lt"/>
               <a:ea typeface="Calibri" panose="020F0502020204030204" pitchFamily="34" charset="0"/>
               <a:cs typeface="Times New Roman" panose="02020603050405020304" pitchFamily="18" charset="0"/>
             </a:endParaRPr>
@@ -31775,26 +33955,26 @@
               </a:spcAft>
             </a:pPr>
             <a:r>
-              <a:rPr lang="ru-RU" sz="2400" b="1" dirty="0">
-                <a:effectLst/>
-                <a:latin typeface="Times New Roman" panose="02020603050405020304" pitchFamily="18" charset="0"/>
+              <a:rPr lang="ru-RU" sz="2800" b="1" dirty="0">
+                <a:effectLst/>
+                <a:latin typeface="+mn-lt"/>
                 <a:ea typeface="Calibri" panose="020F0502020204030204" pitchFamily="34" charset="0"/>
                 <a:cs typeface="Times New Roman" panose="02020603050405020304" pitchFamily="18" charset="0"/>
               </a:rPr>
               <a:t>Кассовый чек </a:t>
             </a:r>
             <a:r>
-              <a:rPr lang="ru-RU" sz="2400" dirty="0">
-                <a:effectLst/>
-                <a:latin typeface="Times New Roman" panose="02020603050405020304" pitchFamily="18" charset="0"/>
+              <a:rPr lang="ru-RU" sz="2800" dirty="0">
+                <a:effectLst/>
+                <a:latin typeface="+mn-lt"/>
                 <a:ea typeface="Calibri" panose="020F0502020204030204" pitchFamily="34" charset="0"/>
                 <a:cs typeface="Times New Roman" panose="02020603050405020304" pitchFamily="18" charset="0"/>
               </a:rPr>
               <a:t>— это документ, подтверждающий факт оплаты товаров или услуг. Его структура включает следующие обязательные реквизиты.</a:t>
             </a:r>
-            <a:endParaRPr lang="en-US" sz="2400" dirty="0">
+            <a:endParaRPr lang="en-US" sz="2800" dirty="0">
               <a:effectLst/>
-              <a:latin typeface="Calibri" panose="020F0502020204030204" pitchFamily="34" charset="0"/>
+              <a:latin typeface="+mn-lt"/>
               <a:ea typeface="Calibri" panose="020F0502020204030204" pitchFamily="34" charset="0"/>
               <a:cs typeface="Times New Roman" panose="02020603050405020304" pitchFamily="18" charset="0"/>
             </a:endParaRPr>
@@ -31827,7 +34007,7 @@
         </p:nvSpPr>
         <p:spPr>
           <a:xfrm>
-            <a:off x="980767" y="167609"/>
+            <a:off x="980767" y="186659"/>
             <a:ext cx="8937523" cy="523218"/>
           </a:xfrm>
           <a:prstGeom prst="rect">
@@ -31998,6 +34178,88 @@
               <a:effectLst/>
               <a:uFillTx/>
               <a:latin typeface="+mn-lt"/>
+              <a:ea typeface="Arial"/>
+              <a:cs typeface="Arial"/>
+              <a:sym typeface="Arial"/>
+            </a:endParaRPr>
+          </a:p>
+        </p:txBody>
+      </p:sp>
+      <p:sp>
+        <p:nvSpPr>
+          <p:cNvPr id="7" name="Прямоугольник 6">
+            <a:extLst>
+              <a:ext uri="{FF2B5EF4-FFF2-40B4-BE49-F238E27FC236}">
+                <a16:creationId xmlns:a16="http://schemas.microsoft.com/office/drawing/2014/main" id="{A03B36CC-D31B-4790-AF82-5A258143183C}"/>
+              </a:ext>
+            </a:extLst>
+          </p:cNvPr>
+          <p:cNvSpPr/>
+          <p:nvPr/>
+        </p:nvSpPr>
+        <p:spPr>
+          <a:xfrm>
+            <a:off x="1047750" y="6410632"/>
+            <a:ext cx="2743200" cy="285136"/>
+          </a:xfrm>
+          <a:prstGeom prst="rect">
+            <a:avLst/>
+          </a:prstGeom>
+          <a:solidFill>
+            <a:srgbClr val="FFFFFF"/>
+          </a:solidFill>
+          <a:ln w="12700" cap="flat">
+            <a:noFill/>
+            <a:prstDash val="solid"/>
+            <a:miter lim="800000"/>
+          </a:ln>
+          <a:effectLst/>
+          <a:sp3d/>
+        </p:spPr>
+        <p:style>
+          <a:lnRef idx="0">
+            <a:scrgbClr r="0" g="0" b="0"/>
+          </a:lnRef>
+          <a:fillRef idx="0">
+            <a:scrgbClr r="0" g="0" b="0"/>
+          </a:fillRef>
+          <a:effectRef idx="0">
+            <a:scrgbClr r="0" g="0" b="0"/>
+          </a:effectRef>
+          <a:fontRef idx="none"/>
+        </p:style>
+        <p:txBody>
+          <a:bodyPr rot="0" spcFirstLastPara="1" vertOverflow="overflow" horzOverflow="overflow" vert="horz" wrap="square" lIns="45719" tIns="45719" rIns="45719" bIns="45719" numCol="1" spcCol="38100" rtlCol="0" anchor="ctr">
+            <a:spAutoFit/>
+          </a:bodyPr>
+          <a:lstStyle/>
+          <a:p>
+            <a:pPr marL="0" marR="0" indent="0" algn="l" defTabSz="457200" rtl="0" fontAlgn="auto" latinLnBrk="0" hangingPunct="0">
+              <a:lnSpc>
+                <a:spcPct val="100000"/>
+              </a:lnSpc>
+              <a:spcBef>
+                <a:spcPts val="0"/>
+              </a:spcBef>
+              <a:spcAft>
+                <a:spcPts val="0"/>
+              </a:spcAft>
+              <a:buClrTx/>
+              <a:buSzTx/>
+              <a:buFontTx/>
+              <a:buNone/>
+              <a:tabLst/>
+            </a:pPr>
+            <a:endParaRPr kumimoji="0" lang="ru-RU" sz="1800" b="0" i="0" u="none" strike="noStrike" cap="none" spc="0" normalizeH="0" baseline="0">
+              <a:ln>
+                <a:noFill/>
+              </a:ln>
+              <a:solidFill>
+                <a:srgbClr val="000000"/>
+              </a:solidFill>
+              <a:effectLst/>
+              <a:uFillTx/>
+              <a:latin typeface="Arial"/>
               <a:ea typeface="Arial"/>
               <a:cs typeface="Arial"/>
               <a:sym typeface="Arial"/>
@@ -32444,102 +34706,6 @@
       </p:sp>
       <p:sp>
         <p:nvSpPr>
-          <p:cNvPr id="5" name="TextBox 4">
-            <a:extLst>
-              <a:ext uri="{FF2B5EF4-FFF2-40B4-BE49-F238E27FC236}">
-                <a16:creationId xmlns:a16="http://schemas.microsoft.com/office/drawing/2014/main" id="{4959C283-2F3B-9343-D0E8-821A55D5CA6C}"/>
-              </a:ext>
-            </a:extLst>
-          </p:cNvPr>
-          <p:cNvSpPr txBox="1"/>
-          <p:nvPr/>
-        </p:nvSpPr>
-        <p:spPr>
-          <a:xfrm>
-            <a:off x="963561" y="167609"/>
-            <a:ext cx="8534400" cy="523218"/>
-          </a:xfrm>
-          <a:prstGeom prst="rect">
-            <a:avLst/>
-          </a:prstGeom>
-          <a:noFill/>
-          <a:ln w="12700" cap="flat">
-            <a:noFill/>
-            <a:miter lim="400000"/>
-          </a:ln>
-          <a:effectLst/>
-          <a:sp3d/>
-        </p:spPr>
-        <p:style>
-          <a:lnRef idx="0">
-            <a:scrgbClr r="0" g="0" b="0"/>
-          </a:lnRef>
-          <a:fillRef idx="0">
-            <a:scrgbClr r="0" g="0" b="0"/>
-          </a:fillRef>
-          <a:effectRef idx="0">
-            <a:scrgbClr r="0" g="0" b="0"/>
-          </a:effectRef>
-          <a:fontRef idx="none"/>
-        </p:style>
-        <p:txBody>
-          <a:bodyPr rot="0" spcFirstLastPara="1" vertOverflow="overflow" horzOverflow="overflow" vert="horz" wrap="square" lIns="45719" tIns="45719" rIns="45719" bIns="45719" numCol="1" spcCol="38100" rtlCol="0" anchor="t">
-            <a:spAutoFit/>
-          </a:bodyPr>
-          <a:lstStyle/>
-          <a:p>
-            <a:pPr marL="0" marR="0" indent="0" algn="l" defTabSz="457200" rtl="0" fontAlgn="auto" latinLnBrk="0" hangingPunct="0">
-              <a:lnSpc>
-                <a:spcPct val="100000"/>
-              </a:lnSpc>
-              <a:spcBef>
-                <a:spcPts val="0"/>
-              </a:spcBef>
-              <a:spcAft>
-                <a:spcPts val="0"/>
-              </a:spcAft>
-              <a:buClrTx/>
-              <a:buSzTx/>
-              <a:buFontTx/>
-              <a:buNone/>
-              <a:tabLst/>
-            </a:pPr>
-            <a:r>
-              <a:rPr kumimoji="0" lang="ru-RU" sz="2800" b="1" i="0" u="none" strike="noStrike" cap="none" spc="0" normalizeH="0" baseline="0" dirty="0">
-                <a:ln>
-                  <a:noFill/>
-                </a:ln>
-                <a:solidFill>
-                  <a:schemeClr val="accent1"/>
-                </a:solidFill>
-                <a:effectLst/>
-                <a:uFillTx/>
-                <a:latin typeface="+mn-lt"/>
-                <a:ea typeface="Arial"/>
-                <a:cs typeface="Arial"/>
-                <a:sym typeface="Arial"/>
-              </a:rPr>
-              <a:t>РЕКВИЗИТНЫЙ АНАЛИЗ ДОКУМЕНТА</a:t>
-            </a:r>
-            <a:endParaRPr kumimoji="0" lang="en-US" sz="2800" b="1" i="0" u="none" strike="noStrike" cap="none" spc="0" normalizeH="0" baseline="0" dirty="0">
-              <a:ln>
-                <a:noFill/>
-              </a:ln>
-              <a:solidFill>
-                <a:schemeClr val="accent1"/>
-              </a:solidFill>
-              <a:effectLst/>
-              <a:uFillTx/>
-              <a:latin typeface="+mn-lt"/>
-              <a:ea typeface="Arial"/>
-              <a:cs typeface="Arial"/>
-              <a:sym typeface="Arial"/>
-            </a:endParaRPr>
-          </a:p>
-        </p:txBody>
-      </p:sp>
-      <p:sp>
-        <p:nvSpPr>
           <p:cNvPr id="6" name="TextBox 5">
             <a:extLst>
               <a:ext uri="{FF2B5EF4-FFF2-40B4-BE49-F238E27FC236}">
@@ -32615,6 +34781,184 @@
               </a:ln>
               <a:solidFill>
                 <a:schemeClr val="bg1"/>
+              </a:solidFill>
+              <a:effectLst/>
+              <a:uFillTx/>
+              <a:latin typeface="+mn-lt"/>
+              <a:ea typeface="Arial"/>
+              <a:cs typeface="Arial"/>
+              <a:sym typeface="Arial"/>
+            </a:endParaRPr>
+          </a:p>
+        </p:txBody>
+      </p:sp>
+      <p:sp>
+        <p:nvSpPr>
+          <p:cNvPr id="7" name="Прямоугольник 6">
+            <a:extLst>
+              <a:ext uri="{FF2B5EF4-FFF2-40B4-BE49-F238E27FC236}">
+                <a16:creationId xmlns:a16="http://schemas.microsoft.com/office/drawing/2014/main" id="{73610E19-D359-4B9F-B603-9DACEDDE834E}"/>
+              </a:ext>
+            </a:extLst>
+          </p:cNvPr>
+          <p:cNvSpPr/>
+          <p:nvPr/>
+        </p:nvSpPr>
+        <p:spPr>
+          <a:xfrm>
+            <a:off x="1047750" y="6410632"/>
+            <a:ext cx="2743200" cy="285136"/>
+          </a:xfrm>
+          <a:prstGeom prst="rect">
+            <a:avLst/>
+          </a:prstGeom>
+          <a:solidFill>
+            <a:srgbClr val="FFFFFF"/>
+          </a:solidFill>
+          <a:ln w="12700" cap="flat">
+            <a:noFill/>
+            <a:prstDash val="solid"/>
+            <a:miter lim="800000"/>
+          </a:ln>
+          <a:effectLst/>
+          <a:sp3d/>
+        </p:spPr>
+        <p:style>
+          <a:lnRef idx="0">
+            <a:scrgbClr r="0" g="0" b="0"/>
+          </a:lnRef>
+          <a:fillRef idx="0">
+            <a:scrgbClr r="0" g="0" b="0"/>
+          </a:fillRef>
+          <a:effectRef idx="0">
+            <a:scrgbClr r="0" g="0" b="0"/>
+          </a:effectRef>
+          <a:fontRef idx="none"/>
+        </p:style>
+        <p:txBody>
+          <a:bodyPr rot="0" spcFirstLastPara="1" vertOverflow="overflow" horzOverflow="overflow" vert="horz" wrap="square" lIns="45719" tIns="45719" rIns="45719" bIns="45719" numCol="1" spcCol="38100" rtlCol="0" anchor="ctr">
+            <a:spAutoFit/>
+          </a:bodyPr>
+          <a:lstStyle/>
+          <a:p>
+            <a:pPr marL="0" marR="0" indent="0" algn="l" defTabSz="457200" rtl="0" fontAlgn="auto" latinLnBrk="0" hangingPunct="0">
+              <a:lnSpc>
+                <a:spcPct val="100000"/>
+              </a:lnSpc>
+              <a:spcBef>
+                <a:spcPts val="0"/>
+              </a:spcBef>
+              <a:spcAft>
+                <a:spcPts val="0"/>
+              </a:spcAft>
+              <a:buClrTx/>
+              <a:buSzTx/>
+              <a:buFontTx/>
+              <a:buNone/>
+              <a:tabLst/>
+            </a:pPr>
+            <a:endParaRPr kumimoji="0" lang="ru-RU" sz="1800" b="0" i="0" u="none" strike="noStrike" cap="none" spc="0" normalizeH="0" baseline="0">
+              <a:ln>
+                <a:noFill/>
+              </a:ln>
+              <a:solidFill>
+                <a:srgbClr val="000000"/>
+              </a:solidFill>
+              <a:effectLst/>
+              <a:uFillTx/>
+              <a:latin typeface="Arial"/>
+              <a:ea typeface="Arial"/>
+              <a:cs typeface="Arial"/>
+              <a:sym typeface="Arial"/>
+            </a:endParaRPr>
+          </a:p>
+        </p:txBody>
+      </p:sp>
+      <p:sp>
+        <p:nvSpPr>
+          <p:cNvPr id="8" name="TextBox 7">
+            <a:extLst>
+              <a:ext uri="{FF2B5EF4-FFF2-40B4-BE49-F238E27FC236}">
+                <a16:creationId xmlns:a16="http://schemas.microsoft.com/office/drawing/2014/main" id="{D9A310D6-9F57-4E21-88B3-BDF785149FDB}"/>
+              </a:ext>
+            </a:extLst>
+          </p:cNvPr>
+          <p:cNvSpPr txBox="1"/>
+          <p:nvPr/>
+        </p:nvSpPr>
+        <p:spPr>
+          <a:xfrm>
+            <a:off x="980767" y="186659"/>
+            <a:ext cx="8937523" cy="523218"/>
+          </a:xfrm>
+          <a:prstGeom prst="rect">
+            <a:avLst/>
+          </a:prstGeom>
+          <a:noFill/>
+          <a:ln w="12700" cap="flat">
+            <a:noFill/>
+            <a:miter lim="400000"/>
+          </a:ln>
+          <a:effectLst/>
+          <a:sp3d/>
+        </p:spPr>
+        <p:style>
+          <a:lnRef idx="0">
+            <a:scrgbClr r="0" g="0" b="0"/>
+          </a:lnRef>
+          <a:fillRef idx="0">
+            <a:scrgbClr r="0" g="0" b="0"/>
+          </a:fillRef>
+          <a:effectRef idx="0">
+            <a:scrgbClr r="0" g="0" b="0"/>
+          </a:effectRef>
+          <a:fontRef idx="none"/>
+        </p:style>
+        <p:txBody>
+          <a:bodyPr rot="0" spcFirstLastPara="1" vertOverflow="overflow" horzOverflow="overflow" vert="horz" wrap="square" lIns="45719" tIns="45719" rIns="45719" bIns="45719" numCol="1" spcCol="38100" rtlCol="0" anchor="t">
+            <a:spAutoFit/>
+          </a:bodyPr>
+          <a:lstStyle/>
+          <a:p>
+            <a:pPr marL="0" marR="0" indent="0" algn="l" defTabSz="457200" rtl="0" fontAlgn="auto" latinLnBrk="0" hangingPunct="0">
+              <a:lnSpc>
+                <a:spcPct val="100000"/>
+              </a:lnSpc>
+              <a:spcBef>
+                <a:spcPts val="0"/>
+              </a:spcBef>
+              <a:spcAft>
+                <a:spcPts val="0"/>
+              </a:spcAft>
+              <a:buClrTx/>
+              <a:buSzTx/>
+              <a:buFontTx/>
+              <a:buNone/>
+              <a:tabLst/>
+            </a:pPr>
+            <a:r>
+              <a:rPr kumimoji="0" lang="ru-RU" sz="2800" b="1" i="0" u="none" strike="noStrike" cap="none" spc="0" normalizeH="0" baseline="0" dirty="0">
+                <a:ln>
+                  <a:noFill/>
+                </a:ln>
+                <a:solidFill>
+                  <a:schemeClr val="accent1"/>
+                </a:solidFill>
+                <a:effectLst/>
+                <a:uFillTx/>
+                <a:latin typeface="+mn-lt"/>
+                <a:ea typeface="Arial"/>
+                <a:cs typeface="Arial"/>
+                <a:sym typeface="Arial"/>
+              </a:rPr>
+              <a:t>РЕКВИЗИТНЫЙ АНАЛИЗ ДОКУМЕНТА</a:t>
+            </a:r>
+            <a:endParaRPr kumimoji="0" lang="en-US" sz="2800" b="1" i="0" u="none" strike="noStrike" cap="none" spc="0" normalizeH="0" baseline="0" dirty="0">
+              <a:ln>
+                <a:noFill/>
+              </a:ln>
+              <a:solidFill>
+                <a:schemeClr val="accent1"/>
               </a:solidFill>
               <a:effectLst/>
               <a:uFillTx/>
@@ -33133,102 +35477,6 @@
       </p:sp>
       <p:sp>
         <p:nvSpPr>
-          <p:cNvPr id="5" name="TextBox 4">
-            <a:extLst>
-              <a:ext uri="{FF2B5EF4-FFF2-40B4-BE49-F238E27FC236}">
-                <a16:creationId xmlns:a16="http://schemas.microsoft.com/office/drawing/2014/main" id="{4959C283-2F3B-9343-D0E8-821A55D5CA6C}"/>
-              </a:ext>
-            </a:extLst>
-          </p:cNvPr>
-          <p:cNvSpPr txBox="1"/>
-          <p:nvPr/>
-        </p:nvSpPr>
-        <p:spPr>
-          <a:xfrm>
-            <a:off x="994041" y="146344"/>
-            <a:ext cx="8681884" cy="523218"/>
-          </a:xfrm>
-          <a:prstGeom prst="rect">
-            <a:avLst/>
-          </a:prstGeom>
-          <a:noFill/>
-          <a:ln w="12700" cap="flat">
-            <a:noFill/>
-            <a:miter lim="400000"/>
-          </a:ln>
-          <a:effectLst/>
-          <a:sp3d/>
-        </p:spPr>
-        <p:style>
-          <a:lnRef idx="0">
-            <a:scrgbClr r="0" g="0" b="0"/>
-          </a:lnRef>
-          <a:fillRef idx="0">
-            <a:scrgbClr r="0" g="0" b="0"/>
-          </a:fillRef>
-          <a:effectRef idx="0">
-            <a:scrgbClr r="0" g="0" b="0"/>
-          </a:effectRef>
-          <a:fontRef idx="none"/>
-        </p:style>
-        <p:txBody>
-          <a:bodyPr rot="0" spcFirstLastPara="1" vertOverflow="overflow" horzOverflow="overflow" vert="horz" wrap="square" lIns="45719" tIns="45719" rIns="45719" bIns="45719" numCol="1" spcCol="38100" rtlCol="0" anchor="t">
-            <a:spAutoFit/>
-          </a:bodyPr>
-          <a:lstStyle/>
-          <a:p>
-            <a:pPr marL="0" marR="0" indent="0" algn="l" defTabSz="457200" rtl="0" fontAlgn="auto" latinLnBrk="0" hangingPunct="0">
-              <a:lnSpc>
-                <a:spcPct val="100000"/>
-              </a:lnSpc>
-              <a:spcBef>
-                <a:spcPts val="0"/>
-              </a:spcBef>
-              <a:spcAft>
-                <a:spcPts val="0"/>
-              </a:spcAft>
-              <a:buClrTx/>
-              <a:buSzTx/>
-              <a:buFontTx/>
-              <a:buNone/>
-              <a:tabLst/>
-            </a:pPr>
-            <a:r>
-              <a:rPr kumimoji="0" lang="ru-RU" sz="2800" b="1" i="0" u="none" strike="noStrike" cap="none" spc="0" normalizeH="0" baseline="0" dirty="0">
-                <a:ln>
-                  <a:noFill/>
-                </a:ln>
-                <a:solidFill>
-                  <a:schemeClr val="accent1"/>
-                </a:solidFill>
-                <a:effectLst/>
-                <a:uFillTx/>
-                <a:latin typeface="+mn-lt"/>
-                <a:ea typeface="Arial"/>
-                <a:cs typeface="Arial"/>
-                <a:sym typeface="Arial"/>
-              </a:rPr>
-              <a:t>РЕКВИЗИТНЫЙ АНАЛИЗ ДОКУМЕНТА</a:t>
-            </a:r>
-            <a:endParaRPr kumimoji="0" lang="en-US" sz="2800" b="1" i="0" u="none" strike="noStrike" cap="none" spc="0" normalizeH="0" baseline="0" dirty="0">
-              <a:ln>
-                <a:noFill/>
-              </a:ln>
-              <a:solidFill>
-                <a:schemeClr val="accent1"/>
-              </a:solidFill>
-              <a:effectLst/>
-              <a:uFillTx/>
-              <a:latin typeface="+mn-lt"/>
-              <a:ea typeface="Arial"/>
-              <a:cs typeface="Arial"/>
-              <a:sym typeface="Arial"/>
-            </a:endParaRPr>
-          </a:p>
-        </p:txBody>
-      </p:sp>
-      <p:sp>
-        <p:nvSpPr>
           <p:cNvPr id="6" name="TextBox 5">
             <a:extLst>
               <a:ext uri="{FF2B5EF4-FFF2-40B4-BE49-F238E27FC236}">
@@ -33312,6 +35560,184 @@
               </a:ln>
               <a:solidFill>
                 <a:schemeClr val="bg1"/>
+              </a:solidFill>
+              <a:effectLst/>
+              <a:uFillTx/>
+              <a:latin typeface="+mn-lt"/>
+              <a:ea typeface="Arial"/>
+              <a:cs typeface="Arial"/>
+              <a:sym typeface="Arial"/>
+            </a:endParaRPr>
+          </a:p>
+        </p:txBody>
+      </p:sp>
+      <p:sp>
+        <p:nvSpPr>
+          <p:cNvPr id="7" name="Прямоугольник 6">
+            <a:extLst>
+              <a:ext uri="{FF2B5EF4-FFF2-40B4-BE49-F238E27FC236}">
+                <a16:creationId xmlns:a16="http://schemas.microsoft.com/office/drawing/2014/main" id="{F164C5CC-5C2D-426E-8BD7-687581871316}"/>
+              </a:ext>
+            </a:extLst>
+          </p:cNvPr>
+          <p:cNvSpPr/>
+          <p:nvPr/>
+        </p:nvSpPr>
+        <p:spPr>
+          <a:xfrm>
+            <a:off x="1047750" y="6410632"/>
+            <a:ext cx="2743200" cy="285136"/>
+          </a:xfrm>
+          <a:prstGeom prst="rect">
+            <a:avLst/>
+          </a:prstGeom>
+          <a:solidFill>
+            <a:srgbClr val="FFFFFF"/>
+          </a:solidFill>
+          <a:ln w="12700" cap="flat">
+            <a:noFill/>
+            <a:prstDash val="solid"/>
+            <a:miter lim="800000"/>
+          </a:ln>
+          <a:effectLst/>
+          <a:sp3d/>
+        </p:spPr>
+        <p:style>
+          <a:lnRef idx="0">
+            <a:scrgbClr r="0" g="0" b="0"/>
+          </a:lnRef>
+          <a:fillRef idx="0">
+            <a:scrgbClr r="0" g="0" b="0"/>
+          </a:fillRef>
+          <a:effectRef idx="0">
+            <a:scrgbClr r="0" g="0" b="0"/>
+          </a:effectRef>
+          <a:fontRef idx="none"/>
+        </p:style>
+        <p:txBody>
+          <a:bodyPr rot="0" spcFirstLastPara="1" vertOverflow="overflow" horzOverflow="overflow" vert="horz" wrap="square" lIns="45719" tIns="45719" rIns="45719" bIns="45719" numCol="1" spcCol="38100" rtlCol="0" anchor="ctr">
+            <a:spAutoFit/>
+          </a:bodyPr>
+          <a:lstStyle/>
+          <a:p>
+            <a:pPr marL="0" marR="0" indent="0" algn="l" defTabSz="457200" rtl="0" fontAlgn="auto" latinLnBrk="0" hangingPunct="0">
+              <a:lnSpc>
+                <a:spcPct val="100000"/>
+              </a:lnSpc>
+              <a:spcBef>
+                <a:spcPts val="0"/>
+              </a:spcBef>
+              <a:spcAft>
+                <a:spcPts val="0"/>
+              </a:spcAft>
+              <a:buClrTx/>
+              <a:buSzTx/>
+              <a:buFontTx/>
+              <a:buNone/>
+              <a:tabLst/>
+            </a:pPr>
+            <a:endParaRPr kumimoji="0" lang="ru-RU" sz="1800" b="0" i="0" u="none" strike="noStrike" cap="none" spc="0" normalizeH="0" baseline="0">
+              <a:ln>
+                <a:noFill/>
+              </a:ln>
+              <a:solidFill>
+                <a:srgbClr val="000000"/>
+              </a:solidFill>
+              <a:effectLst/>
+              <a:uFillTx/>
+              <a:latin typeface="Arial"/>
+              <a:ea typeface="Arial"/>
+              <a:cs typeface="Arial"/>
+              <a:sym typeface="Arial"/>
+            </a:endParaRPr>
+          </a:p>
+        </p:txBody>
+      </p:sp>
+      <p:sp>
+        <p:nvSpPr>
+          <p:cNvPr id="8" name="TextBox 7">
+            <a:extLst>
+              <a:ext uri="{FF2B5EF4-FFF2-40B4-BE49-F238E27FC236}">
+                <a16:creationId xmlns:a16="http://schemas.microsoft.com/office/drawing/2014/main" id="{4CD83146-9BEB-43C1-B448-58B0AD29007A}"/>
+              </a:ext>
+            </a:extLst>
+          </p:cNvPr>
+          <p:cNvSpPr txBox="1"/>
+          <p:nvPr/>
+        </p:nvSpPr>
+        <p:spPr>
+          <a:xfrm>
+            <a:off x="980767" y="186659"/>
+            <a:ext cx="8937523" cy="523218"/>
+          </a:xfrm>
+          <a:prstGeom prst="rect">
+            <a:avLst/>
+          </a:prstGeom>
+          <a:noFill/>
+          <a:ln w="12700" cap="flat">
+            <a:noFill/>
+            <a:miter lim="400000"/>
+          </a:ln>
+          <a:effectLst/>
+          <a:sp3d/>
+        </p:spPr>
+        <p:style>
+          <a:lnRef idx="0">
+            <a:scrgbClr r="0" g="0" b="0"/>
+          </a:lnRef>
+          <a:fillRef idx="0">
+            <a:scrgbClr r="0" g="0" b="0"/>
+          </a:fillRef>
+          <a:effectRef idx="0">
+            <a:scrgbClr r="0" g="0" b="0"/>
+          </a:effectRef>
+          <a:fontRef idx="none"/>
+        </p:style>
+        <p:txBody>
+          <a:bodyPr rot="0" spcFirstLastPara="1" vertOverflow="overflow" horzOverflow="overflow" vert="horz" wrap="square" lIns="45719" tIns="45719" rIns="45719" bIns="45719" numCol="1" spcCol="38100" rtlCol="0" anchor="t">
+            <a:spAutoFit/>
+          </a:bodyPr>
+          <a:lstStyle/>
+          <a:p>
+            <a:pPr marL="0" marR="0" indent="0" algn="l" defTabSz="457200" rtl="0" fontAlgn="auto" latinLnBrk="0" hangingPunct="0">
+              <a:lnSpc>
+                <a:spcPct val="100000"/>
+              </a:lnSpc>
+              <a:spcBef>
+                <a:spcPts val="0"/>
+              </a:spcBef>
+              <a:spcAft>
+                <a:spcPts val="0"/>
+              </a:spcAft>
+              <a:buClrTx/>
+              <a:buSzTx/>
+              <a:buFontTx/>
+              <a:buNone/>
+              <a:tabLst/>
+            </a:pPr>
+            <a:r>
+              <a:rPr kumimoji="0" lang="ru-RU" sz="2800" b="1" i="0" u="none" strike="noStrike" cap="none" spc="0" normalizeH="0" baseline="0" dirty="0">
+                <a:ln>
+                  <a:noFill/>
+                </a:ln>
+                <a:solidFill>
+                  <a:schemeClr val="accent1"/>
+                </a:solidFill>
+                <a:effectLst/>
+                <a:uFillTx/>
+                <a:latin typeface="+mn-lt"/>
+                <a:ea typeface="Arial"/>
+                <a:cs typeface="Arial"/>
+                <a:sym typeface="Arial"/>
+              </a:rPr>
+              <a:t>РЕКВИЗИТНЫЙ АНАЛИЗ ДОКУМЕНТА</a:t>
+            </a:r>
+            <a:endParaRPr kumimoji="0" lang="en-US" sz="2800" b="1" i="0" u="none" strike="noStrike" cap="none" spc="0" normalizeH="0" baseline="0" dirty="0">
+              <a:ln>
+                <a:noFill/>
+              </a:ln>
+              <a:solidFill>
+                <a:schemeClr val="accent1"/>
               </a:solidFill>
               <a:effectLst/>
               <a:uFillTx/>
